--- a/docs/content/05-teaching-resources/slides/core/18-business-commercial-and-financial-awareness.pptx
+++ b/docs/content/05-teaching-resources/slides/core/18-business-commercial-and-financial-awareness.pptx
@@ -8,12 +8,16 @@
     <p:sldId id="256" r:id="rId7"/>
     <p:sldId id="257" r:id="rId8"/>
     <p:sldId id="258" r:id="rId9"/>
-    <p:sldId id="259" r:id="rId11"/>
+    <p:sldId id="259" r:id="rId10"/>
     <p:sldId id="260" r:id="rId12"/>
     <p:sldId id="261" r:id="rId13"/>
     <p:sldId id="262" r:id="rId14"/>
     <p:sldId id="263" r:id="rId15"/>
     <p:sldId id="264" r:id="rId16"/>
+    <p:sldId id="265" r:id="rId17"/>
+    <p:sldId id="266" r:id="rId18"/>
+    <p:sldId id="267" r:id="rId19"/>
+    <p:sldId id="268" r:id="rId20"/>
   </p:sldIdLst>
   <p:sldSz cx="12191695" cy="6858000" type="screen4x3"/>
   <p:notesSz cx="6858000" cy="9144000"/>
@@ -580,7 +584,22 @@
           <a:lstStyle/>
           <a:p>
             <a:r>
-              <a:t>Give students a few minutes to answer on mini whiteboards or paper, then reveal the answers on the next slide.</a:t>
+              <a:t>Answers:</a:t>
+            </a:r>
+          </a:p>
+          <a:p>
+            <a:r>
+              <a:t>1. One that makes the product worth more.</a:t>
+            </a:r>
+          </a:p>
+          <a:p>
+            <a:r>
+              <a:t>2. E.g. waiting, unnecessary transport.</a:t>
+            </a:r>
+          </a:p>
+          <a:p>
+            <a:r>
+              <a:t>3. To stay competitive through innovation.</a:t>
             </a:r>
           </a:p>
         </p:txBody>
@@ -650,7 +669,22 @@
           <a:lstStyle/>
           <a:p>
             <a:r>
-              <a:t>Talk through any answers the class found difficult.</a:t>
+              <a:t>Answers:</a:t>
+            </a:r>
+          </a:p>
+          <a:p>
+            <a:r>
+              <a:t>1. Where revenue equals total costs.</a:t>
+            </a:r>
+          </a:p>
+          <a:p>
+            <a:r>
+              <a:t>2. Indirect.</a:t>
+            </a:r>
+          </a:p>
+          <a:p>
+            <a:r>
+              <a:t>3. Money may go out before customers pay.</a:t>
             </a:r>
           </a:p>
         </p:txBody>
@@ -676,6 +710,146 @@
 </file>
 
 <file path=ppt/notesSlides/notesSlide4.xml><?xml version="1.0" encoding="utf-8"?>
+<p:notes xmlns:a="http://schemas.openxmlformats.org/drawingml/2006/main" xmlns:p="http://schemas.openxmlformats.org/presentationml/2006/main" xmlns:r="http://schemas.openxmlformats.org/officeDocument/2006/relationships">
+  <p:cSld>
+    <p:spTree>
+      <p:nvGrpSpPr>
+        <p:cNvPr id="1" name=""/>
+        <p:cNvGrpSpPr/>
+        <p:nvPr/>
+      </p:nvGrpSpPr>
+      <p:grpSpPr>
+        <a:xfrm>
+          <a:off x="0" y="0"/>
+          <a:ext cx="0" cy="0"/>
+          <a:chOff x="0" y="0"/>
+          <a:chExt cx="0" cy="0"/>
+        </a:xfrm>
+      </p:grpSpPr>
+      <p:sp>
+        <p:nvSpPr>
+          <p:cNvPr id="2" name="Slide Image Placeholder 1"/>
+          <p:cNvSpPr>
+            <a:spLocks noGrp="1"/>
+          </p:cNvSpPr>
+          <p:nvPr>
+            <p:ph type="sldImg" idx="2"/>
+          </p:nvPr>
+        </p:nvSpPr>
+        <p:spPr/>
+      </p:sp>
+      <p:sp>
+        <p:nvSpPr>
+          <p:cNvPr id="3" name="Notes Placeholder 2"/>
+          <p:cNvSpPr>
+            <a:spLocks noGrp="1"/>
+          </p:cNvSpPr>
+          <p:nvPr>
+            <p:ph type="body" idx="3" sz="quarter"/>
+          </p:nvPr>
+        </p:nvSpPr>
+        <p:spPr/>
+        <p:txBody>
+          <a:bodyPr/>
+          <a:lstStyle/>
+          <a:p>
+            <a:r>
+              <a:t>Give students a few minutes to answer on mini whiteboards or paper, then reveal the answers on the next slide.</a:t>
+            </a:r>
+          </a:p>
+        </p:txBody>
+      </p:sp>
+      <p:sp>
+        <p:nvSpPr>
+          <p:cNvPr id="4" name="Slide Number Placeholder 3"/>
+          <p:cNvSpPr>
+            <a:spLocks noGrp="1"/>
+          </p:cNvSpPr>
+          <p:nvPr>
+            <p:ph type="sldNum" idx="5" sz="quarter"/>
+          </p:nvPr>
+        </p:nvSpPr>
+        <p:spPr/>
+      </p:sp>
+    </p:spTree>
+  </p:cSld>
+  <p:clrMapOvr>
+    <a:masterClrMapping/>
+  </p:clrMapOvr>
+</p:notes>
+</file>
+
+<file path=ppt/notesSlides/notesSlide5.xml><?xml version="1.0" encoding="utf-8"?>
+<p:notes xmlns:a="http://schemas.openxmlformats.org/drawingml/2006/main" xmlns:p="http://schemas.openxmlformats.org/presentationml/2006/main" xmlns:r="http://schemas.openxmlformats.org/officeDocument/2006/relationships">
+  <p:cSld>
+    <p:spTree>
+      <p:nvGrpSpPr>
+        <p:cNvPr id="1" name=""/>
+        <p:cNvGrpSpPr/>
+        <p:nvPr/>
+      </p:nvGrpSpPr>
+      <p:grpSpPr>
+        <a:xfrm>
+          <a:off x="0" y="0"/>
+          <a:ext cx="0" cy="0"/>
+          <a:chOff x="0" y="0"/>
+          <a:chExt cx="0" cy="0"/>
+        </a:xfrm>
+      </p:grpSpPr>
+      <p:sp>
+        <p:nvSpPr>
+          <p:cNvPr id="2" name="Slide Image Placeholder 1"/>
+          <p:cNvSpPr>
+            <a:spLocks noGrp="1"/>
+          </p:cNvSpPr>
+          <p:nvPr>
+            <p:ph type="sldImg" idx="2"/>
+          </p:nvPr>
+        </p:nvSpPr>
+        <p:spPr/>
+      </p:sp>
+      <p:sp>
+        <p:nvSpPr>
+          <p:cNvPr id="3" name="Notes Placeholder 2"/>
+          <p:cNvSpPr>
+            <a:spLocks noGrp="1"/>
+          </p:cNvSpPr>
+          <p:nvPr>
+            <p:ph type="body" idx="3" sz="quarter"/>
+          </p:nvPr>
+        </p:nvSpPr>
+        <p:spPr/>
+        <p:txBody>
+          <a:bodyPr/>
+          <a:lstStyle/>
+          <a:p>
+            <a:r>
+              <a:t>Talk through any answers the class found difficult.</a:t>
+            </a:r>
+          </a:p>
+        </p:txBody>
+      </p:sp>
+      <p:sp>
+        <p:nvSpPr>
+          <p:cNvPr id="4" name="Slide Number Placeholder 3"/>
+          <p:cNvSpPr>
+            <a:spLocks noGrp="1"/>
+          </p:cNvSpPr>
+          <p:nvPr>
+            <p:ph type="sldNum" idx="5" sz="quarter"/>
+          </p:nvPr>
+        </p:nvSpPr>
+        <p:spPr/>
+      </p:sp>
+    </p:spTree>
+  </p:cSld>
+  <p:clrMapOvr>
+    <a:masterClrMapping/>
+  </p:clrMapOvr>
+</p:notes>
+</file>
+
+<file path=ppt/notesSlides/notesSlide6.xml><?xml version="1.0" encoding="utf-8"?>
 <p:notes xmlns:a="http://schemas.openxmlformats.org/drawingml/2006/main" xmlns:p="http://schemas.openxmlformats.org/presentationml/2006/main" xmlns:r="http://schemas.openxmlformats.org/officeDocument/2006/relationships">
   <p:cSld>
     <p:spTree>
@@ -4045,6 +4219,2355 @@
 </p:sld>
 </file>
 
+<file path=ppt/slides/slide10.xml><?xml version="1.0" encoding="utf-8"?>
+<p:sld xmlns:a="http://schemas.openxmlformats.org/drawingml/2006/main" xmlns:p="http://schemas.openxmlformats.org/presentationml/2006/main" xmlns:r="http://schemas.openxmlformats.org/officeDocument/2006/relationships">
+  <p:cSld>
+    <p:bg>
+      <p:bgPr>
+        <a:solidFill>
+          <a:srgbClr val="FFFFFF"/>
+        </a:solidFill>
+        <a:effectLst/>
+      </p:bgPr>
+    </p:bg>
+    <p:spTree>
+      <p:nvGrpSpPr>
+        <p:cNvPr id="1" name=""/>
+        <p:cNvGrpSpPr/>
+        <p:nvPr/>
+      </p:nvGrpSpPr>
+      <p:grpSpPr/>
+      <p:sp>
+        <p:nvSpPr>
+          <p:cNvPr id="2" name="TextBox 1"/>
+          <p:cNvSpPr txBox="1"/>
+          <p:nvPr/>
+        </p:nvSpPr>
+        <p:spPr>
+          <a:xfrm>
+            <a:off x="548640" y="320040"/>
+            <a:ext cx="11094415" cy="274320"/>
+          </a:xfrm>
+          <a:prstGeom prst="rect">
+            <a:avLst/>
+          </a:prstGeom>
+          <a:noFill/>
+        </p:spPr>
+        <p:txBody>
+          <a:bodyPr wrap="square" anchor="t" lIns="0" rIns="0" tIns="0" bIns="0"/>
+          <a:lstStyle/>
+          <a:p>
+            <a:pPr algn="l"/>
+            <a:r>
+              <a:rPr sz="1100" b="1" i="0">
+                <a:solidFill>
+                  <a:srgbClr val="54595D"/>
+                </a:solidFill>
+                <a:latin typeface="Calibri"/>
+              </a:rPr>
+              <a:t>ENGINEERING CORE  ·  Core topic 13</a:t>
+            </a:r>
+          </a:p>
+        </p:txBody>
+      </p:sp>
+      <p:sp>
+        <p:nvSpPr>
+          <p:cNvPr id="3" name="TextBox 2"/>
+          <p:cNvSpPr txBox="1"/>
+          <p:nvPr/>
+        </p:nvSpPr>
+        <p:spPr>
+          <a:xfrm>
+            <a:off x="548640" y="566928"/>
+            <a:ext cx="11094415" cy="822960"/>
+          </a:xfrm>
+          <a:prstGeom prst="rect">
+            <a:avLst/>
+          </a:prstGeom>
+          <a:noFill/>
+        </p:spPr>
+        <p:txBody>
+          <a:bodyPr wrap="square" anchor="ctr" lIns="0" rIns="0" tIns="0" bIns="0"/>
+          <a:lstStyle/>
+          <a:p>
+            <a:pPr algn="l"/>
+            <a:r>
+              <a:rPr sz="3200" b="1" i="0">
+                <a:solidFill>
+                  <a:srgbClr val="03306E"/>
+                </a:solidFill>
+                <a:latin typeface="Cambria"/>
+              </a:rPr>
+              <a:t>Check your understanding</a:t>
+            </a:r>
+          </a:p>
+        </p:txBody>
+      </p:sp>
+      <p:sp>
+        <p:nvSpPr>
+          <p:cNvPr id="4" name="TextBox 3"/>
+          <p:cNvSpPr txBox="1"/>
+          <p:nvPr/>
+        </p:nvSpPr>
+        <p:spPr>
+          <a:xfrm>
+            <a:off x="548640" y="6446520"/>
+            <a:ext cx="8229600" cy="274320"/>
+          </a:xfrm>
+          <a:prstGeom prst="rect">
+            <a:avLst/>
+          </a:prstGeom>
+          <a:noFill/>
+        </p:spPr>
+        <p:txBody>
+          <a:bodyPr wrap="square" anchor="t" lIns="0" rIns="0" tIns="0" bIns="0"/>
+          <a:lstStyle/>
+          <a:p>
+            <a:pPr algn="l"/>
+            <a:r>
+              <a:rPr sz="1000" b="0" i="0">
+                <a:solidFill>
+                  <a:srgbClr val="54595D"/>
+                </a:solidFill>
+                <a:latin typeface="Calibri"/>
+              </a:rPr>
+              <a:t>Design and Development for Engineering and Manufacturing T Level  ·  Business, Commercial and Financial Awareness</a:t>
+            </a:r>
+          </a:p>
+        </p:txBody>
+      </p:sp>
+      <p:sp>
+        <p:nvSpPr>
+          <p:cNvPr id="5" name="TextBox 4"/>
+          <p:cNvSpPr txBox="1"/>
+          <p:nvPr/>
+        </p:nvSpPr>
+        <p:spPr>
+          <a:xfrm>
+            <a:off x="10728655" y="6446520"/>
+            <a:ext cx="914400" cy="274320"/>
+          </a:xfrm>
+          <a:prstGeom prst="rect">
+            <a:avLst/>
+          </a:prstGeom>
+          <a:noFill/>
+        </p:spPr>
+        <p:txBody>
+          <a:bodyPr wrap="square" anchor="t" lIns="0" rIns="0" tIns="0" bIns="0"/>
+          <a:lstStyle/>
+          <a:p>
+            <a:pPr algn="r"/>
+            <a:r>
+              <a:rPr sz="1000" b="0" i="0">
+                <a:solidFill>
+                  <a:srgbClr val="54595D"/>
+                </a:solidFill>
+                <a:latin typeface="Calibri"/>
+              </a:rPr>
+              <a:t>10</a:t>
+            </a:r>
+          </a:p>
+        </p:txBody>
+      </p:sp>
+      <p:sp>
+        <p:nvSpPr>
+          <p:cNvPr id="6" name="Oval 5"/>
+          <p:cNvSpPr/>
+          <p:nvPr/>
+        </p:nvSpPr>
+        <p:spPr>
+          <a:xfrm>
+            <a:off x="548640" y="1618488"/>
+            <a:ext cx="411480" cy="411480"/>
+          </a:xfrm>
+          <a:prstGeom prst="ellipse">
+            <a:avLst/>
+          </a:prstGeom>
+          <a:solidFill>
+            <a:srgbClr val="F2B705"/>
+          </a:solidFill>
+          <a:ln>
+            <a:noFill/>
+          </a:ln>
+          <a:effectLst/>
+        </p:spPr>
+        <p:style>
+          <a:lnRef idx="1">
+            <a:schemeClr val="accent1"/>
+          </a:lnRef>
+          <a:fillRef idx="3">
+            <a:schemeClr val="accent1"/>
+          </a:fillRef>
+          <a:effectRef idx="2">
+            <a:schemeClr val="accent1"/>
+          </a:effectRef>
+          <a:fontRef idx="minor">
+            <a:schemeClr val="lt1"/>
+          </a:fontRef>
+        </p:style>
+        <p:txBody>
+          <a:bodyPr rtlCol="0" anchor="ctr" lIns="0" rIns="0" tIns="0" bIns="0"/>
+          <a:lstStyle/>
+          <a:p>
+            <a:pPr algn="ctr"/>
+            <a:r>
+              <a:rPr sz="1400" b="1">
+                <a:solidFill>
+                  <a:srgbClr val="202122"/>
+                </a:solidFill>
+                <a:latin typeface="Calibri"/>
+              </a:rPr>
+              <a:t>1</a:t>
+            </a:r>
+          </a:p>
+        </p:txBody>
+      </p:sp>
+      <p:sp>
+        <p:nvSpPr>
+          <p:cNvPr id="7" name="TextBox 6"/>
+          <p:cNvSpPr txBox="1"/>
+          <p:nvPr/>
+        </p:nvSpPr>
+        <p:spPr>
+          <a:xfrm>
+            <a:off x="1234440" y="1600200"/>
+            <a:ext cx="10408615" cy="1030986"/>
+          </a:xfrm>
+          <a:prstGeom prst="rect">
+            <a:avLst/>
+          </a:prstGeom>
+          <a:noFill/>
+        </p:spPr>
+        <p:txBody>
+          <a:bodyPr wrap="square" anchor="t" lIns="0" rIns="0" tIns="0" bIns="0"/>
+          <a:lstStyle/>
+          <a:p>
+            <a:pPr algn="l"/>
+            <a:r>
+              <a:rPr sz="2200" b="0" i="0">
+                <a:solidFill>
+                  <a:srgbClr val="202122"/>
+                </a:solidFill>
+                <a:latin typeface="Calibri"/>
+              </a:rPr>
+              <a:t>What is break-even?</a:t>
+            </a:r>
+          </a:p>
+        </p:txBody>
+      </p:sp>
+      <p:sp>
+        <p:nvSpPr>
+          <p:cNvPr id="8" name="Oval 7"/>
+          <p:cNvSpPr/>
+          <p:nvPr/>
+        </p:nvSpPr>
+        <p:spPr>
+          <a:xfrm>
+            <a:off x="548640" y="2814066"/>
+            <a:ext cx="411480" cy="411480"/>
+          </a:xfrm>
+          <a:prstGeom prst="ellipse">
+            <a:avLst/>
+          </a:prstGeom>
+          <a:solidFill>
+            <a:srgbClr val="F2B705"/>
+          </a:solidFill>
+          <a:ln>
+            <a:noFill/>
+          </a:ln>
+          <a:effectLst/>
+        </p:spPr>
+        <p:style>
+          <a:lnRef idx="1">
+            <a:schemeClr val="accent1"/>
+          </a:lnRef>
+          <a:fillRef idx="3">
+            <a:schemeClr val="accent1"/>
+          </a:fillRef>
+          <a:effectRef idx="2">
+            <a:schemeClr val="accent1"/>
+          </a:effectRef>
+          <a:fontRef idx="minor">
+            <a:schemeClr val="lt1"/>
+          </a:fontRef>
+        </p:style>
+        <p:txBody>
+          <a:bodyPr rtlCol="0" anchor="ctr" lIns="0" rIns="0" tIns="0" bIns="0"/>
+          <a:lstStyle/>
+          <a:p>
+            <a:pPr algn="ctr"/>
+            <a:r>
+              <a:rPr sz="1400" b="1">
+                <a:solidFill>
+                  <a:srgbClr val="202122"/>
+                </a:solidFill>
+                <a:latin typeface="Calibri"/>
+              </a:rPr>
+              <a:t>2</a:t>
+            </a:r>
+          </a:p>
+        </p:txBody>
+      </p:sp>
+      <p:sp>
+        <p:nvSpPr>
+          <p:cNvPr id="9" name="TextBox 8"/>
+          <p:cNvSpPr txBox="1"/>
+          <p:nvPr/>
+        </p:nvSpPr>
+        <p:spPr>
+          <a:xfrm>
+            <a:off x="1234440" y="2795778"/>
+            <a:ext cx="10408615" cy="1030986"/>
+          </a:xfrm>
+          <a:prstGeom prst="rect">
+            <a:avLst/>
+          </a:prstGeom>
+          <a:noFill/>
+        </p:spPr>
+        <p:txBody>
+          <a:bodyPr wrap="square" anchor="t" lIns="0" rIns="0" tIns="0" bIns="0"/>
+          <a:lstStyle/>
+          <a:p>
+            <a:pPr algn="l"/>
+            <a:r>
+              <a:rPr sz="2200" b="0" i="0">
+                <a:solidFill>
+                  <a:srgbClr val="202122"/>
+                </a:solidFill>
+                <a:latin typeface="Calibri"/>
+              </a:rPr>
+              <a:t>Is rent a direct or indirect cost?</a:t>
+            </a:r>
+          </a:p>
+        </p:txBody>
+      </p:sp>
+      <p:sp>
+        <p:nvSpPr>
+          <p:cNvPr id="10" name="Oval 9"/>
+          <p:cNvSpPr/>
+          <p:nvPr/>
+        </p:nvSpPr>
+        <p:spPr>
+          <a:xfrm>
+            <a:off x="548640" y="4009644"/>
+            <a:ext cx="411480" cy="411480"/>
+          </a:xfrm>
+          <a:prstGeom prst="ellipse">
+            <a:avLst/>
+          </a:prstGeom>
+          <a:solidFill>
+            <a:srgbClr val="F2B705"/>
+          </a:solidFill>
+          <a:ln>
+            <a:noFill/>
+          </a:ln>
+          <a:effectLst/>
+        </p:spPr>
+        <p:style>
+          <a:lnRef idx="1">
+            <a:schemeClr val="accent1"/>
+          </a:lnRef>
+          <a:fillRef idx="3">
+            <a:schemeClr val="accent1"/>
+          </a:fillRef>
+          <a:effectRef idx="2">
+            <a:schemeClr val="accent1"/>
+          </a:effectRef>
+          <a:fontRef idx="minor">
+            <a:schemeClr val="lt1"/>
+          </a:fontRef>
+        </p:style>
+        <p:txBody>
+          <a:bodyPr rtlCol="0" anchor="ctr" lIns="0" rIns="0" tIns="0" bIns="0"/>
+          <a:lstStyle/>
+          <a:p>
+            <a:pPr algn="ctr"/>
+            <a:r>
+              <a:rPr sz="1400" b="1">
+                <a:solidFill>
+                  <a:srgbClr val="202122"/>
+                </a:solidFill>
+                <a:latin typeface="Calibri"/>
+              </a:rPr>
+              <a:t>3</a:t>
+            </a:r>
+          </a:p>
+        </p:txBody>
+      </p:sp>
+      <p:sp>
+        <p:nvSpPr>
+          <p:cNvPr id="11" name="TextBox 10"/>
+          <p:cNvSpPr txBox="1"/>
+          <p:nvPr/>
+        </p:nvSpPr>
+        <p:spPr>
+          <a:xfrm>
+            <a:off x="1234440" y="3991356"/>
+            <a:ext cx="10408615" cy="1030986"/>
+          </a:xfrm>
+          <a:prstGeom prst="rect">
+            <a:avLst/>
+          </a:prstGeom>
+          <a:noFill/>
+        </p:spPr>
+        <p:txBody>
+          <a:bodyPr wrap="square" anchor="t" lIns="0" rIns="0" tIns="0" bIns="0"/>
+          <a:lstStyle/>
+          <a:p>
+            <a:pPr algn="l"/>
+            <a:r>
+              <a:rPr sz="2200" b="0" i="0">
+                <a:solidFill>
+                  <a:srgbClr val="202122"/>
+                </a:solidFill>
+                <a:latin typeface="Calibri"/>
+              </a:rPr>
+              <a:t>What is force majeure?</a:t>
+            </a:r>
+          </a:p>
+        </p:txBody>
+      </p:sp>
+      <p:sp>
+        <p:nvSpPr>
+          <p:cNvPr id="12" name="Oval 11"/>
+          <p:cNvSpPr/>
+          <p:nvPr/>
+        </p:nvSpPr>
+        <p:spPr>
+          <a:xfrm>
+            <a:off x="548640" y="5205221"/>
+            <a:ext cx="411480" cy="411480"/>
+          </a:xfrm>
+          <a:prstGeom prst="ellipse">
+            <a:avLst/>
+          </a:prstGeom>
+          <a:solidFill>
+            <a:srgbClr val="F2B705"/>
+          </a:solidFill>
+          <a:ln>
+            <a:noFill/>
+          </a:ln>
+          <a:effectLst/>
+        </p:spPr>
+        <p:style>
+          <a:lnRef idx="1">
+            <a:schemeClr val="accent1"/>
+          </a:lnRef>
+          <a:fillRef idx="3">
+            <a:schemeClr val="accent1"/>
+          </a:fillRef>
+          <a:effectRef idx="2">
+            <a:schemeClr val="accent1"/>
+          </a:effectRef>
+          <a:fontRef idx="minor">
+            <a:schemeClr val="lt1"/>
+          </a:fontRef>
+        </p:style>
+        <p:txBody>
+          <a:bodyPr rtlCol="0" anchor="ctr" lIns="0" rIns="0" tIns="0" bIns="0"/>
+          <a:lstStyle/>
+          <a:p>
+            <a:pPr algn="ctr"/>
+            <a:r>
+              <a:rPr sz="1400" b="1">
+                <a:solidFill>
+                  <a:srgbClr val="202122"/>
+                </a:solidFill>
+                <a:latin typeface="Calibri"/>
+              </a:rPr>
+              <a:t>4</a:t>
+            </a:r>
+          </a:p>
+        </p:txBody>
+      </p:sp>
+      <p:sp>
+        <p:nvSpPr>
+          <p:cNvPr id="13" name="TextBox 12"/>
+          <p:cNvSpPr txBox="1"/>
+          <p:nvPr/>
+        </p:nvSpPr>
+        <p:spPr>
+          <a:xfrm>
+            <a:off x="1234440" y="5186933"/>
+            <a:ext cx="10408615" cy="1030986"/>
+          </a:xfrm>
+          <a:prstGeom prst="rect">
+            <a:avLst/>
+          </a:prstGeom>
+          <a:noFill/>
+        </p:spPr>
+        <p:txBody>
+          <a:bodyPr wrap="square" anchor="t" lIns="0" rIns="0" tIns="0" bIns="0"/>
+          <a:lstStyle/>
+          <a:p>
+            <a:pPr algn="l"/>
+            <a:r>
+              <a:rPr sz="2200" b="0" i="0">
+                <a:solidFill>
+                  <a:srgbClr val="202122"/>
+                </a:solidFill>
+                <a:latin typeface="Calibri"/>
+              </a:rPr>
+              <a:t>What is a debtor?</a:t>
+            </a:r>
+          </a:p>
+        </p:txBody>
+      </p:sp>
+    </p:spTree>
+  </p:cSld>
+  <p:clrMapOvr>
+    <a:masterClrMapping/>
+  </p:clrMapOvr>
+</p:sld>
+</file>
+
+<file path=ppt/slides/slide11.xml><?xml version="1.0" encoding="utf-8"?>
+<p:sld xmlns:a="http://schemas.openxmlformats.org/drawingml/2006/main" xmlns:p="http://schemas.openxmlformats.org/presentationml/2006/main" xmlns:r="http://schemas.openxmlformats.org/officeDocument/2006/relationships">
+  <p:cSld>
+    <p:bg>
+      <p:bgPr>
+        <a:solidFill>
+          <a:srgbClr val="FFFFFF"/>
+        </a:solidFill>
+        <a:effectLst/>
+      </p:bgPr>
+    </p:bg>
+    <p:spTree>
+      <p:nvGrpSpPr>
+        <p:cNvPr id="1" name=""/>
+        <p:cNvGrpSpPr/>
+        <p:nvPr/>
+      </p:nvGrpSpPr>
+      <p:grpSpPr/>
+      <p:sp>
+        <p:nvSpPr>
+          <p:cNvPr id="2" name="TextBox 1"/>
+          <p:cNvSpPr txBox="1"/>
+          <p:nvPr/>
+        </p:nvSpPr>
+        <p:spPr>
+          <a:xfrm>
+            <a:off x="548640" y="320040"/>
+            <a:ext cx="11094415" cy="274320"/>
+          </a:xfrm>
+          <a:prstGeom prst="rect">
+            <a:avLst/>
+          </a:prstGeom>
+          <a:noFill/>
+        </p:spPr>
+        <p:txBody>
+          <a:bodyPr wrap="square" anchor="t" lIns="0" rIns="0" tIns="0" bIns="0"/>
+          <a:lstStyle/>
+          <a:p>
+            <a:pPr algn="l"/>
+            <a:r>
+              <a:rPr sz="1100" b="1" i="0">
+                <a:solidFill>
+                  <a:srgbClr val="54595D"/>
+                </a:solidFill>
+                <a:latin typeface="Calibri"/>
+              </a:rPr>
+              <a:t>ENGINEERING CORE  ·  Core topic 13</a:t>
+            </a:r>
+          </a:p>
+        </p:txBody>
+      </p:sp>
+      <p:sp>
+        <p:nvSpPr>
+          <p:cNvPr id="3" name="TextBox 2"/>
+          <p:cNvSpPr txBox="1"/>
+          <p:nvPr/>
+        </p:nvSpPr>
+        <p:spPr>
+          <a:xfrm>
+            <a:off x="548640" y="566928"/>
+            <a:ext cx="11094415" cy="822960"/>
+          </a:xfrm>
+          <a:prstGeom prst="rect">
+            <a:avLst/>
+          </a:prstGeom>
+          <a:noFill/>
+        </p:spPr>
+        <p:txBody>
+          <a:bodyPr wrap="square" anchor="ctr" lIns="0" rIns="0" tIns="0" bIns="0"/>
+          <a:lstStyle/>
+          <a:p>
+            <a:pPr algn="l"/>
+            <a:r>
+              <a:rPr sz="3200" b="1" i="0">
+                <a:solidFill>
+                  <a:srgbClr val="03306E"/>
+                </a:solidFill>
+                <a:latin typeface="Cambria"/>
+              </a:rPr>
+              <a:t>Answers</a:t>
+            </a:r>
+          </a:p>
+        </p:txBody>
+      </p:sp>
+      <p:sp>
+        <p:nvSpPr>
+          <p:cNvPr id="4" name="TextBox 3"/>
+          <p:cNvSpPr txBox="1"/>
+          <p:nvPr/>
+        </p:nvSpPr>
+        <p:spPr>
+          <a:xfrm>
+            <a:off x="548640" y="6446520"/>
+            <a:ext cx="8229600" cy="274320"/>
+          </a:xfrm>
+          <a:prstGeom prst="rect">
+            <a:avLst/>
+          </a:prstGeom>
+          <a:noFill/>
+        </p:spPr>
+        <p:txBody>
+          <a:bodyPr wrap="square" anchor="t" lIns="0" rIns="0" tIns="0" bIns="0"/>
+          <a:lstStyle/>
+          <a:p>
+            <a:pPr algn="l"/>
+            <a:r>
+              <a:rPr sz="1000" b="0" i="0">
+                <a:solidFill>
+                  <a:srgbClr val="54595D"/>
+                </a:solidFill>
+                <a:latin typeface="Calibri"/>
+              </a:rPr>
+              <a:t>Design and Development for Engineering and Manufacturing T Level  ·  Business, Commercial and Financial Awareness</a:t>
+            </a:r>
+          </a:p>
+        </p:txBody>
+      </p:sp>
+      <p:sp>
+        <p:nvSpPr>
+          <p:cNvPr id="5" name="TextBox 4"/>
+          <p:cNvSpPr txBox="1"/>
+          <p:nvPr/>
+        </p:nvSpPr>
+        <p:spPr>
+          <a:xfrm>
+            <a:off x="10728655" y="6446520"/>
+            <a:ext cx="914400" cy="274320"/>
+          </a:xfrm>
+          <a:prstGeom prst="rect">
+            <a:avLst/>
+          </a:prstGeom>
+          <a:noFill/>
+        </p:spPr>
+        <p:txBody>
+          <a:bodyPr wrap="square" anchor="t" lIns="0" rIns="0" tIns="0" bIns="0"/>
+          <a:lstStyle/>
+          <a:p>
+            <a:pPr algn="r"/>
+            <a:r>
+              <a:rPr sz="1000" b="0" i="0">
+                <a:solidFill>
+                  <a:srgbClr val="54595D"/>
+                </a:solidFill>
+                <a:latin typeface="Calibri"/>
+              </a:rPr>
+              <a:t>11</a:t>
+            </a:r>
+          </a:p>
+        </p:txBody>
+      </p:sp>
+      <p:sp>
+        <p:nvSpPr>
+          <p:cNvPr id="6" name="Oval 5"/>
+          <p:cNvSpPr/>
+          <p:nvPr/>
+        </p:nvSpPr>
+        <p:spPr>
+          <a:xfrm>
+            <a:off x="548640" y="1618488"/>
+            <a:ext cx="411480" cy="411480"/>
+          </a:xfrm>
+          <a:prstGeom prst="ellipse">
+            <a:avLst/>
+          </a:prstGeom>
+          <a:solidFill>
+            <a:srgbClr val="F2B705"/>
+          </a:solidFill>
+          <a:ln>
+            <a:noFill/>
+          </a:ln>
+          <a:effectLst/>
+        </p:spPr>
+        <p:style>
+          <a:lnRef idx="1">
+            <a:schemeClr val="accent1"/>
+          </a:lnRef>
+          <a:fillRef idx="3">
+            <a:schemeClr val="accent1"/>
+          </a:fillRef>
+          <a:effectRef idx="2">
+            <a:schemeClr val="accent1"/>
+          </a:effectRef>
+          <a:fontRef idx="minor">
+            <a:schemeClr val="lt1"/>
+          </a:fontRef>
+        </p:style>
+        <p:txBody>
+          <a:bodyPr rtlCol="0" anchor="ctr" lIns="0" rIns="0" tIns="0" bIns="0"/>
+          <a:lstStyle/>
+          <a:p>
+            <a:pPr algn="ctr"/>
+            <a:r>
+              <a:rPr sz="1400" b="1">
+                <a:solidFill>
+                  <a:srgbClr val="202122"/>
+                </a:solidFill>
+                <a:latin typeface="Calibri"/>
+              </a:rPr>
+              <a:t>1</a:t>
+            </a:r>
+          </a:p>
+        </p:txBody>
+      </p:sp>
+      <p:sp>
+        <p:nvSpPr>
+          <p:cNvPr id="7" name="TextBox 6"/>
+          <p:cNvSpPr txBox="1"/>
+          <p:nvPr/>
+        </p:nvSpPr>
+        <p:spPr>
+          <a:xfrm>
+            <a:off x="1234440" y="1600200"/>
+            <a:ext cx="10408615" cy="1030986"/>
+          </a:xfrm>
+          <a:prstGeom prst="rect">
+            <a:avLst/>
+          </a:prstGeom>
+          <a:noFill/>
+        </p:spPr>
+        <p:txBody>
+          <a:bodyPr wrap="square" anchor="t" lIns="0" rIns="0" tIns="0" bIns="0"/>
+          <a:lstStyle/>
+          <a:p>
+            <a:pPr algn="l"/>
+            <a:r>
+              <a:rPr sz="1800" b="0" i="0">
+                <a:solidFill>
+                  <a:srgbClr val="54595D"/>
+                </a:solidFill>
+                <a:latin typeface="Calibri"/>
+              </a:rPr>
+              <a:t>What is break-even?</a:t>
+            </a:r>
+          </a:p>
+          <a:p>
+            <a:r>
+              <a:rPr sz="1800" b="1">
+                <a:solidFill>
+                  <a:srgbClr val="03306E"/>
+                </a:solidFill>
+                <a:latin typeface="Calibri"/>
+              </a:rPr>
+              <a:t>The point where revenue equals total costs.</a:t>
+            </a:r>
+          </a:p>
+        </p:txBody>
+      </p:sp>
+      <p:sp>
+        <p:nvSpPr>
+          <p:cNvPr id="8" name="Oval 7"/>
+          <p:cNvSpPr/>
+          <p:nvPr/>
+        </p:nvSpPr>
+        <p:spPr>
+          <a:xfrm>
+            <a:off x="548640" y="2814066"/>
+            <a:ext cx="411480" cy="411480"/>
+          </a:xfrm>
+          <a:prstGeom prst="ellipse">
+            <a:avLst/>
+          </a:prstGeom>
+          <a:solidFill>
+            <a:srgbClr val="F2B705"/>
+          </a:solidFill>
+          <a:ln>
+            <a:noFill/>
+          </a:ln>
+          <a:effectLst/>
+        </p:spPr>
+        <p:style>
+          <a:lnRef idx="1">
+            <a:schemeClr val="accent1"/>
+          </a:lnRef>
+          <a:fillRef idx="3">
+            <a:schemeClr val="accent1"/>
+          </a:fillRef>
+          <a:effectRef idx="2">
+            <a:schemeClr val="accent1"/>
+          </a:effectRef>
+          <a:fontRef idx="minor">
+            <a:schemeClr val="lt1"/>
+          </a:fontRef>
+        </p:style>
+        <p:txBody>
+          <a:bodyPr rtlCol="0" anchor="ctr" lIns="0" rIns="0" tIns="0" bIns="0"/>
+          <a:lstStyle/>
+          <a:p>
+            <a:pPr algn="ctr"/>
+            <a:r>
+              <a:rPr sz="1400" b="1">
+                <a:solidFill>
+                  <a:srgbClr val="202122"/>
+                </a:solidFill>
+                <a:latin typeface="Calibri"/>
+              </a:rPr>
+              <a:t>2</a:t>
+            </a:r>
+          </a:p>
+        </p:txBody>
+      </p:sp>
+      <p:sp>
+        <p:nvSpPr>
+          <p:cNvPr id="9" name="TextBox 8"/>
+          <p:cNvSpPr txBox="1"/>
+          <p:nvPr/>
+        </p:nvSpPr>
+        <p:spPr>
+          <a:xfrm>
+            <a:off x="1234440" y="2795778"/>
+            <a:ext cx="10408615" cy="1030986"/>
+          </a:xfrm>
+          <a:prstGeom prst="rect">
+            <a:avLst/>
+          </a:prstGeom>
+          <a:noFill/>
+        </p:spPr>
+        <p:txBody>
+          <a:bodyPr wrap="square" anchor="t" lIns="0" rIns="0" tIns="0" bIns="0"/>
+          <a:lstStyle/>
+          <a:p>
+            <a:pPr algn="l"/>
+            <a:r>
+              <a:rPr sz="1800" b="0" i="0">
+                <a:solidFill>
+                  <a:srgbClr val="54595D"/>
+                </a:solidFill>
+                <a:latin typeface="Calibri"/>
+              </a:rPr>
+              <a:t>Is rent a direct or indirect cost?</a:t>
+            </a:r>
+          </a:p>
+          <a:p>
+            <a:r>
+              <a:rPr sz="1800" b="1">
+                <a:solidFill>
+                  <a:srgbClr val="03306E"/>
+                </a:solidFill>
+                <a:latin typeface="Calibri"/>
+              </a:rPr>
+              <a:t>Indirect.</a:t>
+            </a:r>
+          </a:p>
+        </p:txBody>
+      </p:sp>
+      <p:sp>
+        <p:nvSpPr>
+          <p:cNvPr id="10" name="Oval 9"/>
+          <p:cNvSpPr/>
+          <p:nvPr/>
+        </p:nvSpPr>
+        <p:spPr>
+          <a:xfrm>
+            <a:off x="548640" y="4009644"/>
+            <a:ext cx="411480" cy="411480"/>
+          </a:xfrm>
+          <a:prstGeom prst="ellipse">
+            <a:avLst/>
+          </a:prstGeom>
+          <a:solidFill>
+            <a:srgbClr val="F2B705"/>
+          </a:solidFill>
+          <a:ln>
+            <a:noFill/>
+          </a:ln>
+          <a:effectLst/>
+        </p:spPr>
+        <p:style>
+          <a:lnRef idx="1">
+            <a:schemeClr val="accent1"/>
+          </a:lnRef>
+          <a:fillRef idx="3">
+            <a:schemeClr val="accent1"/>
+          </a:fillRef>
+          <a:effectRef idx="2">
+            <a:schemeClr val="accent1"/>
+          </a:effectRef>
+          <a:fontRef idx="minor">
+            <a:schemeClr val="lt1"/>
+          </a:fontRef>
+        </p:style>
+        <p:txBody>
+          <a:bodyPr rtlCol="0" anchor="ctr" lIns="0" rIns="0" tIns="0" bIns="0"/>
+          <a:lstStyle/>
+          <a:p>
+            <a:pPr algn="ctr"/>
+            <a:r>
+              <a:rPr sz="1400" b="1">
+                <a:solidFill>
+                  <a:srgbClr val="202122"/>
+                </a:solidFill>
+                <a:latin typeface="Calibri"/>
+              </a:rPr>
+              <a:t>3</a:t>
+            </a:r>
+          </a:p>
+        </p:txBody>
+      </p:sp>
+      <p:sp>
+        <p:nvSpPr>
+          <p:cNvPr id="11" name="TextBox 10"/>
+          <p:cNvSpPr txBox="1"/>
+          <p:nvPr/>
+        </p:nvSpPr>
+        <p:spPr>
+          <a:xfrm>
+            <a:off x="1234440" y="3991356"/>
+            <a:ext cx="10408615" cy="1030986"/>
+          </a:xfrm>
+          <a:prstGeom prst="rect">
+            <a:avLst/>
+          </a:prstGeom>
+          <a:noFill/>
+        </p:spPr>
+        <p:txBody>
+          <a:bodyPr wrap="square" anchor="t" lIns="0" rIns="0" tIns="0" bIns="0"/>
+          <a:lstStyle/>
+          <a:p>
+            <a:pPr algn="l"/>
+            <a:r>
+              <a:rPr sz="1800" b="0" i="0">
+                <a:solidFill>
+                  <a:srgbClr val="54595D"/>
+                </a:solidFill>
+                <a:latin typeface="Calibri"/>
+              </a:rPr>
+              <a:t>What is force majeure?</a:t>
+            </a:r>
+          </a:p>
+          <a:p>
+            <a:r>
+              <a:rPr sz="1800" b="1">
+                <a:solidFill>
+                  <a:srgbClr val="03306E"/>
+                </a:solidFill>
+                <a:latin typeface="Calibri"/>
+              </a:rPr>
+              <a:t>A contract clause covering events outside anyone's control.</a:t>
+            </a:r>
+          </a:p>
+        </p:txBody>
+      </p:sp>
+      <p:sp>
+        <p:nvSpPr>
+          <p:cNvPr id="12" name="Oval 11"/>
+          <p:cNvSpPr/>
+          <p:nvPr/>
+        </p:nvSpPr>
+        <p:spPr>
+          <a:xfrm>
+            <a:off x="548640" y="5205221"/>
+            <a:ext cx="411480" cy="411480"/>
+          </a:xfrm>
+          <a:prstGeom prst="ellipse">
+            <a:avLst/>
+          </a:prstGeom>
+          <a:solidFill>
+            <a:srgbClr val="F2B705"/>
+          </a:solidFill>
+          <a:ln>
+            <a:noFill/>
+          </a:ln>
+          <a:effectLst/>
+        </p:spPr>
+        <p:style>
+          <a:lnRef idx="1">
+            <a:schemeClr val="accent1"/>
+          </a:lnRef>
+          <a:fillRef idx="3">
+            <a:schemeClr val="accent1"/>
+          </a:fillRef>
+          <a:effectRef idx="2">
+            <a:schemeClr val="accent1"/>
+          </a:effectRef>
+          <a:fontRef idx="minor">
+            <a:schemeClr val="lt1"/>
+          </a:fontRef>
+        </p:style>
+        <p:txBody>
+          <a:bodyPr rtlCol="0" anchor="ctr" lIns="0" rIns="0" tIns="0" bIns="0"/>
+          <a:lstStyle/>
+          <a:p>
+            <a:pPr algn="ctr"/>
+            <a:r>
+              <a:rPr sz="1400" b="1">
+                <a:solidFill>
+                  <a:srgbClr val="202122"/>
+                </a:solidFill>
+                <a:latin typeface="Calibri"/>
+              </a:rPr>
+              <a:t>4</a:t>
+            </a:r>
+          </a:p>
+        </p:txBody>
+      </p:sp>
+      <p:sp>
+        <p:nvSpPr>
+          <p:cNvPr id="13" name="TextBox 12"/>
+          <p:cNvSpPr txBox="1"/>
+          <p:nvPr/>
+        </p:nvSpPr>
+        <p:spPr>
+          <a:xfrm>
+            <a:off x="1234440" y="5186933"/>
+            <a:ext cx="10408615" cy="1030986"/>
+          </a:xfrm>
+          <a:prstGeom prst="rect">
+            <a:avLst/>
+          </a:prstGeom>
+          <a:noFill/>
+        </p:spPr>
+        <p:txBody>
+          <a:bodyPr wrap="square" anchor="t" lIns="0" rIns="0" tIns="0" bIns="0"/>
+          <a:lstStyle/>
+          <a:p>
+            <a:pPr algn="l"/>
+            <a:r>
+              <a:rPr sz="1800" b="0" i="0">
+                <a:solidFill>
+                  <a:srgbClr val="54595D"/>
+                </a:solidFill>
+                <a:latin typeface="Calibri"/>
+              </a:rPr>
+              <a:t>What is a debtor?</a:t>
+            </a:r>
+          </a:p>
+          <a:p>
+            <a:r>
+              <a:rPr sz="1800" b="1">
+                <a:solidFill>
+                  <a:srgbClr val="03306E"/>
+                </a:solidFill>
+                <a:latin typeface="Calibri"/>
+              </a:rPr>
+              <a:t>Someone who owes the business money.</a:t>
+            </a:r>
+          </a:p>
+        </p:txBody>
+      </p:sp>
+    </p:spTree>
+  </p:cSld>
+  <p:clrMapOvr>
+    <a:masterClrMapping/>
+  </p:clrMapOvr>
+</p:sld>
+</file>
+
+<file path=ppt/slides/slide12.xml><?xml version="1.0" encoding="utf-8"?>
+<p:sld xmlns:a="http://schemas.openxmlformats.org/drawingml/2006/main" xmlns:p="http://schemas.openxmlformats.org/presentationml/2006/main" xmlns:r="http://schemas.openxmlformats.org/officeDocument/2006/relationships">
+  <p:cSld>
+    <p:bg>
+      <p:bgPr>
+        <a:solidFill>
+          <a:srgbClr val="FFFFFF"/>
+        </a:solidFill>
+        <a:effectLst/>
+      </p:bgPr>
+    </p:bg>
+    <p:spTree>
+      <p:nvGrpSpPr>
+        <p:cNvPr id="1" name=""/>
+        <p:cNvGrpSpPr/>
+        <p:nvPr/>
+      </p:nvGrpSpPr>
+      <p:grpSpPr/>
+      <p:sp>
+        <p:nvSpPr>
+          <p:cNvPr id="2" name="TextBox 1"/>
+          <p:cNvSpPr txBox="1"/>
+          <p:nvPr/>
+        </p:nvSpPr>
+        <p:spPr>
+          <a:xfrm>
+            <a:off x="548640" y="320040"/>
+            <a:ext cx="11094415" cy="274320"/>
+          </a:xfrm>
+          <a:prstGeom prst="rect">
+            <a:avLst/>
+          </a:prstGeom>
+          <a:noFill/>
+        </p:spPr>
+        <p:txBody>
+          <a:bodyPr wrap="square" anchor="t" lIns="0" rIns="0" tIns="0" bIns="0"/>
+          <a:lstStyle/>
+          <a:p>
+            <a:pPr algn="l"/>
+            <a:r>
+              <a:rPr sz="1100" b="1" i="0">
+                <a:solidFill>
+                  <a:srgbClr val="54595D"/>
+                </a:solidFill>
+                <a:latin typeface="Calibri"/>
+              </a:rPr>
+              <a:t>ENGINEERING CORE  ·  Core topic 13</a:t>
+            </a:r>
+          </a:p>
+        </p:txBody>
+      </p:sp>
+      <p:sp>
+        <p:nvSpPr>
+          <p:cNvPr id="3" name="TextBox 2"/>
+          <p:cNvSpPr txBox="1"/>
+          <p:nvPr/>
+        </p:nvSpPr>
+        <p:spPr>
+          <a:xfrm>
+            <a:off x="548640" y="566928"/>
+            <a:ext cx="11094415" cy="822960"/>
+          </a:xfrm>
+          <a:prstGeom prst="rect">
+            <a:avLst/>
+          </a:prstGeom>
+          <a:noFill/>
+        </p:spPr>
+        <p:txBody>
+          <a:bodyPr wrap="square" anchor="ctr" lIns="0" rIns="0" tIns="0" bIns="0"/>
+          <a:lstStyle/>
+          <a:p>
+            <a:pPr algn="l"/>
+            <a:r>
+              <a:rPr sz="3200" b="1" i="0">
+                <a:solidFill>
+                  <a:srgbClr val="03306E"/>
+                </a:solidFill>
+                <a:latin typeface="Cambria"/>
+              </a:rPr>
+              <a:t>Activity: Price a product</a:t>
+            </a:r>
+          </a:p>
+        </p:txBody>
+      </p:sp>
+      <p:sp>
+        <p:nvSpPr>
+          <p:cNvPr id="4" name="TextBox 3"/>
+          <p:cNvSpPr txBox="1"/>
+          <p:nvPr/>
+        </p:nvSpPr>
+        <p:spPr>
+          <a:xfrm>
+            <a:off x="548640" y="6446520"/>
+            <a:ext cx="8229600" cy="274320"/>
+          </a:xfrm>
+          <a:prstGeom prst="rect">
+            <a:avLst/>
+          </a:prstGeom>
+          <a:noFill/>
+        </p:spPr>
+        <p:txBody>
+          <a:bodyPr wrap="square" anchor="t" lIns="0" rIns="0" tIns="0" bIns="0"/>
+          <a:lstStyle/>
+          <a:p>
+            <a:pPr algn="l"/>
+            <a:r>
+              <a:rPr sz="1000" b="0" i="0">
+                <a:solidFill>
+                  <a:srgbClr val="54595D"/>
+                </a:solidFill>
+                <a:latin typeface="Calibri"/>
+              </a:rPr>
+              <a:t>Design and Development for Engineering and Manufacturing T Level  ·  Business, Commercial and Financial Awareness</a:t>
+            </a:r>
+          </a:p>
+        </p:txBody>
+      </p:sp>
+      <p:sp>
+        <p:nvSpPr>
+          <p:cNvPr id="5" name="TextBox 4"/>
+          <p:cNvSpPr txBox="1"/>
+          <p:nvPr/>
+        </p:nvSpPr>
+        <p:spPr>
+          <a:xfrm>
+            <a:off x="10728655" y="6446520"/>
+            <a:ext cx="914400" cy="274320"/>
+          </a:xfrm>
+          <a:prstGeom prst="rect">
+            <a:avLst/>
+          </a:prstGeom>
+          <a:noFill/>
+        </p:spPr>
+        <p:txBody>
+          <a:bodyPr wrap="square" anchor="t" lIns="0" rIns="0" tIns="0" bIns="0"/>
+          <a:lstStyle/>
+          <a:p>
+            <a:pPr algn="r"/>
+            <a:r>
+              <a:rPr sz="1000" b="0" i="0">
+                <a:solidFill>
+                  <a:srgbClr val="54595D"/>
+                </a:solidFill>
+                <a:latin typeface="Calibri"/>
+              </a:rPr>
+              <a:t>12</a:t>
+            </a:r>
+          </a:p>
+        </p:txBody>
+      </p:sp>
+      <p:sp>
+        <p:nvSpPr>
+          <p:cNvPr id="6" name="Rounded Rectangle 5"/>
+          <p:cNvSpPr/>
+          <p:nvPr/>
+        </p:nvSpPr>
+        <p:spPr>
+          <a:xfrm>
+            <a:off x="548640" y="1508760"/>
+            <a:ext cx="2011680" cy="457200"/>
+          </a:xfrm>
+          <a:prstGeom prst="roundRect">
+            <a:avLst>
+              <a:gd name="adj" fmla="val 50000"/>
+            </a:avLst>
+          </a:prstGeom>
+          <a:solidFill>
+            <a:srgbClr val="F2B705"/>
+          </a:solidFill>
+          <a:ln>
+            <a:noFill/>
+          </a:ln>
+          <a:effectLst/>
+        </p:spPr>
+        <p:style>
+          <a:lnRef idx="1">
+            <a:schemeClr val="accent1"/>
+          </a:lnRef>
+          <a:fillRef idx="3">
+            <a:schemeClr val="accent1"/>
+          </a:fillRef>
+          <a:effectRef idx="2">
+            <a:schemeClr val="accent1"/>
+          </a:effectRef>
+          <a:fontRef idx="minor">
+            <a:schemeClr val="lt1"/>
+          </a:fontRef>
+        </p:style>
+        <p:txBody>
+          <a:bodyPr rtlCol="0" anchor="ctr"/>
+          <a:lstStyle/>
+          <a:p/>
+        </p:txBody>
+      </p:sp>
+      <p:sp>
+        <p:nvSpPr>
+          <p:cNvPr id="7" name="TextBox 6"/>
+          <p:cNvSpPr txBox="1"/>
+          <p:nvPr/>
+        </p:nvSpPr>
+        <p:spPr>
+          <a:xfrm>
+            <a:off x="548640" y="1508760"/>
+            <a:ext cx="2011680" cy="457200"/>
+          </a:xfrm>
+          <a:prstGeom prst="rect">
+            <a:avLst/>
+          </a:prstGeom>
+          <a:noFill/>
+        </p:spPr>
+        <p:txBody>
+          <a:bodyPr wrap="square" anchor="ctr" lIns="0" rIns="0" tIns="0" bIns="0"/>
+          <a:lstStyle/>
+          <a:p>
+            <a:pPr algn="ctr"/>
+            <a:r>
+              <a:rPr sz="1400" b="1" i="0">
+                <a:solidFill>
+                  <a:srgbClr val="202122"/>
+                </a:solidFill>
+                <a:latin typeface="Calibri"/>
+              </a:rPr>
+              <a:t>25 minutes</a:t>
+            </a:r>
+          </a:p>
+        </p:txBody>
+      </p:sp>
+      <p:sp>
+        <p:nvSpPr>
+          <p:cNvPr id="8" name="TextBox 7"/>
+          <p:cNvSpPr txBox="1"/>
+          <p:nvPr/>
+        </p:nvSpPr>
+        <p:spPr>
+          <a:xfrm>
+            <a:off x="2743200" y="1508760"/>
+            <a:ext cx="4754880" cy="457200"/>
+          </a:xfrm>
+          <a:prstGeom prst="rect">
+            <a:avLst/>
+          </a:prstGeom>
+          <a:noFill/>
+        </p:spPr>
+        <p:txBody>
+          <a:bodyPr wrap="square" anchor="ctr" lIns="0" rIns="0" tIns="0" bIns="0"/>
+          <a:lstStyle/>
+          <a:p>
+            <a:pPr algn="l"/>
+            <a:r>
+              <a:rPr sz="1400" b="0" i="1">
+                <a:solidFill>
+                  <a:srgbClr val="54595D"/>
+                </a:solidFill>
+                <a:latin typeface="Calibri"/>
+              </a:rPr>
+              <a:t>Pairs</a:t>
+            </a:r>
+          </a:p>
+        </p:txBody>
+      </p:sp>
+      <p:sp>
+        <p:nvSpPr>
+          <p:cNvPr id="9" name="Oval 8"/>
+          <p:cNvSpPr/>
+          <p:nvPr/>
+        </p:nvSpPr>
+        <p:spPr>
+          <a:xfrm>
+            <a:off x="548640" y="2482596"/>
+            <a:ext cx="384048" cy="384048"/>
+          </a:xfrm>
+          <a:prstGeom prst="ellipse">
+            <a:avLst/>
+          </a:prstGeom>
+          <a:solidFill>
+            <a:srgbClr val="0645AD"/>
+          </a:solidFill>
+          <a:ln>
+            <a:noFill/>
+          </a:ln>
+          <a:effectLst/>
+        </p:spPr>
+        <p:style>
+          <a:lnRef idx="1">
+            <a:schemeClr val="accent1"/>
+          </a:lnRef>
+          <a:fillRef idx="3">
+            <a:schemeClr val="accent1"/>
+          </a:fillRef>
+          <a:effectRef idx="2">
+            <a:schemeClr val="accent1"/>
+          </a:effectRef>
+          <a:fontRef idx="minor">
+            <a:schemeClr val="lt1"/>
+          </a:fontRef>
+        </p:style>
+        <p:txBody>
+          <a:bodyPr rtlCol="0" anchor="ctr" lIns="0" rIns="0" tIns="0" bIns="0"/>
+          <a:lstStyle/>
+          <a:p>
+            <a:pPr algn="ctr"/>
+            <a:r>
+              <a:rPr sz="1300" b="1">
+                <a:solidFill>
+                  <a:srgbClr val="FFFFFF"/>
+                </a:solidFill>
+                <a:latin typeface="Calibri"/>
+              </a:rPr>
+              <a:t>1</a:t>
+            </a:r>
+          </a:p>
+        </p:txBody>
+      </p:sp>
+      <p:sp>
+        <p:nvSpPr>
+          <p:cNvPr id="10" name="TextBox 9"/>
+          <p:cNvSpPr txBox="1"/>
+          <p:nvPr/>
+        </p:nvSpPr>
+        <p:spPr>
+          <a:xfrm>
+            <a:off x="1143000" y="2240280"/>
+            <a:ext cx="5943600" cy="868680"/>
+          </a:xfrm>
+          <a:prstGeom prst="rect">
+            <a:avLst/>
+          </a:prstGeom>
+          <a:noFill/>
+        </p:spPr>
+        <p:txBody>
+          <a:bodyPr wrap="square" anchor="ctr" lIns="0" rIns="0" tIns="0" bIns="0"/>
+          <a:lstStyle/>
+          <a:p>
+            <a:pPr algn="l"/>
+            <a:r>
+              <a:rPr sz="1700" b="0" i="0">
+                <a:solidFill>
+                  <a:srgbClr val="202122"/>
+                </a:solidFill>
+                <a:latin typeface="Calibri"/>
+              </a:rPr>
+              <a:t>Use the cost data from your teacher for a small engineered product.</a:t>
+            </a:r>
+          </a:p>
+        </p:txBody>
+      </p:sp>
+      <p:sp>
+        <p:nvSpPr>
+          <p:cNvPr id="11" name="Oval 10"/>
+          <p:cNvSpPr/>
+          <p:nvPr/>
+        </p:nvSpPr>
+        <p:spPr>
+          <a:xfrm>
+            <a:off x="548640" y="3461004"/>
+            <a:ext cx="384048" cy="384048"/>
+          </a:xfrm>
+          <a:prstGeom prst="ellipse">
+            <a:avLst/>
+          </a:prstGeom>
+          <a:solidFill>
+            <a:srgbClr val="0645AD"/>
+          </a:solidFill>
+          <a:ln>
+            <a:noFill/>
+          </a:ln>
+          <a:effectLst/>
+        </p:spPr>
+        <p:style>
+          <a:lnRef idx="1">
+            <a:schemeClr val="accent1"/>
+          </a:lnRef>
+          <a:fillRef idx="3">
+            <a:schemeClr val="accent1"/>
+          </a:fillRef>
+          <a:effectRef idx="2">
+            <a:schemeClr val="accent1"/>
+          </a:effectRef>
+          <a:fontRef idx="minor">
+            <a:schemeClr val="lt1"/>
+          </a:fontRef>
+        </p:style>
+        <p:txBody>
+          <a:bodyPr rtlCol="0" anchor="ctr" lIns="0" rIns="0" tIns="0" bIns="0"/>
+          <a:lstStyle/>
+          <a:p>
+            <a:pPr algn="ctr"/>
+            <a:r>
+              <a:rPr sz="1300" b="1">
+                <a:solidFill>
+                  <a:srgbClr val="FFFFFF"/>
+                </a:solidFill>
+                <a:latin typeface="Calibri"/>
+              </a:rPr>
+              <a:t>2</a:t>
+            </a:r>
+          </a:p>
+        </p:txBody>
+      </p:sp>
+      <p:sp>
+        <p:nvSpPr>
+          <p:cNvPr id="12" name="TextBox 11"/>
+          <p:cNvSpPr txBox="1"/>
+          <p:nvPr/>
+        </p:nvSpPr>
+        <p:spPr>
+          <a:xfrm>
+            <a:off x="1143000" y="3218688"/>
+            <a:ext cx="5943600" cy="868680"/>
+          </a:xfrm>
+          <a:prstGeom prst="rect">
+            <a:avLst/>
+          </a:prstGeom>
+          <a:noFill/>
+        </p:spPr>
+        <p:txBody>
+          <a:bodyPr wrap="square" anchor="ctr" lIns="0" rIns="0" tIns="0" bIns="0"/>
+          <a:lstStyle/>
+          <a:p>
+            <a:pPr algn="l"/>
+            <a:r>
+              <a:rPr sz="1700" b="0" i="0">
+                <a:solidFill>
+                  <a:srgbClr val="202122"/>
+                </a:solidFill>
+                <a:latin typeface="Calibri"/>
+              </a:rPr>
+              <a:t>Calculate the cost per unit including overheads.</a:t>
+            </a:r>
+          </a:p>
+        </p:txBody>
+      </p:sp>
+      <p:sp>
+        <p:nvSpPr>
+          <p:cNvPr id="13" name="Oval 12"/>
+          <p:cNvSpPr/>
+          <p:nvPr/>
+        </p:nvSpPr>
+        <p:spPr>
+          <a:xfrm>
+            <a:off x="548640" y="4439412"/>
+            <a:ext cx="384048" cy="384048"/>
+          </a:xfrm>
+          <a:prstGeom prst="ellipse">
+            <a:avLst/>
+          </a:prstGeom>
+          <a:solidFill>
+            <a:srgbClr val="0645AD"/>
+          </a:solidFill>
+          <a:ln>
+            <a:noFill/>
+          </a:ln>
+          <a:effectLst/>
+        </p:spPr>
+        <p:style>
+          <a:lnRef idx="1">
+            <a:schemeClr val="accent1"/>
+          </a:lnRef>
+          <a:fillRef idx="3">
+            <a:schemeClr val="accent1"/>
+          </a:fillRef>
+          <a:effectRef idx="2">
+            <a:schemeClr val="accent1"/>
+          </a:effectRef>
+          <a:fontRef idx="minor">
+            <a:schemeClr val="lt1"/>
+          </a:fontRef>
+        </p:style>
+        <p:txBody>
+          <a:bodyPr rtlCol="0" anchor="ctr" lIns="0" rIns="0" tIns="0" bIns="0"/>
+          <a:lstStyle/>
+          <a:p>
+            <a:pPr algn="ctr"/>
+            <a:r>
+              <a:rPr sz="1300" b="1">
+                <a:solidFill>
+                  <a:srgbClr val="FFFFFF"/>
+                </a:solidFill>
+                <a:latin typeface="Calibri"/>
+              </a:rPr>
+              <a:t>3</a:t>
+            </a:r>
+          </a:p>
+        </p:txBody>
+      </p:sp>
+      <p:sp>
+        <p:nvSpPr>
+          <p:cNvPr id="14" name="TextBox 13"/>
+          <p:cNvSpPr txBox="1"/>
+          <p:nvPr/>
+        </p:nvSpPr>
+        <p:spPr>
+          <a:xfrm>
+            <a:off x="1143000" y="4197096"/>
+            <a:ext cx="5943600" cy="868680"/>
+          </a:xfrm>
+          <a:prstGeom prst="rect">
+            <a:avLst/>
+          </a:prstGeom>
+          <a:noFill/>
+        </p:spPr>
+        <p:txBody>
+          <a:bodyPr wrap="square" anchor="ctr" lIns="0" rIns="0" tIns="0" bIns="0"/>
+          <a:lstStyle/>
+          <a:p>
+            <a:pPr algn="l"/>
+            <a:r>
+              <a:rPr sz="1700" b="0" i="0">
+                <a:solidFill>
+                  <a:srgbClr val="202122"/>
+                </a:solidFill>
+                <a:latin typeface="Calibri"/>
+              </a:rPr>
+              <a:t>Set a selling price and calculate the break-even quantity.</a:t>
+            </a:r>
+          </a:p>
+        </p:txBody>
+      </p:sp>
+      <p:sp>
+        <p:nvSpPr>
+          <p:cNvPr id="15" name="Oval 14"/>
+          <p:cNvSpPr/>
+          <p:nvPr/>
+        </p:nvSpPr>
+        <p:spPr>
+          <a:xfrm>
+            <a:off x="548640" y="5417820"/>
+            <a:ext cx="384048" cy="384048"/>
+          </a:xfrm>
+          <a:prstGeom prst="ellipse">
+            <a:avLst/>
+          </a:prstGeom>
+          <a:solidFill>
+            <a:srgbClr val="0645AD"/>
+          </a:solidFill>
+          <a:ln>
+            <a:noFill/>
+          </a:ln>
+          <a:effectLst/>
+        </p:spPr>
+        <p:style>
+          <a:lnRef idx="1">
+            <a:schemeClr val="accent1"/>
+          </a:lnRef>
+          <a:fillRef idx="3">
+            <a:schemeClr val="accent1"/>
+          </a:fillRef>
+          <a:effectRef idx="2">
+            <a:schemeClr val="accent1"/>
+          </a:effectRef>
+          <a:fontRef idx="minor">
+            <a:schemeClr val="lt1"/>
+          </a:fontRef>
+        </p:style>
+        <p:txBody>
+          <a:bodyPr rtlCol="0" anchor="ctr" lIns="0" rIns="0" tIns="0" bIns="0"/>
+          <a:lstStyle/>
+          <a:p>
+            <a:pPr algn="ctr"/>
+            <a:r>
+              <a:rPr sz="1300" b="1">
+                <a:solidFill>
+                  <a:srgbClr val="FFFFFF"/>
+                </a:solidFill>
+                <a:latin typeface="Calibri"/>
+              </a:rPr>
+              <a:t>4</a:t>
+            </a:r>
+          </a:p>
+        </p:txBody>
+      </p:sp>
+      <p:sp>
+        <p:nvSpPr>
+          <p:cNvPr id="16" name="TextBox 15"/>
+          <p:cNvSpPr txBox="1"/>
+          <p:nvPr/>
+        </p:nvSpPr>
+        <p:spPr>
+          <a:xfrm>
+            <a:off x="1143000" y="5175504"/>
+            <a:ext cx="5943600" cy="868680"/>
+          </a:xfrm>
+          <a:prstGeom prst="rect">
+            <a:avLst/>
+          </a:prstGeom>
+          <a:noFill/>
+        </p:spPr>
+        <p:txBody>
+          <a:bodyPr wrap="square" anchor="ctr" lIns="0" rIns="0" tIns="0" bIns="0"/>
+          <a:lstStyle/>
+          <a:p>
+            <a:pPr algn="l"/>
+            <a:r>
+              <a:rPr sz="1700" b="0" i="0">
+                <a:solidFill>
+                  <a:srgbClr val="202122"/>
+                </a:solidFill>
+                <a:latin typeface="Calibri"/>
+              </a:rPr>
+              <a:t>Explain one risk to your cash flow.</a:t>
+            </a:r>
+          </a:p>
+        </p:txBody>
+      </p:sp>
+      <p:sp>
+        <p:nvSpPr>
+          <p:cNvPr id="17" name="Rounded Rectangle 16"/>
+          <p:cNvSpPr/>
+          <p:nvPr/>
+        </p:nvSpPr>
+        <p:spPr>
+          <a:xfrm>
+            <a:off x="7772400" y="1508760"/>
+            <a:ext cx="3867912" cy="4572000"/>
+          </a:xfrm>
+          <a:prstGeom prst="roundRect">
+            <a:avLst>
+              <a:gd name="adj" fmla="val 8000"/>
+            </a:avLst>
+          </a:prstGeom>
+          <a:solidFill>
+            <a:srgbClr val="EAF3FF"/>
+          </a:solidFill>
+          <a:ln>
+            <a:noFill/>
+          </a:ln>
+          <a:effectLst/>
+        </p:spPr>
+        <p:style>
+          <a:lnRef idx="1">
+            <a:schemeClr val="accent1"/>
+          </a:lnRef>
+          <a:fillRef idx="3">
+            <a:schemeClr val="accent1"/>
+          </a:fillRef>
+          <a:effectRef idx="2">
+            <a:schemeClr val="accent1"/>
+          </a:effectRef>
+          <a:fontRef idx="minor">
+            <a:schemeClr val="lt1"/>
+          </a:fontRef>
+        </p:style>
+        <p:txBody>
+          <a:bodyPr rtlCol="0" anchor="ctr"/>
+          <a:lstStyle/>
+          <a:p/>
+        </p:txBody>
+      </p:sp>
+      <p:sp>
+        <p:nvSpPr>
+          <p:cNvPr id="18" name="TextBox 17"/>
+          <p:cNvSpPr txBox="1"/>
+          <p:nvPr/>
+        </p:nvSpPr>
+        <p:spPr>
+          <a:xfrm>
+            <a:off x="8046720" y="1737360"/>
+            <a:ext cx="3291840" cy="365760"/>
+          </a:xfrm>
+          <a:prstGeom prst="rect">
+            <a:avLst/>
+          </a:prstGeom>
+          <a:noFill/>
+        </p:spPr>
+        <p:txBody>
+          <a:bodyPr wrap="square" anchor="t" lIns="0" rIns="0" tIns="0" bIns="0"/>
+          <a:lstStyle/>
+          <a:p>
+            <a:pPr algn="l"/>
+            <a:r>
+              <a:rPr sz="1300" b="1" i="0">
+                <a:solidFill>
+                  <a:srgbClr val="0645AD"/>
+                </a:solidFill>
+                <a:latin typeface="Calibri"/>
+              </a:rPr>
+              <a:t>SUCCESS CRITERIA</a:t>
+            </a:r>
+          </a:p>
+        </p:txBody>
+      </p:sp>
+      <p:sp>
+        <p:nvSpPr>
+          <p:cNvPr id="19" name="TextBox 18"/>
+          <p:cNvSpPr txBox="1"/>
+          <p:nvPr/>
+        </p:nvSpPr>
+        <p:spPr>
+          <a:xfrm>
+            <a:off x="8046720" y="2240280"/>
+            <a:ext cx="3337560" cy="3657600"/>
+          </a:xfrm>
+          <a:prstGeom prst="rect">
+            <a:avLst/>
+          </a:prstGeom>
+          <a:noFill/>
+        </p:spPr>
+        <p:txBody>
+          <a:bodyPr wrap="square" lIns="0" rIns="0" tIns="0" bIns="0">
+            <a:spAutoFit/>
+          </a:bodyPr>
+          <a:lstStyle/>
+          <a:p>
+            <a:pPr marL="274320" indent="-274320">
+              <a:spcAft>
+                <a:spcPts val="810"/>
+              </a:spcAft>
+              <a:buClr>
+                <a:srgbClr val="0645AD"/>
+              </a:buClr>
+              <a:buFont typeface="Arial"/>
+              <a:buChar char="•"/>
+            </a:pPr>
+            <a:r>
+              <a:rPr sz="1800" b="0">
+                <a:solidFill>
+                  <a:srgbClr val="202122"/>
+                </a:solidFill>
+                <a:latin typeface="Calibri"/>
+              </a:rPr>
+              <a:t>Costs classified correctly</a:t>
+            </a:r>
+          </a:p>
+          <a:p>
+            <a:pPr marL="274320" indent="-274320">
+              <a:spcAft>
+                <a:spcPts val="810"/>
+              </a:spcAft>
+              <a:buClr>
+                <a:srgbClr val="0645AD"/>
+              </a:buClr>
+              <a:buFont typeface="Arial"/>
+              <a:buChar char="•"/>
+            </a:pPr>
+            <a:r>
+              <a:rPr sz="1800" b="0">
+                <a:solidFill>
+                  <a:srgbClr val="202122"/>
+                </a:solidFill>
+                <a:latin typeface="Calibri"/>
+              </a:rPr>
+              <a:t>Break-even calculated</a:t>
+            </a:r>
+          </a:p>
+          <a:p>
+            <a:pPr marL="274320" indent="-274320">
+              <a:spcAft>
+                <a:spcPts val="810"/>
+              </a:spcAft>
+              <a:buClr>
+                <a:srgbClr val="0645AD"/>
+              </a:buClr>
+              <a:buFont typeface="Arial"/>
+              <a:buChar char="•"/>
+            </a:pPr>
+            <a:r>
+              <a:rPr sz="1800" b="0">
+                <a:solidFill>
+                  <a:srgbClr val="202122"/>
+                </a:solidFill>
+                <a:latin typeface="Calibri"/>
+              </a:rPr>
+              <a:t>Cash flow risk realistic</a:t>
+            </a:r>
+          </a:p>
+        </p:txBody>
+      </p:sp>
+    </p:spTree>
+  </p:cSld>
+  <p:clrMapOvr>
+    <a:masterClrMapping/>
+  </p:clrMapOvr>
+</p:sld>
+</file>
+
+<file path=ppt/slides/slide13.xml><?xml version="1.0" encoding="utf-8"?>
+<p:sld xmlns:a="http://schemas.openxmlformats.org/drawingml/2006/main" xmlns:p="http://schemas.openxmlformats.org/presentationml/2006/main" xmlns:r="http://schemas.openxmlformats.org/officeDocument/2006/relationships">
+  <p:cSld>
+    <p:bg>
+      <p:bgPr>
+        <a:solidFill>
+          <a:srgbClr val="03306E"/>
+        </a:solidFill>
+        <a:effectLst/>
+      </p:bgPr>
+    </p:bg>
+    <p:spTree>
+      <p:nvGrpSpPr>
+        <p:cNvPr id="1" name=""/>
+        <p:cNvGrpSpPr/>
+        <p:nvPr/>
+      </p:nvGrpSpPr>
+      <p:grpSpPr/>
+      <p:sp>
+        <p:nvSpPr>
+          <p:cNvPr id="2" name="TextBox 1"/>
+          <p:cNvSpPr txBox="1"/>
+          <p:nvPr/>
+        </p:nvSpPr>
+        <p:spPr>
+          <a:xfrm>
+            <a:off x="548640" y="320040"/>
+            <a:ext cx="11094415" cy="274320"/>
+          </a:xfrm>
+          <a:prstGeom prst="rect">
+            <a:avLst/>
+          </a:prstGeom>
+          <a:noFill/>
+        </p:spPr>
+        <p:txBody>
+          <a:bodyPr wrap="square" anchor="t" lIns="0" rIns="0" tIns="0" bIns="0"/>
+          <a:lstStyle/>
+          <a:p>
+            <a:pPr algn="l"/>
+            <a:r>
+              <a:rPr sz="1100" b="1" i="0">
+                <a:solidFill>
+                  <a:srgbClr val="A9C8F0"/>
+                </a:solidFill>
+                <a:latin typeface="Calibri"/>
+              </a:rPr>
+              <a:t>ENGINEERING CORE  ·  Core topic 13</a:t>
+            </a:r>
+          </a:p>
+        </p:txBody>
+      </p:sp>
+      <p:sp>
+        <p:nvSpPr>
+          <p:cNvPr id="3" name="TextBox 2"/>
+          <p:cNvSpPr txBox="1"/>
+          <p:nvPr/>
+        </p:nvSpPr>
+        <p:spPr>
+          <a:xfrm>
+            <a:off x="548640" y="566928"/>
+            <a:ext cx="11094415" cy="822960"/>
+          </a:xfrm>
+          <a:prstGeom prst="rect">
+            <a:avLst/>
+          </a:prstGeom>
+          <a:noFill/>
+        </p:spPr>
+        <p:txBody>
+          <a:bodyPr wrap="square" anchor="ctr" lIns="0" rIns="0" tIns="0" bIns="0"/>
+          <a:lstStyle/>
+          <a:p>
+            <a:pPr algn="l"/>
+            <a:r>
+              <a:rPr sz="3200" b="1" i="0">
+                <a:solidFill>
+                  <a:srgbClr val="FFFFFF"/>
+                </a:solidFill>
+                <a:latin typeface="Cambria"/>
+              </a:rPr>
+              <a:t>Exit ticket</a:t>
+            </a:r>
+          </a:p>
+        </p:txBody>
+      </p:sp>
+      <p:sp>
+        <p:nvSpPr>
+          <p:cNvPr id="4" name="Oval 3"/>
+          <p:cNvSpPr/>
+          <p:nvPr/>
+        </p:nvSpPr>
+        <p:spPr>
+          <a:xfrm>
+            <a:off x="548640" y="1737360"/>
+            <a:ext cx="502920" cy="502920"/>
+          </a:xfrm>
+          <a:prstGeom prst="ellipse">
+            <a:avLst/>
+          </a:prstGeom>
+          <a:solidFill>
+            <a:srgbClr val="F2B705"/>
+          </a:solidFill>
+          <a:ln>
+            <a:noFill/>
+          </a:ln>
+          <a:effectLst/>
+        </p:spPr>
+        <p:style>
+          <a:lnRef idx="1">
+            <a:schemeClr val="accent1"/>
+          </a:lnRef>
+          <a:fillRef idx="3">
+            <a:schemeClr val="accent1"/>
+          </a:fillRef>
+          <a:effectRef idx="2">
+            <a:schemeClr val="accent1"/>
+          </a:effectRef>
+          <a:fontRef idx="minor">
+            <a:schemeClr val="lt1"/>
+          </a:fontRef>
+        </p:style>
+        <p:txBody>
+          <a:bodyPr rtlCol="0" anchor="ctr" lIns="0" rIns="0" tIns="0" bIns="0"/>
+          <a:lstStyle/>
+          <a:p>
+            <a:pPr algn="ctr"/>
+            <a:r>
+              <a:rPr sz="1700" b="1">
+                <a:solidFill>
+                  <a:srgbClr val="202122"/>
+                </a:solidFill>
+                <a:latin typeface="Calibri"/>
+              </a:rPr>
+              <a:t>1</a:t>
+            </a:r>
+          </a:p>
+        </p:txBody>
+      </p:sp>
+      <p:sp>
+        <p:nvSpPr>
+          <p:cNvPr id="5" name="TextBox 4"/>
+          <p:cNvSpPr txBox="1"/>
+          <p:nvPr/>
+        </p:nvSpPr>
+        <p:spPr>
+          <a:xfrm>
+            <a:off x="1325880" y="1645920"/>
+            <a:ext cx="6583680" cy="822960"/>
+          </a:xfrm>
+          <a:prstGeom prst="rect">
+            <a:avLst/>
+          </a:prstGeom>
+          <a:noFill/>
+        </p:spPr>
+        <p:txBody>
+          <a:bodyPr wrap="square" anchor="ctr" lIns="0" rIns="0" tIns="0" bIns="0"/>
+          <a:lstStyle/>
+          <a:p>
+            <a:pPr algn="l"/>
+            <a:r>
+              <a:rPr sz="2000" b="0" i="0">
+                <a:solidFill>
+                  <a:srgbClr val="FFFFFF"/>
+                </a:solidFill>
+                <a:latin typeface="Calibri"/>
+              </a:rPr>
+              <a:t>Give an example of non-value-added activity.</a:t>
+            </a:r>
+          </a:p>
+        </p:txBody>
+      </p:sp>
+      <p:sp>
+        <p:nvSpPr>
+          <p:cNvPr id="6" name="Oval 5"/>
+          <p:cNvSpPr/>
+          <p:nvPr/>
+        </p:nvSpPr>
+        <p:spPr>
+          <a:xfrm>
+            <a:off x="548640" y="2697480"/>
+            <a:ext cx="502920" cy="502920"/>
+          </a:xfrm>
+          <a:prstGeom prst="ellipse">
+            <a:avLst/>
+          </a:prstGeom>
+          <a:solidFill>
+            <a:srgbClr val="F2B705"/>
+          </a:solidFill>
+          <a:ln>
+            <a:noFill/>
+          </a:ln>
+          <a:effectLst/>
+        </p:spPr>
+        <p:style>
+          <a:lnRef idx="1">
+            <a:schemeClr val="accent1"/>
+          </a:lnRef>
+          <a:fillRef idx="3">
+            <a:schemeClr val="accent1"/>
+          </a:fillRef>
+          <a:effectRef idx="2">
+            <a:schemeClr val="accent1"/>
+          </a:effectRef>
+          <a:fontRef idx="minor">
+            <a:schemeClr val="lt1"/>
+          </a:fontRef>
+        </p:style>
+        <p:txBody>
+          <a:bodyPr rtlCol="0" anchor="ctr" lIns="0" rIns="0" tIns="0" bIns="0"/>
+          <a:lstStyle/>
+          <a:p>
+            <a:pPr algn="ctr"/>
+            <a:r>
+              <a:rPr sz="1700" b="1">
+                <a:solidFill>
+                  <a:srgbClr val="202122"/>
+                </a:solidFill>
+                <a:latin typeface="Calibri"/>
+              </a:rPr>
+              <a:t>2</a:t>
+            </a:r>
+          </a:p>
+        </p:txBody>
+      </p:sp>
+      <p:sp>
+        <p:nvSpPr>
+          <p:cNvPr id="7" name="TextBox 6"/>
+          <p:cNvSpPr txBox="1"/>
+          <p:nvPr/>
+        </p:nvSpPr>
+        <p:spPr>
+          <a:xfrm>
+            <a:off x="1325880" y="2606040"/>
+            <a:ext cx="6583680" cy="822960"/>
+          </a:xfrm>
+          <a:prstGeom prst="rect">
+            <a:avLst/>
+          </a:prstGeom>
+          <a:noFill/>
+        </p:spPr>
+        <p:txBody>
+          <a:bodyPr wrap="square" anchor="ctr" lIns="0" rIns="0" tIns="0" bIns="0"/>
+          <a:lstStyle/>
+          <a:p>
+            <a:pPr algn="l"/>
+            <a:r>
+              <a:rPr sz="2000" b="0" i="0">
+                <a:solidFill>
+                  <a:srgbClr val="FFFFFF"/>
+                </a:solidFill>
+                <a:latin typeface="Calibri"/>
+              </a:rPr>
+              <a:t>Why can a profitable company run out of cash?</a:t>
+            </a:r>
+          </a:p>
+        </p:txBody>
+      </p:sp>
+      <p:sp>
+        <p:nvSpPr>
+          <p:cNvPr id="8" name="Oval 7"/>
+          <p:cNvSpPr/>
+          <p:nvPr/>
+        </p:nvSpPr>
+        <p:spPr>
+          <a:xfrm>
+            <a:off x="548640" y="3657600"/>
+            <a:ext cx="502920" cy="502920"/>
+          </a:xfrm>
+          <a:prstGeom prst="ellipse">
+            <a:avLst/>
+          </a:prstGeom>
+          <a:solidFill>
+            <a:srgbClr val="F2B705"/>
+          </a:solidFill>
+          <a:ln>
+            <a:noFill/>
+          </a:ln>
+          <a:effectLst/>
+        </p:spPr>
+        <p:style>
+          <a:lnRef idx="1">
+            <a:schemeClr val="accent1"/>
+          </a:lnRef>
+          <a:fillRef idx="3">
+            <a:schemeClr val="accent1"/>
+          </a:fillRef>
+          <a:effectRef idx="2">
+            <a:schemeClr val="accent1"/>
+          </a:effectRef>
+          <a:fontRef idx="minor">
+            <a:schemeClr val="lt1"/>
+          </a:fontRef>
+        </p:style>
+        <p:txBody>
+          <a:bodyPr rtlCol="0" anchor="ctr" lIns="0" rIns="0" tIns="0" bIns="0"/>
+          <a:lstStyle/>
+          <a:p>
+            <a:pPr algn="ctr"/>
+            <a:r>
+              <a:rPr sz="1700" b="1">
+                <a:solidFill>
+                  <a:srgbClr val="202122"/>
+                </a:solidFill>
+                <a:latin typeface="Calibri"/>
+              </a:rPr>
+              <a:t>3</a:t>
+            </a:r>
+          </a:p>
+        </p:txBody>
+      </p:sp>
+      <p:sp>
+        <p:nvSpPr>
+          <p:cNvPr id="9" name="TextBox 8"/>
+          <p:cNvSpPr txBox="1"/>
+          <p:nvPr/>
+        </p:nvSpPr>
+        <p:spPr>
+          <a:xfrm>
+            <a:off x="1325880" y="3566160"/>
+            <a:ext cx="6583680" cy="822960"/>
+          </a:xfrm>
+          <a:prstGeom prst="rect">
+            <a:avLst/>
+          </a:prstGeom>
+          <a:noFill/>
+        </p:spPr>
+        <p:txBody>
+          <a:bodyPr wrap="square" anchor="ctr" lIns="0" rIns="0" tIns="0" bIns="0"/>
+          <a:lstStyle/>
+          <a:p>
+            <a:pPr algn="l"/>
+            <a:r>
+              <a:rPr sz="2000" b="0" i="0">
+                <a:solidFill>
+                  <a:srgbClr val="FFFFFF"/>
+                </a:solidFill>
+                <a:latin typeface="Calibri"/>
+              </a:rPr>
+              <a:t>What is a tender?</a:t>
+            </a:r>
+          </a:p>
+        </p:txBody>
+      </p:sp>
+      <p:sp>
+        <p:nvSpPr>
+          <p:cNvPr id="10" name="Rounded Rectangle 9"/>
+          <p:cNvSpPr/>
+          <p:nvPr/>
+        </p:nvSpPr>
+        <p:spPr>
+          <a:xfrm>
+            <a:off x="8229600" y="1645920"/>
+            <a:ext cx="3410712" cy="2926080"/>
+          </a:xfrm>
+          <a:prstGeom prst="roundRect">
+            <a:avLst>
+              <a:gd name="adj" fmla="val 8000"/>
+            </a:avLst>
+          </a:prstGeom>
+          <a:solidFill>
+            <a:srgbClr val="0645AD"/>
+          </a:solidFill>
+          <a:ln>
+            <a:noFill/>
+          </a:ln>
+          <a:effectLst/>
+        </p:spPr>
+        <p:style>
+          <a:lnRef idx="1">
+            <a:schemeClr val="accent1"/>
+          </a:lnRef>
+          <a:fillRef idx="3">
+            <a:schemeClr val="accent1"/>
+          </a:fillRef>
+          <a:effectRef idx="2">
+            <a:schemeClr val="accent1"/>
+          </a:effectRef>
+          <a:fontRef idx="minor">
+            <a:schemeClr val="lt1"/>
+          </a:fontRef>
+        </p:style>
+        <p:txBody>
+          <a:bodyPr rtlCol="0" anchor="ctr"/>
+          <a:lstStyle/>
+          <a:p/>
+        </p:txBody>
+      </p:sp>
+      <p:sp>
+        <p:nvSpPr>
+          <p:cNvPr id="11" name="TextBox 10"/>
+          <p:cNvSpPr txBox="1"/>
+          <p:nvPr/>
+        </p:nvSpPr>
+        <p:spPr>
+          <a:xfrm>
+            <a:off x="8503920" y="1874519"/>
+            <a:ext cx="2926080" cy="365760"/>
+          </a:xfrm>
+          <a:prstGeom prst="rect">
+            <a:avLst/>
+          </a:prstGeom>
+          <a:noFill/>
+        </p:spPr>
+        <p:txBody>
+          <a:bodyPr wrap="square" anchor="t" lIns="0" rIns="0" tIns="0" bIns="0"/>
+          <a:lstStyle/>
+          <a:p>
+            <a:pPr algn="l"/>
+            <a:r>
+              <a:rPr sz="1300" b="1" i="0">
+                <a:solidFill>
+                  <a:srgbClr val="A9C8F0"/>
+                </a:solidFill>
+                <a:latin typeface="Calibri"/>
+              </a:rPr>
+              <a:t>REVISE THIS TOPIC</a:t>
+            </a:r>
+          </a:p>
+        </p:txBody>
+      </p:sp>
+      <p:sp>
+        <p:nvSpPr>
+          <p:cNvPr id="12" name="TextBox 11"/>
+          <p:cNvSpPr txBox="1"/>
+          <p:nvPr/>
+        </p:nvSpPr>
+        <p:spPr>
+          <a:xfrm>
+            <a:off x="8503920" y="2286000"/>
+            <a:ext cx="2926080" cy="548640"/>
+          </a:xfrm>
+          <a:prstGeom prst="rect">
+            <a:avLst/>
+          </a:prstGeom>
+          <a:noFill/>
+        </p:spPr>
+        <p:txBody>
+          <a:bodyPr wrap="square" anchor="t" lIns="0" rIns="0" tIns="0" bIns="0"/>
+          <a:lstStyle/>
+          <a:p>
+            <a:pPr algn="l"/>
+            <a:r>
+              <a:rPr sz="1400" b="0" i="0">
+                <a:solidFill>
+                  <a:srgbClr val="FFFFFF"/>
+                </a:solidFill>
+                <a:latin typeface="Calibri"/>
+              </a:rPr>
+              <a:t>Revision notes for this lesson are on the study wiki:</a:t>
+            </a:r>
+          </a:p>
+        </p:txBody>
+      </p:sp>
+      <p:sp>
+        <p:nvSpPr>
+          <p:cNvPr id="13" name="TextBox 12"/>
+          <p:cNvSpPr txBox="1"/>
+          <p:nvPr/>
+        </p:nvSpPr>
+        <p:spPr>
+          <a:xfrm>
+            <a:off x="8503920" y="2926080"/>
+            <a:ext cx="2926080" cy="1463040"/>
+          </a:xfrm>
+          <a:prstGeom prst="rect">
+            <a:avLst/>
+          </a:prstGeom>
+          <a:noFill/>
+        </p:spPr>
+        <p:txBody>
+          <a:bodyPr wrap="square" anchor="t" lIns="0" rIns="0" tIns="0" bIns="0"/>
+          <a:lstStyle/>
+          <a:p>
+            <a:pPr algn="l"/>
+            <a:r>
+              <a:rPr sz="2000" b="1" i="0">
+                <a:solidFill>
+                  <a:srgbClr val="FFFFFF"/>
+                </a:solidFill>
+                <a:latin typeface="Cambria"/>
+              </a:rPr>
+              <a:t>Engineering Core, Part 2</a:t>
+            </a:r>
+          </a:p>
+        </p:txBody>
+      </p:sp>
+      <p:sp>
+        <p:nvSpPr>
+          <p:cNvPr id="14" name="TextBox 13"/>
+          <p:cNvSpPr txBox="1"/>
+          <p:nvPr/>
+        </p:nvSpPr>
+        <p:spPr>
+          <a:xfrm>
+            <a:off x="548640" y="5669280"/>
+            <a:ext cx="11094415" cy="548640"/>
+          </a:xfrm>
+          <a:prstGeom prst="rect">
+            <a:avLst/>
+          </a:prstGeom>
+          <a:noFill/>
+        </p:spPr>
+        <p:txBody>
+          <a:bodyPr wrap="square" anchor="t" lIns="0" rIns="0" tIns="0" bIns="0"/>
+          <a:lstStyle/>
+          <a:p>
+            <a:pPr algn="l"/>
+            <a:r>
+              <a:rPr sz="1200" b="0" i="0">
+                <a:solidFill>
+                  <a:srgbClr val="A9C8F0"/>
+                </a:solidFill>
+                <a:latin typeface="Calibri"/>
+              </a:rPr>
+              <a:t>https://lana6478.github.io/T-level-Design-Development-Engineering-Manufacturing/#/01-core-component/02-engineering-core-part2.md</a:t>
+            </a:r>
+          </a:p>
+        </p:txBody>
+      </p:sp>
+    </p:spTree>
+  </p:cSld>
+  <p:clrMapOvr>
+    <a:masterClrMapping/>
+  </p:clrMapOvr>
+</p:sld>
+</file>
+
 <file path=ppt/slides/slide2.xml><?xml version="1.0" encoding="utf-8"?>
 <p:sld xmlns:a="http://schemas.openxmlformats.org/drawingml/2006/main" xmlns:p="http://schemas.openxmlformats.org/presentationml/2006/main" xmlns:r="http://schemas.openxmlformats.org/officeDocument/2006/relationships">
   <p:cSld>
@@ -4756,22 +7279,102 @@
       </p:sp>
       <p:sp>
         <p:nvSpPr>
-          <p:cNvPr id="6" name="Rounded Rectangle 5"/>
+          <p:cNvPr id="6" name="TextBox 5"/>
+          <p:cNvSpPr txBox="1"/>
+          <p:nvPr/>
+        </p:nvSpPr>
+        <p:spPr>
+          <a:xfrm>
+            <a:off x="548640" y="1554480"/>
+            <a:ext cx="6720840" cy="4617720"/>
+          </a:xfrm>
+          <a:prstGeom prst="rect">
+            <a:avLst/>
+          </a:prstGeom>
+          <a:noFill/>
+        </p:spPr>
+        <p:txBody>
+          <a:bodyPr wrap="square" lIns="0" rIns="0" tIns="0" bIns="0">
+            <a:spAutoFit/>
+          </a:bodyPr>
+          <a:lstStyle/>
+          <a:p>
+            <a:pPr>
+              <a:spcAft>
+                <a:spcPts val="1320"/>
+              </a:spcAft>
+            </a:pPr>
+            <a:r>
+              <a:rPr sz="2200" b="0">
+                <a:solidFill>
+                  <a:srgbClr val="202122"/>
+                </a:solidFill>
+                <a:latin typeface="Calibri"/>
+              </a:rPr>
+              <a:t>Businesses aim to make a profit while meeting stakeholders' needs.</a:t>
+            </a:r>
+          </a:p>
+          <a:p>
+            <a:pPr>
+              <a:spcAft>
+                <a:spcPts val="1320"/>
+              </a:spcAft>
+            </a:pPr>
+            <a:r>
+              <a:rPr sz="2200" b="1">
+                <a:solidFill>
+                  <a:srgbClr val="202122"/>
+                </a:solidFill>
+                <a:latin typeface="Calibri"/>
+              </a:rPr>
+              <a:t>Efficiency matters:</a:t>
+            </a:r>
+            <a:r>
+              <a:rPr sz="2200" b="0">
+                <a:solidFill>
+                  <a:srgbClr val="202122"/>
+                </a:solidFill>
+                <a:latin typeface="Calibri"/>
+              </a:rPr>
+              <a:t> value-added activities, such as machining a part, make the product worth more; non-value-added activities, such as moving parts around or waiting, cost money without adding value.</a:t>
+            </a:r>
+          </a:p>
+          <a:p>
+            <a:pPr>
+              <a:spcAft>
+                <a:spcPts val="1320"/>
+              </a:spcAft>
+            </a:pPr>
+            <a:r>
+              <a:rPr sz="2200" b="0">
+                <a:solidFill>
+                  <a:srgbClr val="202122"/>
+                </a:solidFill>
+                <a:latin typeface="Calibri"/>
+              </a:rPr>
+              <a:t>Markets can be local, national or international. Prices are shaped by supply, demand and competition, and activities are judged on quality, cost and time. Research and development (R&amp;D) and innovation keep products competitive.</a:t>
+            </a:r>
+          </a:p>
+        </p:txBody>
+      </p:sp>
+      <p:sp>
+        <p:nvSpPr>
+          <p:cNvPr id="7" name="Rounded Rectangle 6"/>
           <p:cNvSpPr/>
           <p:nvPr/>
         </p:nvSpPr>
         <p:spPr>
           <a:xfrm>
-            <a:off x="548640" y="1600200"/>
-            <a:ext cx="5410047" cy="2148840"/>
+            <a:off x="7772400" y="1554480"/>
+            <a:ext cx="3867912" cy="4526280"/>
           </a:xfrm>
           <a:prstGeom prst="roundRect">
             <a:avLst>
-              <a:gd name="adj" fmla="val 6000"/>
+              <a:gd name="adj" fmla="val 8000"/>
             </a:avLst>
           </a:prstGeom>
           <a:solidFill>
-            <a:srgbClr val="EAF3FF"/>
+            <a:srgbClr val="03306E"/>
           </a:solidFill>
           <a:ln>
             <a:noFill/>
@@ -4800,14 +7403,14 @@
       </p:sp>
       <p:sp>
         <p:nvSpPr>
-          <p:cNvPr id="7" name="Oval 6"/>
+          <p:cNvPr id="8" name="Oval 7"/>
           <p:cNvSpPr/>
           <p:nvPr/>
         </p:nvSpPr>
         <p:spPr>
           <a:xfrm>
-            <a:off x="777240" y="1828800"/>
-            <a:ext cx="457200" cy="457200"/>
+            <a:off x="8046720" y="1828800"/>
+            <a:ext cx="548640" cy="548640"/>
           </a:xfrm>
           <a:prstGeom prst="ellipse">
             <a:avLst/>
@@ -4840,46 +7443,13 @@
           <a:p>
             <a:pPr algn="ctr"/>
             <a:r>
-              <a:rPr sz="1500" b="1">
+              <a:rPr sz="1300" b="1">
                 <a:solidFill>
                   <a:srgbClr val="202122"/>
                 </a:solidFill>
                 <a:latin typeface="Calibri"/>
               </a:rPr>
-              <a:t>1</a:t>
-            </a:r>
-          </a:p>
-        </p:txBody>
-      </p:sp>
-      <p:sp>
-        <p:nvSpPr>
-          <p:cNvPr id="8" name="TextBox 7"/>
-          <p:cNvSpPr txBox="1"/>
-          <p:nvPr/>
-        </p:nvSpPr>
-        <p:spPr>
-          <a:xfrm>
-            <a:off x="1371600" y="1801368"/>
-            <a:ext cx="4404207" cy="512064"/>
-          </a:xfrm>
-          <a:prstGeom prst="rect">
-            <a:avLst/>
-          </a:prstGeom>
-          <a:noFill/>
-        </p:spPr>
-        <p:txBody>
-          <a:bodyPr wrap="square" anchor="ctr" lIns="0" rIns="0" tIns="0" bIns="0"/>
-          <a:lstStyle/>
-          <a:p>
-            <a:pPr algn="l"/>
-            <a:r>
-              <a:rPr sz="1900" b="1" i="0">
-                <a:solidFill>
-                  <a:srgbClr val="03306E"/>
-                </a:solidFill>
-                <a:latin typeface="Calibri"/>
-              </a:rPr>
-              <a:t>Priorities</a:t>
+              <a:t>e.g.</a:t>
             </a:r>
           </a:p>
         </p:txBody>
@@ -4892,8 +7462,8 @@
         </p:nvSpPr>
         <p:spPr>
           <a:xfrm>
-            <a:off x="777240" y="2468880"/>
-            <a:ext cx="4952847" cy="1143000"/>
+            <a:off x="8046720" y="2560320"/>
+            <a:ext cx="3291840" cy="365760"/>
           </a:xfrm>
           <a:prstGeom prst="rect">
             <a:avLst/>
@@ -4906,124 +7476,27 @@
           <a:p>
             <a:pPr algn="l"/>
             <a:r>
-              <a:rPr sz="2000" b="0" i="0">
-                <a:solidFill>
-                  <a:srgbClr val="202122"/>
-                </a:solidFill>
-                <a:latin typeface="Calibri"/>
-              </a:rPr>
-              <a:t>Profit and stakeholder needs.</a:t>
-            </a:r>
-          </a:p>
-        </p:txBody>
-      </p:sp>
-      <p:sp>
-        <p:nvSpPr>
-          <p:cNvPr id="10" name="Rounded Rectangle 9"/>
-          <p:cNvSpPr/>
-          <p:nvPr/>
-        </p:nvSpPr>
-        <p:spPr>
-          <a:xfrm>
-            <a:off x="6233007" y="1600200"/>
-            <a:ext cx="5410047" cy="2148840"/>
-          </a:xfrm>
-          <a:prstGeom prst="roundRect">
-            <a:avLst>
-              <a:gd name="adj" fmla="val 6000"/>
-            </a:avLst>
-          </a:prstGeom>
-          <a:solidFill>
-            <a:srgbClr val="EAF3FF"/>
-          </a:solidFill>
-          <a:ln>
-            <a:noFill/>
-          </a:ln>
-          <a:effectLst/>
-        </p:spPr>
-        <p:style>
-          <a:lnRef idx="1">
-            <a:schemeClr val="accent1"/>
-          </a:lnRef>
-          <a:fillRef idx="3">
-            <a:schemeClr val="accent1"/>
-          </a:fillRef>
-          <a:effectRef idx="2">
-            <a:schemeClr val="accent1"/>
-          </a:effectRef>
-          <a:fontRef idx="minor">
-            <a:schemeClr val="lt1"/>
-          </a:fontRef>
-        </p:style>
-        <p:txBody>
-          <a:bodyPr rtlCol="0" anchor="ctr"/>
-          <a:lstStyle/>
-          <a:p/>
-        </p:txBody>
-      </p:sp>
-      <p:sp>
-        <p:nvSpPr>
-          <p:cNvPr id="11" name="Oval 10"/>
-          <p:cNvSpPr/>
-          <p:nvPr/>
-        </p:nvSpPr>
-        <p:spPr>
-          <a:xfrm>
-            <a:off x="6461607" y="1828800"/>
-            <a:ext cx="457200" cy="457200"/>
-          </a:xfrm>
-          <a:prstGeom prst="ellipse">
-            <a:avLst/>
-          </a:prstGeom>
-          <a:solidFill>
-            <a:srgbClr val="F2B705"/>
-          </a:solidFill>
-          <a:ln>
-            <a:noFill/>
-          </a:ln>
-          <a:effectLst/>
-        </p:spPr>
-        <p:style>
-          <a:lnRef idx="1">
-            <a:schemeClr val="accent1"/>
-          </a:lnRef>
-          <a:fillRef idx="3">
-            <a:schemeClr val="accent1"/>
-          </a:fillRef>
-          <a:effectRef idx="2">
-            <a:schemeClr val="accent1"/>
-          </a:effectRef>
-          <a:fontRef idx="minor">
-            <a:schemeClr val="lt1"/>
-          </a:fontRef>
-        </p:style>
-        <p:txBody>
-          <a:bodyPr rtlCol="0" anchor="ctr" lIns="0" rIns="0" tIns="0" bIns="0"/>
-          <a:lstStyle/>
-          <a:p>
-            <a:pPr algn="ctr"/>
-            <a:r>
-              <a:rPr sz="1500" b="1">
-                <a:solidFill>
-                  <a:srgbClr val="202122"/>
-                </a:solidFill>
-                <a:latin typeface="Calibri"/>
-              </a:rPr>
-              <a:t>2</a:t>
-            </a:r>
-          </a:p>
-        </p:txBody>
-      </p:sp>
-      <p:sp>
-        <p:nvSpPr>
-          <p:cNvPr id="12" name="TextBox 11"/>
+              <a:rPr sz="1300" b="1" i="0">
+                <a:solidFill>
+                  <a:srgbClr val="A9C8F0"/>
+                </a:solidFill>
+                <a:latin typeface="Calibri"/>
+              </a:rPr>
+              <a:t>EXAMPLE</a:t>
+            </a:r>
+          </a:p>
+        </p:txBody>
+      </p:sp>
+      <p:sp>
+        <p:nvSpPr>
+          <p:cNvPr id="10" name="TextBox 9"/>
           <p:cNvSpPr txBox="1"/>
           <p:nvPr/>
         </p:nvSpPr>
         <p:spPr>
           <a:xfrm>
-            <a:off x="7055967" y="1801368"/>
-            <a:ext cx="4404207" cy="512064"/>
+            <a:off x="8046720" y="2971800"/>
+            <a:ext cx="3291840" cy="2971800"/>
           </a:xfrm>
           <a:prstGeom prst="rect">
             <a:avLst/>
@@ -5031,377 +7504,18 @@
           <a:noFill/>
         </p:spPr>
         <p:txBody>
-          <a:bodyPr wrap="square" anchor="ctr" lIns="0" rIns="0" tIns="0" bIns="0"/>
+          <a:bodyPr wrap="square" anchor="t" lIns="0" rIns="0" tIns="0" bIns="0"/>
           <a:lstStyle/>
           <a:p>
             <a:pPr algn="l"/>
             <a:r>
-              <a:rPr sz="1900" b="1" i="0">
-                <a:solidFill>
-                  <a:srgbClr val="03306E"/>
-                </a:solidFill>
-                <a:latin typeface="Calibri"/>
-              </a:rPr>
-              <a:t>Efficiency</a:t>
-            </a:r>
-          </a:p>
-        </p:txBody>
-      </p:sp>
-      <p:sp>
-        <p:nvSpPr>
-          <p:cNvPr id="13" name="TextBox 12"/>
-          <p:cNvSpPr txBox="1"/>
-          <p:nvPr/>
-        </p:nvSpPr>
-        <p:spPr>
-          <a:xfrm>
-            <a:off x="6461607" y="2468880"/>
-            <a:ext cx="4952847" cy="1143000"/>
-          </a:xfrm>
-          <a:prstGeom prst="rect">
-            <a:avLst/>
-          </a:prstGeom>
-          <a:noFill/>
-        </p:spPr>
-        <p:txBody>
-          <a:bodyPr wrap="square" anchor="t" lIns="0" rIns="0" tIns="0" bIns="0"/>
-          <a:lstStyle/>
-          <a:p>
-            <a:pPr algn="l"/>
-            <a:r>
-              <a:rPr sz="2000" b="0" i="0">
-                <a:solidFill>
-                  <a:srgbClr val="202122"/>
-                </a:solidFill>
-                <a:latin typeface="Calibri"/>
-              </a:rPr>
-              <a:t>Value-added activity versus non-value-added activity.</a:t>
-            </a:r>
-          </a:p>
-        </p:txBody>
-      </p:sp>
-      <p:sp>
-        <p:nvSpPr>
-          <p:cNvPr id="14" name="Rounded Rectangle 13"/>
-          <p:cNvSpPr/>
-          <p:nvPr/>
-        </p:nvSpPr>
-        <p:spPr>
-          <a:xfrm>
-            <a:off x="548640" y="4023360"/>
-            <a:ext cx="5410047" cy="2148840"/>
-          </a:xfrm>
-          <a:prstGeom prst="roundRect">
-            <a:avLst>
-              <a:gd name="adj" fmla="val 6000"/>
-            </a:avLst>
-          </a:prstGeom>
-          <a:solidFill>
-            <a:srgbClr val="EAF3FF"/>
-          </a:solidFill>
-          <a:ln>
-            <a:noFill/>
-          </a:ln>
-          <a:effectLst/>
-        </p:spPr>
-        <p:style>
-          <a:lnRef idx="1">
-            <a:schemeClr val="accent1"/>
-          </a:lnRef>
-          <a:fillRef idx="3">
-            <a:schemeClr val="accent1"/>
-          </a:fillRef>
-          <a:effectRef idx="2">
-            <a:schemeClr val="accent1"/>
-          </a:effectRef>
-          <a:fontRef idx="minor">
-            <a:schemeClr val="lt1"/>
-          </a:fontRef>
-        </p:style>
-        <p:txBody>
-          <a:bodyPr rtlCol="0" anchor="ctr"/>
-          <a:lstStyle/>
-          <a:p/>
-        </p:txBody>
-      </p:sp>
-      <p:sp>
-        <p:nvSpPr>
-          <p:cNvPr id="15" name="Oval 14"/>
-          <p:cNvSpPr/>
-          <p:nvPr/>
-        </p:nvSpPr>
-        <p:spPr>
-          <a:xfrm>
-            <a:off x="777240" y="4251960"/>
-            <a:ext cx="457200" cy="457200"/>
-          </a:xfrm>
-          <a:prstGeom prst="ellipse">
-            <a:avLst/>
-          </a:prstGeom>
-          <a:solidFill>
-            <a:srgbClr val="F2B705"/>
-          </a:solidFill>
-          <a:ln>
-            <a:noFill/>
-          </a:ln>
-          <a:effectLst/>
-        </p:spPr>
-        <p:style>
-          <a:lnRef idx="1">
-            <a:schemeClr val="accent1"/>
-          </a:lnRef>
-          <a:fillRef idx="3">
-            <a:schemeClr val="accent1"/>
-          </a:fillRef>
-          <a:effectRef idx="2">
-            <a:schemeClr val="accent1"/>
-          </a:effectRef>
-          <a:fontRef idx="minor">
-            <a:schemeClr val="lt1"/>
-          </a:fontRef>
-        </p:style>
-        <p:txBody>
-          <a:bodyPr rtlCol="0" anchor="ctr" lIns="0" rIns="0" tIns="0" bIns="0"/>
-          <a:lstStyle/>
-          <a:p>
-            <a:pPr algn="ctr"/>
-            <a:r>
-              <a:rPr sz="1500" b="1">
-                <a:solidFill>
-                  <a:srgbClr val="202122"/>
-                </a:solidFill>
-                <a:latin typeface="Calibri"/>
-              </a:rPr>
-              <a:t>3</a:t>
-            </a:r>
-          </a:p>
-        </p:txBody>
-      </p:sp>
-      <p:sp>
-        <p:nvSpPr>
-          <p:cNvPr id="16" name="TextBox 15"/>
-          <p:cNvSpPr txBox="1"/>
-          <p:nvPr/>
-        </p:nvSpPr>
-        <p:spPr>
-          <a:xfrm>
-            <a:off x="1371600" y="4224528"/>
-            <a:ext cx="4404207" cy="512064"/>
-          </a:xfrm>
-          <a:prstGeom prst="rect">
-            <a:avLst/>
-          </a:prstGeom>
-          <a:noFill/>
-        </p:spPr>
-        <p:txBody>
-          <a:bodyPr wrap="square" anchor="ctr" lIns="0" rIns="0" tIns="0" bIns="0"/>
-          <a:lstStyle/>
-          <a:p>
-            <a:pPr algn="l"/>
-            <a:r>
-              <a:rPr sz="1900" b="1" i="0">
-                <a:solidFill>
-                  <a:srgbClr val="03306E"/>
-                </a:solidFill>
-                <a:latin typeface="Calibri"/>
-              </a:rPr>
-              <a:t>Markets</a:t>
-            </a:r>
-          </a:p>
-        </p:txBody>
-      </p:sp>
-      <p:sp>
-        <p:nvSpPr>
-          <p:cNvPr id="17" name="TextBox 16"/>
-          <p:cNvSpPr txBox="1"/>
-          <p:nvPr/>
-        </p:nvSpPr>
-        <p:spPr>
-          <a:xfrm>
-            <a:off x="777240" y="4892040"/>
-            <a:ext cx="4952847" cy="1143000"/>
-          </a:xfrm>
-          <a:prstGeom prst="rect">
-            <a:avLst/>
-          </a:prstGeom>
-          <a:noFill/>
-        </p:spPr>
-        <p:txBody>
-          <a:bodyPr wrap="square" anchor="t" lIns="0" rIns="0" tIns="0" bIns="0"/>
-          <a:lstStyle/>
-          <a:p>
-            <a:pPr algn="l"/>
-            <a:r>
-              <a:rPr sz="2000" b="0" i="0">
-                <a:solidFill>
-                  <a:srgbClr val="202122"/>
-                </a:solidFill>
-                <a:latin typeface="Calibri"/>
-              </a:rPr>
-              <a:t>Local, national and international; supply, demand and competition.</a:t>
-            </a:r>
-          </a:p>
-        </p:txBody>
-      </p:sp>
-      <p:sp>
-        <p:nvSpPr>
-          <p:cNvPr id="18" name="Rounded Rectangle 17"/>
-          <p:cNvSpPr/>
-          <p:nvPr/>
-        </p:nvSpPr>
-        <p:spPr>
-          <a:xfrm>
-            <a:off x="6233007" y="4023360"/>
-            <a:ext cx="5410047" cy="2148840"/>
-          </a:xfrm>
-          <a:prstGeom prst="roundRect">
-            <a:avLst>
-              <a:gd name="adj" fmla="val 6000"/>
-            </a:avLst>
-          </a:prstGeom>
-          <a:solidFill>
-            <a:srgbClr val="EAF3FF"/>
-          </a:solidFill>
-          <a:ln>
-            <a:noFill/>
-          </a:ln>
-          <a:effectLst/>
-        </p:spPr>
-        <p:style>
-          <a:lnRef idx="1">
-            <a:schemeClr val="accent1"/>
-          </a:lnRef>
-          <a:fillRef idx="3">
-            <a:schemeClr val="accent1"/>
-          </a:fillRef>
-          <a:effectRef idx="2">
-            <a:schemeClr val="accent1"/>
-          </a:effectRef>
-          <a:fontRef idx="minor">
-            <a:schemeClr val="lt1"/>
-          </a:fontRef>
-        </p:style>
-        <p:txBody>
-          <a:bodyPr rtlCol="0" anchor="ctr"/>
-          <a:lstStyle/>
-          <a:p/>
-        </p:txBody>
-      </p:sp>
-      <p:sp>
-        <p:nvSpPr>
-          <p:cNvPr id="19" name="Oval 18"/>
-          <p:cNvSpPr/>
-          <p:nvPr/>
-        </p:nvSpPr>
-        <p:spPr>
-          <a:xfrm>
-            <a:off x="6461607" y="4251960"/>
-            <a:ext cx="457200" cy="457200"/>
-          </a:xfrm>
-          <a:prstGeom prst="ellipse">
-            <a:avLst/>
-          </a:prstGeom>
-          <a:solidFill>
-            <a:srgbClr val="F2B705"/>
-          </a:solidFill>
-          <a:ln>
-            <a:noFill/>
-          </a:ln>
-          <a:effectLst/>
-        </p:spPr>
-        <p:style>
-          <a:lnRef idx="1">
-            <a:schemeClr val="accent1"/>
-          </a:lnRef>
-          <a:fillRef idx="3">
-            <a:schemeClr val="accent1"/>
-          </a:fillRef>
-          <a:effectRef idx="2">
-            <a:schemeClr val="accent1"/>
-          </a:effectRef>
-          <a:fontRef idx="minor">
-            <a:schemeClr val="lt1"/>
-          </a:fontRef>
-        </p:style>
-        <p:txBody>
-          <a:bodyPr rtlCol="0" anchor="ctr" lIns="0" rIns="0" tIns="0" bIns="0"/>
-          <a:lstStyle/>
-          <a:p>
-            <a:pPr algn="ctr"/>
-            <a:r>
-              <a:rPr sz="1500" b="1">
-                <a:solidFill>
-                  <a:srgbClr val="202122"/>
-                </a:solidFill>
-                <a:latin typeface="Calibri"/>
-              </a:rPr>
-              <a:t>4</a:t>
-            </a:r>
-          </a:p>
-        </p:txBody>
-      </p:sp>
-      <p:sp>
-        <p:nvSpPr>
-          <p:cNvPr id="20" name="TextBox 19"/>
-          <p:cNvSpPr txBox="1"/>
-          <p:nvPr/>
-        </p:nvSpPr>
-        <p:spPr>
-          <a:xfrm>
-            <a:off x="7055967" y="4224528"/>
-            <a:ext cx="4404207" cy="512064"/>
-          </a:xfrm>
-          <a:prstGeom prst="rect">
-            <a:avLst/>
-          </a:prstGeom>
-          <a:noFill/>
-        </p:spPr>
-        <p:txBody>
-          <a:bodyPr wrap="square" anchor="ctr" lIns="0" rIns="0" tIns="0" bIns="0"/>
-          <a:lstStyle/>
-          <a:p>
-            <a:pPr algn="l"/>
-            <a:r>
-              <a:rPr sz="1900" b="1" i="0">
-                <a:solidFill>
-                  <a:srgbClr val="03306E"/>
-                </a:solidFill>
-                <a:latin typeface="Calibri"/>
-              </a:rPr>
-              <a:t>Innovation</a:t>
-            </a:r>
-          </a:p>
-        </p:txBody>
-      </p:sp>
-      <p:sp>
-        <p:nvSpPr>
-          <p:cNvPr id="21" name="TextBox 20"/>
-          <p:cNvSpPr txBox="1"/>
-          <p:nvPr/>
-        </p:nvSpPr>
-        <p:spPr>
-          <a:xfrm>
-            <a:off x="6461607" y="4892040"/>
-            <a:ext cx="4952847" cy="1143000"/>
-          </a:xfrm>
-          <a:prstGeom prst="rect">
-            <a:avLst/>
-          </a:prstGeom>
-          <a:noFill/>
-        </p:spPr>
-        <p:txBody>
-          <a:bodyPr wrap="square" anchor="t" lIns="0" rIns="0" tIns="0" bIns="0"/>
-          <a:lstStyle/>
-          <a:p>
-            <a:pPr algn="l"/>
-            <a:r>
-              <a:rPr sz="2000" b="0" i="0">
-                <a:solidFill>
-                  <a:srgbClr val="202122"/>
-                </a:solidFill>
-                <a:latin typeface="Calibri"/>
-              </a:rPr>
-              <a:t>R&amp;D keeps products competitive.</a:t>
+              <a:rPr sz="1900" b="0" i="0">
+                <a:solidFill>
+                  <a:srgbClr val="FFFFFF"/>
+                </a:solidFill>
+                <a:latin typeface="Cambria"/>
+              </a:rPr>
+              <a:t>Cutting the time parts spend waiting between machines from 2 days to 2 hours adds no cost but frees cash and space: removing non-value-added activity.</a:t>
             </a:r>
           </a:p>
         </p:txBody>
@@ -5493,7 +7607,7 @@
                 </a:solidFill>
                 <a:latin typeface="Cambria"/>
               </a:rPr>
-              <a:t>Business practices</a:t>
+              <a:t>Commercial operations</a:t>
             </a:r>
           </a:p>
         </p:txBody>
@@ -5689,7 +7803,7 @@
                 </a:solidFill>
                 <a:latin typeface="Calibri"/>
               </a:rPr>
-              <a:t>Legal</a:t>
+              <a:t>Priorities</a:t>
             </a:r>
           </a:p>
         </p:txBody>
@@ -5722,7 +7836,7 @@
                 </a:solidFill>
                 <a:latin typeface="Calibri"/>
               </a:rPr>
-              <a:t>Tendering, contracts, warranties, force majeure, indemnity clauses, liabilities.</a:t>
+              <a:t>Profit and stakeholder needs.</a:t>
             </a:r>
           </a:p>
         </p:txBody>
@@ -5852,7 +7966,7 @@
                 </a:solidFill>
                 <a:latin typeface="Calibri"/>
               </a:rPr>
-              <a:t>Management</a:t>
+              <a:t>Efficiency</a:t>
             </a:r>
           </a:p>
         </p:txBody>
@@ -5885,7 +7999,7 @@
                 </a:solidFill>
                 <a:latin typeface="Calibri"/>
               </a:rPr>
-              <a:t>Resource planning, staffing, training and development.</a:t>
+              <a:t>Value-added activity versus non-value-added activity.</a:t>
             </a:r>
           </a:p>
         </p:txBody>
@@ -6015,7 +8129,7 @@
                 </a:solidFill>
                 <a:latin typeface="Calibri"/>
               </a:rPr>
-              <a:t>Business models</a:t>
+              <a:t>Markets</a:t>
             </a:r>
           </a:p>
         </p:txBody>
@@ -6048,7 +8162,7 @@
                 </a:solidFill>
                 <a:latin typeface="Calibri"/>
               </a:rPr>
-              <a:t>Traditional or agile.</a:t>
+              <a:t>Local, national and international; supply, demand and competition.</a:t>
             </a:r>
           </a:p>
         </p:txBody>
@@ -6178,7 +8292,7 @@
                 </a:solidFill>
                 <a:latin typeface="Calibri"/>
               </a:rPr>
-              <a:t>Systems</a:t>
+              <a:t>Innovation</a:t>
             </a:r>
           </a:p>
         </p:txBody>
@@ -6211,7 +8325,7 @@
                 </a:solidFill>
                 <a:latin typeface="Calibri"/>
               </a:rPr>
-              <a:t>Company management systems, policies and procedures.</a:t>
+              <a:t>R&amp;D keeps products competitive.</a:t>
             </a:r>
           </a:p>
         </p:txBody>
@@ -6303,7 +8417,7 @@
                 </a:solidFill>
                 <a:latin typeface="Cambria"/>
               </a:rPr>
-              <a:t>Financial concepts</a:t>
+              <a:t>Quick check: Commercial operations</a:t>
             </a:r>
           </a:p>
         </p:txBody>
@@ -6370,6 +8484,1673 @@
                 <a:latin typeface="Calibri"/>
               </a:rPr>
               <a:t>5</a:t>
+            </a:r>
+          </a:p>
+        </p:txBody>
+      </p:sp>
+      <p:sp>
+        <p:nvSpPr>
+          <p:cNvPr id="6" name="Oval 5"/>
+          <p:cNvSpPr/>
+          <p:nvPr/>
+        </p:nvSpPr>
+        <p:spPr>
+          <a:xfrm>
+            <a:off x="548640" y="1691640"/>
+            <a:ext cx="502920" cy="502920"/>
+          </a:xfrm>
+          <a:prstGeom prst="ellipse">
+            <a:avLst/>
+          </a:prstGeom>
+          <a:solidFill>
+            <a:srgbClr val="F2B705"/>
+          </a:solidFill>
+          <a:ln>
+            <a:noFill/>
+          </a:ln>
+          <a:effectLst/>
+        </p:spPr>
+        <p:style>
+          <a:lnRef idx="1">
+            <a:schemeClr val="accent1"/>
+          </a:lnRef>
+          <a:fillRef idx="3">
+            <a:schemeClr val="accent1"/>
+          </a:fillRef>
+          <a:effectRef idx="2">
+            <a:schemeClr val="accent1"/>
+          </a:effectRef>
+          <a:fontRef idx="minor">
+            <a:schemeClr val="lt1"/>
+          </a:fontRef>
+        </p:style>
+        <p:txBody>
+          <a:bodyPr rtlCol="0" anchor="ctr" lIns="0" rIns="0" tIns="0" bIns="0"/>
+          <a:lstStyle/>
+          <a:p>
+            <a:pPr algn="ctr"/>
+            <a:r>
+              <a:rPr sz="1600" b="1">
+                <a:solidFill>
+                  <a:srgbClr val="202122"/>
+                </a:solidFill>
+                <a:latin typeface="Calibri"/>
+              </a:rPr>
+              <a:t>1</a:t>
+            </a:r>
+          </a:p>
+        </p:txBody>
+      </p:sp>
+      <p:sp>
+        <p:nvSpPr>
+          <p:cNvPr id="7" name="TextBox 6"/>
+          <p:cNvSpPr txBox="1"/>
+          <p:nvPr/>
+        </p:nvSpPr>
+        <p:spPr>
+          <a:xfrm>
+            <a:off x="1371600" y="1645920"/>
+            <a:ext cx="10271455" cy="1188720"/>
+          </a:xfrm>
+          <a:prstGeom prst="rect">
+            <a:avLst/>
+          </a:prstGeom>
+          <a:noFill/>
+        </p:spPr>
+        <p:txBody>
+          <a:bodyPr wrap="square" anchor="t" lIns="0" rIns="0" tIns="0" bIns="0"/>
+          <a:lstStyle/>
+          <a:p>
+            <a:pPr algn="l"/>
+            <a:r>
+              <a:rPr sz="2400" b="0" i="0">
+                <a:solidFill>
+                  <a:srgbClr val="202122"/>
+                </a:solidFill>
+                <a:latin typeface="Calibri"/>
+              </a:rPr>
+              <a:t>What is a value-added activity?</a:t>
+            </a:r>
+          </a:p>
+        </p:txBody>
+      </p:sp>
+      <p:sp>
+        <p:nvSpPr>
+          <p:cNvPr id="8" name="Oval 7"/>
+          <p:cNvSpPr/>
+          <p:nvPr/>
+        </p:nvSpPr>
+        <p:spPr>
+          <a:xfrm>
+            <a:off x="548640" y="3108960"/>
+            <a:ext cx="502920" cy="502920"/>
+          </a:xfrm>
+          <a:prstGeom prst="ellipse">
+            <a:avLst/>
+          </a:prstGeom>
+          <a:solidFill>
+            <a:srgbClr val="F2B705"/>
+          </a:solidFill>
+          <a:ln>
+            <a:noFill/>
+          </a:ln>
+          <a:effectLst/>
+        </p:spPr>
+        <p:style>
+          <a:lnRef idx="1">
+            <a:schemeClr val="accent1"/>
+          </a:lnRef>
+          <a:fillRef idx="3">
+            <a:schemeClr val="accent1"/>
+          </a:fillRef>
+          <a:effectRef idx="2">
+            <a:schemeClr val="accent1"/>
+          </a:effectRef>
+          <a:fontRef idx="minor">
+            <a:schemeClr val="lt1"/>
+          </a:fontRef>
+        </p:style>
+        <p:txBody>
+          <a:bodyPr rtlCol="0" anchor="ctr" lIns="0" rIns="0" tIns="0" bIns="0"/>
+          <a:lstStyle/>
+          <a:p>
+            <a:pPr algn="ctr"/>
+            <a:r>
+              <a:rPr sz="1600" b="1">
+                <a:solidFill>
+                  <a:srgbClr val="202122"/>
+                </a:solidFill>
+                <a:latin typeface="Calibri"/>
+              </a:rPr>
+              <a:t>2</a:t>
+            </a:r>
+          </a:p>
+        </p:txBody>
+      </p:sp>
+      <p:sp>
+        <p:nvSpPr>
+          <p:cNvPr id="9" name="TextBox 8"/>
+          <p:cNvSpPr txBox="1"/>
+          <p:nvPr/>
+        </p:nvSpPr>
+        <p:spPr>
+          <a:xfrm>
+            <a:off x="1371600" y="3063240"/>
+            <a:ext cx="10271455" cy="1188720"/>
+          </a:xfrm>
+          <a:prstGeom prst="rect">
+            <a:avLst/>
+          </a:prstGeom>
+          <a:noFill/>
+        </p:spPr>
+        <p:txBody>
+          <a:bodyPr wrap="square" anchor="t" lIns="0" rIns="0" tIns="0" bIns="0"/>
+          <a:lstStyle/>
+          <a:p>
+            <a:pPr algn="l"/>
+            <a:r>
+              <a:rPr sz="2400" b="0" i="0">
+                <a:solidFill>
+                  <a:srgbClr val="202122"/>
+                </a:solidFill>
+                <a:latin typeface="Calibri"/>
+              </a:rPr>
+              <a:t>Give an example of non-value-added activity.</a:t>
+            </a:r>
+          </a:p>
+        </p:txBody>
+      </p:sp>
+      <p:sp>
+        <p:nvSpPr>
+          <p:cNvPr id="10" name="Oval 9"/>
+          <p:cNvSpPr/>
+          <p:nvPr/>
+        </p:nvSpPr>
+        <p:spPr>
+          <a:xfrm>
+            <a:off x="548640" y="4526280"/>
+            <a:ext cx="502920" cy="502920"/>
+          </a:xfrm>
+          <a:prstGeom prst="ellipse">
+            <a:avLst/>
+          </a:prstGeom>
+          <a:solidFill>
+            <a:srgbClr val="F2B705"/>
+          </a:solidFill>
+          <a:ln>
+            <a:noFill/>
+          </a:ln>
+          <a:effectLst/>
+        </p:spPr>
+        <p:style>
+          <a:lnRef idx="1">
+            <a:schemeClr val="accent1"/>
+          </a:lnRef>
+          <a:fillRef idx="3">
+            <a:schemeClr val="accent1"/>
+          </a:fillRef>
+          <a:effectRef idx="2">
+            <a:schemeClr val="accent1"/>
+          </a:effectRef>
+          <a:fontRef idx="minor">
+            <a:schemeClr val="lt1"/>
+          </a:fontRef>
+        </p:style>
+        <p:txBody>
+          <a:bodyPr rtlCol="0" anchor="ctr" lIns="0" rIns="0" tIns="0" bIns="0"/>
+          <a:lstStyle/>
+          <a:p>
+            <a:pPr algn="ctr"/>
+            <a:r>
+              <a:rPr sz="1600" b="1">
+                <a:solidFill>
+                  <a:srgbClr val="202122"/>
+                </a:solidFill>
+                <a:latin typeface="Calibri"/>
+              </a:rPr>
+              <a:t>3</a:t>
+            </a:r>
+          </a:p>
+        </p:txBody>
+      </p:sp>
+      <p:sp>
+        <p:nvSpPr>
+          <p:cNvPr id="11" name="TextBox 10"/>
+          <p:cNvSpPr txBox="1"/>
+          <p:nvPr/>
+        </p:nvSpPr>
+        <p:spPr>
+          <a:xfrm>
+            <a:off x="1371600" y="4480560"/>
+            <a:ext cx="10271455" cy="1188720"/>
+          </a:xfrm>
+          <a:prstGeom prst="rect">
+            <a:avLst/>
+          </a:prstGeom>
+          <a:noFill/>
+        </p:spPr>
+        <p:txBody>
+          <a:bodyPr wrap="square" anchor="t" lIns="0" rIns="0" tIns="0" bIns="0"/>
+          <a:lstStyle/>
+          <a:p>
+            <a:pPr algn="l"/>
+            <a:r>
+              <a:rPr sz="2400" b="0" i="0">
+                <a:solidFill>
+                  <a:srgbClr val="202122"/>
+                </a:solidFill>
+                <a:latin typeface="Calibri"/>
+              </a:rPr>
+              <a:t>Why invest in R&amp;D?</a:t>
+            </a:r>
+          </a:p>
+        </p:txBody>
+      </p:sp>
+      <p:sp>
+        <p:nvSpPr>
+          <p:cNvPr id="12" name="TextBox 11"/>
+          <p:cNvSpPr txBox="1"/>
+          <p:nvPr/>
+        </p:nvSpPr>
+        <p:spPr>
+          <a:xfrm>
+            <a:off x="548640" y="5852160"/>
+            <a:ext cx="11094415" cy="365760"/>
+          </a:xfrm>
+          <a:prstGeom prst="rect">
+            <a:avLst/>
+          </a:prstGeom>
+          <a:noFill/>
+        </p:spPr>
+        <p:txBody>
+          <a:bodyPr wrap="square" anchor="t" lIns="0" rIns="0" tIns="0" bIns="0"/>
+          <a:lstStyle/>
+          <a:p>
+            <a:pPr algn="l"/>
+            <a:r>
+              <a:rPr sz="1300" b="0" i="1">
+                <a:solidFill>
+                  <a:srgbClr val="54595D"/>
+                </a:solidFill>
+                <a:latin typeface="Calibri"/>
+              </a:rPr>
+              <a:t>Answer on mini whiteboards or in your book. Answers are in the speaker notes.</a:t>
+            </a:r>
+          </a:p>
+        </p:txBody>
+      </p:sp>
+    </p:spTree>
+  </p:cSld>
+  <p:clrMapOvr>
+    <a:masterClrMapping/>
+  </p:clrMapOvr>
+</p:sld>
+</file>
+
+<file path=ppt/slides/slide6.xml><?xml version="1.0" encoding="utf-8"?>
+<p:sld xmlns:a="http://schemas.openxmlformats.org/drawingml/2006/main" xmlns:p="http://schemas.openxmlformats.org/presentationml/2006/main" xmlns:r="http://schemas.openxmlformats.org/officeDocument/2006/relationships">
+  <p:cSld>
+    <p:bg>
+      <p:bgPr>
+        <a:solidFill>
+          <a:srgbClr val="FFFFFF"/>
+        </a:solidFill>
+        <a:effectLst/>
+      </p:bgPr>
+    </p:bg>
+    <p:spTree>
+      <p:nvGrpSpPr>
+        <p:cNvPr id="1" name=""/>
+        <p:cNvGrpSpPr/>
+        <p:nvPr/>
+      </p:nvGrpSpPr>
+      <p:grpSpPr/>
+      <p:sp>
+        <p:nvSpPr>
+          <p:cNvPr id="2" name="TextBox 1"/>
+          <p:cNvSpPr txBox="1"/>
+          <p:nvPr/>
+        </p:nvSpPr>
+        <p:spPr>
+          <a:xfrm>
+            <a:off x="548640" y="320040"/>
+            <a:ext cx="11094415" cy="274320"/>
+          </a:xfrm>
+          <a:prstGeom prst="rect">
+            <a:avLst/>
+          </a:prstGeom>
+          <a:noFill/>
+        </p:spPr>
+        <p:txBody>
+          <a:bodyPr wrap="square" anchor="t" lIns="0" rIns="0" tIns="0" bIns="0"/>
+          <a:lstStyle/>
+          <a:p>
+            <a:pPr algn="l"/>
+            <a:r>
+              <a:rPr sz="1100" b="1" i="0">
+                <a:solidFill>
+                  <a:srgbClr val="54595D"/>
+                </a:solidFill>
+                <a:latin typeface="Calibri"/>
+              </a:rPr>
+              <a:t>ENGINEERING CORE  ·  Core topic 13</a:t>
+            </a:r>
+          </a:p>
+        </p:txBody>
+      </p:sp>
+      <p:sp>
+        <p:nvSpPr>
+          <p:cNvPr id="3" name="TextBox 2"/>
+          <p:cNvSpPr txBox="1"/>
+          <p:nvPr/>
+        </p:nvSpPr>
+        <p:spPr>
+          <a:xfrm>
+            <a:off x="548640" y="566928"/>
+            <a:ext cx="11094415" cy="822960"/>
+          </a:xfrm>
+          <a:prstGeom prst="rect">
+            <a:avLst/>
+          </a:prstGeom>
+          <a:noFill/>
+        </p:spPr>
+        <p:txBody>
+          <a:bodyPr wrap="square" anchor="ctr" lIns="0" rIns="0" tIns="0" bIns="0"/>
+          <a:lstStyle/>
+          <a:p>
+            <a:pPr algn="l"/>
+            <a:r>
+              <a:rPr sz="3200" b="1" i="0">
+                <a:solidFill>
+                  <a:srgbClr val="03306E"/>
+                </a:solidFill>
+                <a:latin typeface="Cambria"/>
+              </a:rPr>
+              <a:t>Business practices</a:t>
+            </a:r>
+          </a:p>
+        </p:txBody>
+      </p:sp>
+      <p:sp>
+        <p:nvSpPr>
+          <p:cNvPr id="4" name="TextBox 3"/>
+          <p:cNvSpPr txBox="1"/>
+          <p:nvPr/>
+        </p:nvSpPr>
+        <p:spPr>
+          <a:xfrm>
+            <a:off x="548640" y="6446520"/>
+            <a:ext cx="8229600" cy="274320"/>
+          </a:xfrm>
+          <a:prstGeom prst="rect">
+            <a:avLst/>
+          </a:prstGeom>
+          <a:noFill/>
+        </p:spPr>
+        <p:txBody>
+          <a:bodyPr wrap="square" anchor="t" lIns="0" rIns="0" tIns="0" bIns="0"/>
+          <a:lstStyle/>
+          <a:p>
+            <a:pPr algn="l"/>
+            <a:r>
+              <a:rPr sz="1000" b="0" i="0">
+                <a:solidFill>
+                  <a:srgbClr val="54595D"/>
+                </a:solidFill>
+                <a:latin typeface="Calibri"/>
+              </a:rPr>
+              <a:t>Design and Development for Engineering and Manufacturing T Level  ·  Business, Commercial and Financial Awareness</a:t>
+            </a:r>
+          </a:p>
+        </p:txBody>
+      </p:sp>
+      <p:sp>
+        <p:nvSpPr>
+          <p:cNvPr id="5" name="TextBox 4"/>
+          <p:cNvSpPr txBox="1"/>
+          <p:nvPr/>
+        </p:nvSpPr>
+        <p:spPr>
+          <a:xfrm>
+            <a:off x="10728655" y="6446520"/>
+            <a:ext cx="914400" cy="274320"/>
+          </a:xfrm>
+          <a:prstGeom prst="rect">
+            <a:avLst/>
+          </a:prstGeom>
+          <a:noFill/>
+        </p:spPr>
+        <p:txBody>
+          <a:bodyPr wrap="square" anchor="t" lIns="0" rIns="0" tIns="0" bIns="0"/>
+          <a:lstStyle/>
+          <a:p>
+            <a:pPr algn="r"/>
+            <a:r>
+              <a:rPr sz="1000" b="0" i="0">
+                <a:solidFill>
+                  <a:srgbClr val="54595D"/>
+                </a:solidFill>
+                <a:latin typeface="Calibri"/>
+              </a:rPr>
+              <a:t>6</a:t>
+            </a:r>
+          </a:p>
+        </p:txBody>
+      </p:sp>
+      <p:sp>
+        <p:nvSpPr>
+          <p:cNvPr id="6" name="Rounded Rectangle 5"/>
+          <p:cNvSpPr/>
+          <p:nvPr/>
+        </p:nvSpPr>
+        <p:spPr>
+          <a:xfrm>
+            <a:off x="548640" y="1600200"/>
+            <a:ext cx="5410047" cy="2148840"/>
+          </a:xfrm>
+          <a:prstGeom prst="roundRect">
+            <a:avLst>
+              <a:gd name="adj" fmla="val 6000"/>
+            </a:avLst>
+          </a:prstGeom>
+          <a:solidFill>
+            <a:srgbClr val="EAF3FF"/>
+          </a:solidFill>
+          <a:ln>
+            <a:noFill/>
+          </a:ln>
+          <a:effectLst/>
+        </p:spPr>
+        <p:style>
+          <a:lnRef idx="1">
+            <a:schemeClr val="accent1"/>
+          </a:lnRef>
+          <a:fillRef idx="3">
+            <a:schemeClr val="accent1"/>
+          </a:fillRef>
+          <a:effectRef idx="2">
+            <a:schemeClr val="accent1"/>
+          </a:effectRef>
+          <a:fontRef idx="minor">
+            <a:schemeClr val="lt1"/>
+          </a:fontRef>
+        </p:style>
+        <p:txBody>
+          <a:bodyPr rtlCol="0" anchor="ctr"/>
+          <a:lstStyle/>
+          <a:p/>
+        </p:txBody>
+      </p:sp>
+      <p:sp>
+        <p:nvSpPr>
+          <p:cNvPr id="7" name="Oval 6"/>
+          <p:cNvSpPr/>
+          <p:nvPr/>
+        </p:nvSpPr>
+        <p:spPr>
+          <a:xfrm>
+            <a:off x="777240" y="1828800"/>
+            <a:ext cx="457200" cy="457200"/>
+          </a:xfrm>
+          <a:prstGeom prst="ellipse">
+            <a:avLst/>
+          </a:prstGeom>
+          <a:solidFill>
+            <a:srgbClr val="F2B705"/>
+          </a:solidFill>
+          <a:ln>
+            <a:noFill/>
+          </a:ln>
+          <a:effectLst/>
+        </p:spPr>
+        <p:style>
+          <a:lnRef idx="1">
+            <a:schemeClr val="accent1"/>
+          </a:lnRef>
+          <a:fillRef idx="3">
+            <a:schemeClr val="accent1"/>
+          </a:fillRef>
+          <a:effectRef idx="2">
+            <a:schemeClr val="accent1"/>
+          </a:effectRef>
+          <a:fontRef idx="minor">
+            <a:schemeClr val="lt1"/>
+          </a:fontRef>
+        </p:style>
+        <p:txBody>
+          <a:bodyPr rtlCol="0" anchor="ctr" lIns="0" rIns="0" tIns="0" bIns="0"/>
+          <a:lstStyle/>
+          <a:p>
+            <a:pPr algn="ctr"/>
+            <a:r>
+              <a:rPr sz="1500" b="1">
+                <a:solidFill>
+                  <a:srgbClr val="202122"/>
+                </a:solidFill>
+                <a:latin typeface="Calibri"/>
+              </a:rPr>
+              <a:t>1</a:t>
+            </a:r>
+          </a:p>
+        </p:txBody>
+      </p:sp>
+      <p:sp>
+        <p:nvSpPr>
+          <p:cNvPr id="8" name="TextBox 7"/>
+          <p:cNvSpPr txBox="1"/>
+          <p:nvPr/>
+        </p:nvSpPr>
+        <p:spPr>
+          <a:xfrm>
+            <a:off x="1371600" y="1801368"/>
+            <a:ext cx="4404207" cy="512064"/>
+          </a:xfrm>
+          <a:prstGeom prst="rect">
+            <a:avLst/>
+          </a:prstGeom>
+          <a:noFill/>
+        </p:spPr>
+        <p:txBody>
+          <a:bodyPr wrap="square" anchor="ctr" lIns="0" rIns="0" tIns="0" bIns="0"/>
+          <a:lstStyle/>
+          <a:p>
+            <a:pPr algn="l"/>
+            <a:r>
+              <a:rPr sz="1900" b="1" i="0">
+                <a:solidFill>
+                  <a:srgbClr val="03306E"/>
+                </a:solidFill>
+                <a:latin typeface="Calibri"/>
+              </a:rPr>
+              <a:t>Legal</a:t>
+            </a:r>
+          </a:p>
+        </p:txBody>
+      </p:sp>
+      <p:sp>
+        <p:nvSpPr>
+          <p:cNvPr id="9" name="TextBox 8"/>
+          <p:cNvSpPr txBox="1"/>
+          <p:nvPr/>
+        </p:nvSpPr>
+        <p:spPr>
+          <a:xfrm>
+            <a:off x="777240" y="2468880"/>
+            <a:ext cx="4952847" cy="1143000"/>
+          </a:xfrm>
+          <a:prstGeom prst="rect">
+            <a:avLst/>
+          </a:prstGeom>
+          <a:noFill/>
+        </p:spPr>
+        <p:txBody>
+          <a:bodyPr wrap="square" anchor="t" lIns="0" rIns="0" tIns="0" bIns="0"/>
+          <a:lstStyle/>
+          <a:p>
+            <a:pPr algn="l"/>
+            <a:r>
+              <a:rPr sz="2000" b="0" i="0">
+                <a:solidFill>
+                  <a:srgbClr val="202122"/>
+                </a:solidFill>
+                <a:latin typeface="Calibri"/>
+              </a:rPr>
+              <a:t>Tendering, contracts, warranties, force majeure, indemnity clauses, liabilities.</a:t>
+            </a:r>
+          </a:p>
+        </p:txBody>
+      </p:sp>
+      <p:sp>
+        <p:nvSpPr>
+          <p:cNvPr id="10" name="Rounded Rectangle 9"/>
+          <p:cNvSpPr/>
+          <p:nvPr/>
+        </p:nvSpPr>
+        <p:spPr>
+          <a:xfrm>
+            <a:off x="6233007" y="1600200"/>
+            <a:ext cx="5410047" cy="2148840"/>
+          </a:xfrm>
+          <a:prstGeom prst="roundRect">
+            <a:avLst>
+              <a:gd name="adj" fmla="val 6000"/>
+            </a:avLst>
+          </a:prstGeom>
+          <a:solidFill>
+            <a:srgbClr val="EAF3FF"/>
+          </a:solidFill>
+          <a:ln>
+            <a:noFill/>
+          </a:ln>
+          <a:effectLst/>
+        </p:spPr>
+        <p:style>
+          <a:lnRef idx="1">
+            <a:schemeClr val="accent1"/>
+          </a:lnRef>
+          <a:fillRef idx="3">
+            <a:schemeClr val="accent1"/>
+          </a:fillRef>
+          <a:effectRef idx="2">
+            <a:schemeClr val="accent1"/>
+          </a:effectRef>
+          <a:fontRef idx="minor">
+            <a:schemeClr val="lt1"/>
+          </a:fontRef>
+        </p:style>
+        <p:txBody>
+          <a:bodyPr rtlCol="0" anchor="ctr"/>
+          <a:lstStyle/>
+          <a:p/>
+        </p:txBody>
+      </p:sp>
+      <p:sp>
+        <p:nvSpPr>
+          <p:cNvPr id="11" name="Oval 10"/>
+          <p:cNvSpPr/>
+          <p:nvPr/>
+        </p:nvSpPr>
+        <p:spPr>
+          <a:xfrm>
+            <a:off x="6461607" y="1828800"/>
+            <a:ext cx="457200" cy="457200"/>
+          </a:xfrm>
+          <a:prstGeom prst="ellipse">
+            <a:avLst/>
+          </a:prstGeom>
+          <a:solidFill>
+            <a:srgbClr val="F2B705"/>
+          </a:solidFill>
+          <a:ln>
+            <a:noFill/>
+          </a:ln>
+          <a:effectLst/>
+        </p:spPr>
+        <p:style>
+          <a:lnRef idx="1">
+            <a:schemeClr val="accent1"/>
+          </a:lnRef>
+          <a:fillRef idx="3">
+            <a:schemeClr val="accent1"/>
+          </a:fillRef>
+          <a:effectRef idx="2">
+            <a:schemeClr val="accent1"/>
+          </a:effectRef>
+          <a:fontRef idx="minor">
+            <a:schemeClr val="lt1"/>
+          </a:fontRef>
+        </p:style>
+        <p:txBody>
+          <a:bodyPr rtlCol="0" anchor="ctr" lIns="0" rIns="0" tIns="0" bIns="0"/>
+          <a:lstStyle/>
+          <a:p>
+            <a:pPr algn="ctr"/>
+            <a:r>
+              <a:rPr sz="1500" b="1">
+                <a:solidFill>
+                  <a:srgbClr val="202122"/>
+                </a:solidFill>
+                <a:latin typeface="Calibri"/>
+              </a:rPr>
+              <a:t>2</a:t>
+            </a:r>
+          </a:p>
+        </p:txBody>
+      </p:sp>
+      <p:sp>
+        <p:nvSpPr>
+          <p:cNvPr id="12" name="TextBox 11"/>
+          <p:cNvSpPr txBox="1"/>
+          <p:nvPr/>
+        </p:nvSpPr>
+        <p:spPr>
+          <a:xfrm>
+            <a:off x="7055967" y="1801368"/>
+            <a:ext cx="4404207" cy="512064"/>
+          </a:xfrm>
+          <a:prstGeom prst="rect">
+            <a:avLst/>
+          </a:prstGeom>
+          <a:noFill/>
+        </p:spPr>
+        <p:txBody>
+          <a:bodyPr wrap="square" anchor="ctr" lIns="0" rIns="0" tIns="0" bIns="0"/>
+          <a:lstStyle/>
+          <a:p>
+            <a:pPr algn="l"/>
+            <a:r>
+              <a:rPr sz="1900" b="1" i="0">
+                <a:solidFill>
+                  <a:srgbClr val="03306E"/>
+                </a:solidFill>
+                <a:latin typeface="Calibri"/>
+              </a:rPr>
+              <a:t>Management</a:t>
+            </a:r>
+          </a:p>
+        </p:txBody>
+      </p:sp>
+      <p:sp>
+        <p:nvSpPr>
+          <p:cNvPr id="13" name="TextBox 12"/>
+          <p:cNvSpPr txBox="1"/>
+          <p:nvPr/>
+        </p:nvSpPr>
+        <p:spPr>
+          <a:xfrm>
+            <a:off x="6461607" y="2468880"/>
+            <a:ext cx="4952847" cy="1143000"/>
+          </a:xfrm>
+          <a:prstGeom prst="rect">
+            <a:avLst/>
+          </a:prstGeom>
+          <a:noFill/>
+        </p:spPr>
+        <p:txBody>
+          <a:bodyPr wrap="square" anchor="t" lIns="0" rIns="0" tIns="0" bIns="0"/>
+          <a:lstStyle/>
+          <a:p>
+            <a:pPr algn="l"/>
+            <a:r>
+              <a:rPr sz="2000" b="0" i="0">
+                <a:solidFill>
+                  <a:srgbClr val="202122"/>
+                </a:solidFill>
+                <a:latin typeface="Calibri"/>
+              </a:rPr>
+              <a:t>Resource planning, staffing, training and development.</a:t>
+            </a:r>
+          </a:p>
+        </p:txBody>
+      </p:sp>
+      <p:sp>
+        <p:nvSpPr>
+          <p:cNvPr id="14" name="Rounded Rectangle 13"/>
+          <p:cNvSpPr/>
+          <p:nvPr/>
+        </p:nvSpPr>
+        <p:spPr>
+          <a:xfrm>
+            <a:off x="548640" y="4023360"/>
+            <a:ext cx="5410047" cy="2148840"/>
+          </a:xfrm>
+          <a:prstGeom prst="roundRect">
+            <a:avLst>
+              <a:gd name="adj" fmla="val 6000"/>
+            </a:avLst>
+          </a:prstGeom>
+          <a:solidFill>
+            <a:srgbClr val="EAF3FF"/>
+          </a:solidFill>
+          <a:ln>
+            <a:noFill/>
+          </a:ln>
+          <a:effectLst/>
+        </p:spPr>
+        <p:style>
+          <a:lnRef idx="1">
+            <a:schemeClr val="accent1"/>
+          </a:lnRef>
+          <a:fillRef idx="3">
+            <a:schemeClr val="accent1"/>
+          </a:fillRef>
+          <a:effectRef idx="2">
+            <a:schemeClr val="accent1"/>
+          </a:effectRef>
+          <a:fontRef idx="minor">
+            <a:schemeClr val="lt1"/>
+          </a:fontRef>
+        </p:style>
+        <p:txBody>
+          <a:bodyPr rtlCol="0" anchor="ctr"/>
+          <a:lstStyle/>
+          <a:p/>
+        </p:txBody>
+      </p:sp>
+      <p:sp>
+        <p:nvSpPr>
+          <p:cNvPr id="15" name="Oval 14"/>
+          <p:cNvSpPr/>
+          <p:nvPr/>
+        </p:nvSpPr>
+        <p:spPr>
+          <a:xfrm>
+            <a:off x="777240" y="4251960"/>
+            <a:ext cx="457200" cy="457200"/>
+          </a:xfrm>
+          <a:prstGeom prst="ellipse">
+            <a:avLst/>
+          </a:prstGeom>
+          <a:solidFill>
+            <a:srgbClr val="F2B705"/>
+          </a:solidFill>
+          <a:ln>
+            <a:noFill/>
+          </a:ln>
+          <a:effectLst/>
+        </p:spPr>
+        <p:style>
+          <a:lnRef idx="1">
+            <a:schemeClr val="accent1"/>
+          </a:lnRef>
+          <a:fillRef idx="3">
+            <a:schemeClr val="accent1"/>
+          </a:fillRef>
+          <a:effectRef idx="2">
+            <a:schemeClr val="accent1"/>
+          </a:effectRef>
+          <a:fontRef idx="minor">
+            <a:schemeClr val="lt1"/>
+          </a:fontRef>
+        </p:style>
+        <p:txBody>
+          <a:bodyPr rtlCol="0" anchor="ctr" lIns="0" rIns="0" tIns="0" bIns="0"/>
+          <a:lstStyle/>
+          <a:p>
+            <a:pPr algn="ctr"/>
+            <a:r>
+              <a:rPr sz="1500" b="1">
+                <a:solidFill>
+                  <a:srgbClr val="202122"/>
+                </a:solidFill>
+                <a:latin typeface="Calibri"/>
+              </a:rPr>
+              <a:t>3</a:t>
+            </a:r>
+          </a:p>
+        </p:txBody>
+      </p:sp>
+      <p:sp>
+        <p:nvSpPr>
+          <p:cNvPr id="16" name="TextBox 15"/>
+          <p:cNvSpPr txBox="1"/>
+          <p:nvPr/>
+        </p:nvSpPr>
+        <p:spPr>
+          <a:xfrm>
+            <a:off x="1371600" y="4224528"/>
+            <a:ext cx="4404207" cy="512064"/>
+          </a:xfrm>
+          <a:prstGeom prst="rect">
+            <a:avLst/>
+          </a:prstGeom>
+          <a:noFill/>
+        </p:spPr>
+        <p:txBody>
+          <a:bodyPr wrap="square" anchor="ctr" lIns="0" rIns="0" tIns="0" bIns="0"/>
+          <a:lstStyle/>
+          <a:p>
+            <a:pPr algn="l"/>
+            <a:r>
+              <a:rPr sz="1900" b="1" i="0">
+                <a:solidFill>
+                  <a:srgbClr val="03306E"/>
+                </a:solidFill>
+                <a:latin typeface="Calibri"/>
+              </a:rPr>
+              <a:t>Business models</a:t>
+            </a:r>
+          </a:p>
+        </p:txBody>
+      </p:sp>
+      <p:sp>
+        <p:nvSpPr>
+          <p:cNvPr id="17" name="TextBox 16"/>
+          <p:cNvSpPr txBox="1"/>
+          <p:nvPr/>
+        </p:nvSpPr>
+        <p:spPr>
+          <a:xfrm>
+            <a:off x="777240" y="4892040"/>
+            <a:ext cx="4952847" cy="1143000"/>
+          </a:xfrm>
+          <a:prstGeom prst="rect">
+            <a:avLst/>
+          </a:prstGeom>
+          <a:noFill/>
+        </p:spPr>
+        <p:txBody>
+          <a:bodyPr wrap="square" anchor="t" lIns="0" rIns="0" tIns="0" bIns="0"/>
+          <a:lstStyle/>
+          <a:p>
+            <a:pPr algn="l"/>
+            <a:r>
+              <a:rPr sz="2000" b="0" i="0">
+                <a:solidFill>
+                  <a:srgbClr val="202122"/>
+                </a:solidFill>
+                <a:latin typeface="Calibri"/>
+              </a:rPr>
+              <a:t>Traditional or agile.</a:t>
+            </a:r>
+          </a:p>
+        </p:txBody>
+      </p:sp>
+      <p:sp>
+        <p:nvSpPr>
+          <p:cNvPr id="18" name="Rounded Rectangle 17"/>
+          <p:cNvSpPr/>
+          <p:nvPr/>
+        </p:nvSpPr>
+        <p:spPr>
+          <a:xfrm>
+            <a:off x="6233007" y="4023360"/>
+            <a:ext cx="5410047" cy="2148840"/>
+          </a:xfrm>
+          <a:prstGeom prst="roundRect">
+            <a:avLst>
+              <a:gd name="adj" fmla="val 6000"/>
+            </a:avLst>
+          </a:prstGeom>
+          <a:solidFill>
+            <a:srgbClr val="EAF3FF"/>
+          </a:solidFill>
+          <a:ln>
+            <a:noFill/>
+          </a:ln>
+          <a:effectLst/>
+        </p:spPr>
+        <p:style>
+          <a:lnRef idx="1">
+            <a:schemeClr val="accent1"/>
+          </a:lnRef>
+          <a:fillRef idx="3">
+            <a:schemeClr val="accent1"/>
+          </a:fillRef>
+          <a:effectRef idx="2">
+            <a:schemeClr val="accent1"/>
+          </a:effectRef>
+          <a:fontRef idx="minor">
+            <a:schemeClr val="lt1"/>
+          </a:fontRef>
+        </p:style>
+        <p:txBody>
+          <a:bodyPr rtlCol="0" anchor="ctr"/>
+          <a:lstStyle/>
+          <a:p/>
+        </p:txBody>
+      </p:sp>
+      <p:sp>
+        <p:nvSpPr>
+          <p:cNvPr id="19" name="Oval 18"/>
+          <p:cNvSpPr/>
+          <p:nvPr/>
+        </p:nvSpPr>
+        <p:spPr>
+          <a:xfrm>
+            <a:off x="6461607" y="4251960"/>
+            <a:ext cx="457200" cy="457200"/>
+          </a:xfrm>
+          <a:prstGeom prst="ellipse">
+            <a:avLst/>
+          </a:prstGeom>
+          <a:solidFill>
+            <a:srgbClr val="F2B705"/>
+          </a:solidFill>
+          <a:ln>
+            <a:noFill/>
+          </a:ln>
+          <a:effectLst/>
+        </p:spPr>
+        <p:style>
+          <a:lnRef idx="1">
+            <a:schemeClr val="accent1"/>
+          </a:lnRef>
+          <a:fillRef idx="3">
+            <a:schemeClr val="accent1"/>
+          </a:fillRef>
+          <a:effectRef idx="2">
+            <a:schemeClr val="accent1"/>
+          </a:effectRef>
+          <a:fontRef idx="minor">
+            <a:schemeClr val="lt1"/>
+          </a:fontRef>
+        </p:style>
+        <p:txBody>
+          <a:bodyPr rtlCol="0" anchor="ctr" lIns="0" rIns="0" tIns="0" bIns="0"/>
+          <a:lstStyle/>
+          <a:p>
+            <a:pPr algn="ctr"/>
+            <a:r>
+              <a:rPr sz="1500" b="1">
+                <a:solidFill>
+                  <a:srgbClr val="202122"/>
+                </a:solidFill>
+                <a:latin typeface="Calibri"/>
+              </a:rPr>
+              <a:t>4</a:t>
+            </a:r>
+          </a:p>
+        </p:txBody>
+      </p:sp>
+      <p:sp>
+        <p:nvSpPr>
+          <p:cNvPr id="20" name="TextBox 19"/>
+          <p:cNvSpPr txBox="1"/>
+          <p:nvPr/>
+        </p:nvSpPr>
+        <p:spPr>
+          <a:xfrm>
+            <a:off x="7055967" y="4224528"/>
+            <a:ext cx="4404207" cy="512064"/>
+          </a:xfrm>
+          <a:prstGeom prst="rect">
+            <a:avLst/>
+          </a:prstGeom>
+          <a:noFill/>
+        </p:spPr>
+        <p:txBody>
+          <a:bodyPr wrap="square" anchor="ctr" lIns="0" rIns="0" tIns="0" bIns="0"/>
+          <a:lstStyle/>
+          <a:p>
+            <a:pPr algn="l"/>
+            <a:r>
+              <a:rPr sz="1900" b="1" i="0">
+                <a:solidFill>
+                  <a:srgbClr val="03306E"/>
+                </a:solidFill>
+                <a:latin typeface="Calibri"/>
+              </a:rPr>
+              <a:t>Systems</a:t>
+            </a:r>
+          </a:p>
+        </p:txBody>
+      </p:sp>
+      <p:sp>
+        <p:nvSpPr>
+          <p:cNvPr id="21" name="TextBox 20"/>
+          <p:cNvSpPr txBox="1"/>
+          <p:nvPr/>
+        </p:nvSpPr>
+        <p:spPr>
+          <a:xfrm>
+            <a:off x="6461607" y="4892040"/>
+            <a:ext cx="4952847" cy="1143000"/>
+          </a:xfrm>
+          <a:prstGeom prst="rect">
+            <a:avLst/>
+          </a:prstGeom>
+          <a:noFill/>
+        </p:spPr>
+        <p:txBody>
+          <a:bodyPr wrap="square" anchor="t" lIns="0" rIns="0" tIns="0" bIns="0"/>
+          <a:lstStyle/>
+          <a:p>
+            <a:pPr algn="l"/>
+            <a:r>
+              <a:rPr sz="2000" b="0" i="0">
+                <a:solidFill>
+                  <a:srgbClr val="202122"/>
+                </a:solidFill>
+                <a:latin typeface="Calibri"/>
+              </a:rPr>
+              <a:t>Company management systems, policies and procedures.</a:t>
+            </a:r>
+          </a:p>
+        </p:txBody>
+      </p:sp>
+    </p:spTree>
+  </p:cSld>
+  <p:clrMapOvr>
+    <a:masterClrMapping/>
+  </p:clrMapOvr>
+</p:sld>
+</file>
+
+<file path=ppt/slides/slide7.xml><?xml version="1.0" encoding="utf-8"?>
+<p:sld xmlns:a="http://schemas.openxmlformats.org/drawingml/2006/main" xmlns:p="http://schemas.openxmlformats.org/presentationml/2006/main" xmlns:r="http://schemas.openxmlformats.org/officeDocument/2006/relationships">
+  <p:cSld>
+    <p:bg>
+      <p:bgPr>
+        <a:solidFill>
+          <a:srgbClr val="FFFFFF"/>
+        </a:solidFill>
+        <a:effectLst/>
+      </p:bgPr>
+    </p:bg>
+    <p:spTree>
+      <p:nvGrpSpPr>
+        <p:cNvPr id="1" name=""/>
+        <p:cNvGrpSpPr/>
+        <p:nvPr/>
+      </p:nvGrpSpPr>
+      <p:grpSpPr/>
+      <p:sp>
+        <p:nvSpPr>
+          <p:cNvPr id="2" name="TextBox 1"/>
+          <p:cNvSpPr txBox="1"/>
+          <p:nvPr/>
+        </p:nvSpPr>
+        <p:spPr>
+          <a:xfrm>
+            <a:off x="548640" y="320040"/>
+            <a:ext cx="11094415" cy="274320"/>
+          </a:xfrm>
+          <a:prstGeom prst="rect">
+            <a:avLst/>
+          </a:prstGeom>
+          <a:noFill/>
+        </p:spPr>
+        <p:txBody>
+          <a:bodyPr wrap="square" anchor="t" lIns="0" rIns="0" tIns="0" bIns="0"/>
+          <a:lstStyle/>
+          <a:p>
+            <a:pPr algn="l"/>
+            <a:r>
+              <a:rPr sz="1100" b="1" i="0">
+                <a:solidFill>
+                  <a:srgbClr val="54595D"/>
+                </a:solidFill>
+                <a:latin typeface="Calibri"/>
+              </a:rPr>
+              <a:t>ENGINEERING CORE  ·  Core topic 13</a:t>
+            </a:r>
+          </a:p>
+        </p:txBody>
+      </p:sp>
+      <p:sp>
+        <p:nvSpPr>
+          <p:cNvPr id="3" name="TextBox 2"/>
+          <p:cNvSpPr txBox="1"/>
+          <p:nvPr/>
+        </p:nvSpPr>
+        <p:spPr>
+          <a:xfrm>
+            <a:off x="548640" y="566928"/>
+            <a:ext cx="11094415" cy="822960"/>
+          </a:xfrm>
+          <a:prstGeom prst="rect">
+            <a:avLst/>
+          </a:prstGeom>
+          <a:noFill/>
+        </p:spPr>
+        <p:txBody>
+          <a:bodyPr wrap="square" anchor="ctr" lIns="0" rIns="0" tIns="0" bIns="0"/>
+          <a:lstStyle/>
+          <a:p>
+            <a:pPr algn="l"/>
+            <a:r>
+              <a:rPr sz="3200" b="1" i="0">
+                <a:solidFill>
+                  <a:srgbClr val="03306E"/>
+                </a:solidFill>
+                <a:latin typeface="Cambria"/>
+              </a:rPr>
+              <a:t>Financial concepts</a:t>
+            </a:r>
+          </a:p>
+        </p:txBody>
+      </p:sp>
+      <p:sp>
+        <p:nvSpPr>
+          <p:cNvPr id="4" name="TextBox 3"/>
+          <p:cNvSpPr txBox="1"/>
+          <p:nvPr/>
+        </p:nvSpPr>
+        <p:spPr>
+          <a:xfrm>
+            <a:off x="548640" y="6446520"/>
+            <a:ext cx="8229600" cy="274320"/>
+          </a:xfrm>
+          <a:prstGeom prst="rect">
+            <a:avLst/>
+          </a:prstGeom>
+          <a:noFill/>
+        </p:spPr>
+        <p:txBody>
+          <a:bodyPr wrap="square" anchor="t" lIns="0" rIns="0" tIns="0" bIns="0"/>
+          <a:lstStyle/>
+          <a:p>
+            <a:pPr algn="l"/>
+            <a:r>
+              <a:rPr sz="1000" b="0" i="0">
+                <a:solidFill>
+                  <a:srgbClr val="54595D"/>
+                </a:solidFill>
+                <a:latin typeface="Calibri"/>
+              </a:rPr>
+              <a:t>Design and Development for Engineering and Manufacturing T Level  ·  Business, Commercial and Financial Awareness</a:t>
+            </a:r>
+          </a:p>
+        </p:txBody>
+      </p:sp>
+      <p:sp>
+        <p:nvSpPr>
+          <p:cNvPr id="5" name="TextBox 4"/>
+          <p:cNvSpPr txBox="1"/>
+          <p:nvPr/>
+        </p:nvSpPr>
+        <p:spPr>
+          <a:xfrm>
+            <a:off x="10728655" y="6446520"/>
+            <a:ext cx="914400" cy="274320"/>
+          </a:xfrm>
+          <a:prstGeom prst="rect">
+            <a:avLst/>
+          </a:prstGeom>
+          <a:noFill/>
+        </p:spPr>
+        <p:txBody>
+          <a:bodyPr wrap="square" anchor="t" lIns="0" rIns="0" tIns="0" bIns="0"/>
+          <a:lstStyle/>
+          <a:p>
+            <a:pPr algn="r"/>
+            <a:r>
+              <a:rPr sz="1000" b="0" i="0">
+                <a:solidFill>
+                  <a:srgbClr val="54595D"/>
+                </a:solidFill>
+                <a:latin typeface="Calibri"/>
+              </a:rPr>
+              <a:t>7</a:t>
+            </a:r>
+          </a:p>
+        </p:txBody>
+      </p:sp>
+      <p:sp>
+        <p:nvSpPr>
+          <p:cNvPr id="6" name="TextBox 5"/>
+          <p:cNvSpPr txBox="1"/>
+          <p:nvPr/>
+        </p:nvSpPr>
+        <p:spPr>
+          <a:xfrm>
+            <a:off x="548640" y="1554480"/>
+            <a:ext cx="6720840" cy="4617720"/>
+          </a:xfrm>
+          <a:prstGeom prst="rect">
+            <a:avLst/>
+          </a:prstGeom>
+          <a:noFill/>
+        </p:spPr>
+        <p:txBody>
+          <a:bodyPr wrap="square" lIns="0" rIns="0" tIns="0" bIns="0">
+            <a:spAutoFit/>
+          </a:bodyPr>
+          <a:lstStyle/>
+          <a:p>
+            <a:pPr>
+              <a:spcAft>
+                <a:spcPts val="1320"/>
+              </a:spcAft>
+            </a:pPr>
+            <a:r>
+              <a:rPr sz="2200" b="0">
+                <a:solidFill>
+                  <a:srgbClr val="202122"/>
+                </a:solidFill>
+                <a:latin typeface="Calibri"/>
+              </a:rPr>
+              <a:t>Direct costs are tied to each product, such as materials. Indirect costs and overheads keep the business running, such as rent and electricity.</a:t>
+            </a:r>
+          </a:p>
+          <a:p>
+            <a:pPr>
+              <a:spcAft>
+                <a:spcPts val="1320"/>
+              </a:spcAft>
+            </a:pPr>
+            <a:r>
+              <a:rPr sz="2200" b="0">
+                <a:solidFill>
+                  <a:srgbClr val="202122"/>
+                </a:solidFill>
+                <a:latin typeface="Calibri"/>
+              </a:rPr>
+              <a:t>Break-even is the number of units where revenue equals total costs. Above it, the business makes a profit.</a:t>
+            </a:r>
+          </a:p>
+          <a:p>
+            <a:pPr>
+              <a:spcAft>
+                <a:spcPts val="1320"/>
+              </a:spcAft>
+            </a:pPr>
+            <a:r>
+              <a:rPr sz="2200" b="0">
+                <a:solidFill>
+                  <a:srgbClr val="202122"/>
+                </a:solidFill>
+                <a:latin typeface="Calibri"/>
+              </a:rPr>
+              <a:t>Cash flow is money moving in and out over time. Even a profitable business can fail if cash runs out before customers pay. Creditors are people you owe; debtors owe you.</a:t>
+            </a:r>
+          </a:p>
+          <a:p>
+            <a:pPr>
+              <a:spcAft>
+                <a:spcPts val="1320"/>
+              </a:spcAft>
+            </a:pPr>
+            <a:r>
+              <a:rPr sz="2200" b="0">
+                <a:solidFill>
+                  <a:srgbClr val="202122"/>
+                </a:solidFill>
+                <a:latin typeface="Calibri"/>
+              </a:rPr>
+              <a:t>Assets lose value over time (depreciation). Finance comes from loans, shares or capital.</a:t>
+            </a:r>
+          </a:p>
+        </p:txBody>
+      </p:sp>
+      <p:sp>
+        <p:nvSpPr>
+          <p:cNvPr id="7" name="Rounded Rectangle 6"/>
+          <p:cNvSpPr/>
+          <p:nvPr/>
+        </p:nvSpPr>
+        <p:spPr>
+          <a:xfrm>
+            <a:off x="7772400" y="1554480"/>
+            <a:ext cx="3867912" cy="4526280"/>
+          </a:xfrm>
+          <a:prstGeom prst="roundRect">
+            <a:avLst>
+              <a:gd name="adj" fmla="val 8000"/>
+            </a:avLst>
+          </a:prstGeom>
+          <a:solidFill>
+            <a:srgbClr val="03306E"/>
+          </a:solidFill>
+          <a:ln>
+            <a:noFill/>
+          </a:ln>
+          <a:effectLst/>
+        </p:spPr>
+        <p:style>
+          <a:lnRef idx="1">
+            <a:schemeClr val="accent1"/>
+          </a:lnRef>
+          <a:fillRef idx="3">
+            <a:schemeClr val="accent1"/>
+          </a:fillRef>
+          <a:effectRef idx="2">
+            <a:schemeClr val="accent1"/>
+          </a:effectRef>
+          <a:fontRef idx="minor">
+            <a:schemeClr val="lt1"/>
+          </a:fontRef>
+        </p:style>
+        <p:txBody>
+          <a:bodyPr rtlCol="0" anchor="ctr"/>
+          <a:lstStyle/>
+          <a:p/>
+        </p:txBody>
+      </p:sp>
+      <p:sp>
+        <p:nvSpPr>
+          <p:cNvPr id="8" name="Oval 7"/>
+          <p:cNvSpPr/>
+          <p:nvPr/>
+        </p:nvSpPr>
+        <p:spPr>
+          <a:xfrm>
+            <a:off x="8046720" y="1828800"/>
+            <a:ext cx="548640" cy="548640"/>
+          </a:xfrm>
+          <a:prstGeom prst="ellipse">
+            <a:avLst/>
+          </a:prstGeom>
+          <a:solidFill>
+            <a:srgbClr val="F2B705"/>
+          </a:solidFill>
+          <a:ln>
+            <a:noFill/>
+          </a:ln>
+          <a:effectLst/>
+        </p:spPr>
+        <p:style>
+          <a:lnRef idx="1">
+            <a:schemeClr val="accent1"/>
+          </a:lnRef>
+          <a:fillRef idx="3">
+            <a:schemeClr val="accent1"/>
+          </a:fillRef>
+          <a:effectRef idx="2">
+            <a:schemeClr val="accent1"/>
+          </a:effectRef>
+          <a:fontRef idx="minor">
+            <a:schemeClr val="lt1"/>
+          </a:fontRef>
+        </p:style>
+        <p:txBody>
+          <a:bodyPr rtlCol="0" anchor="ctr" lIns="0" rIns="0" tIns="0" bIns="0"/>
+          <a:lstStyle/>
+          <a:p>
+            <a:pPr algn="ctr"/>
+            <a:r>
+              <a:rPr sz="1300" b="1">
+                <a:solidFill>
+                  <a:srgbClr val="202122"/>
+                </a:solidFill>
+                <a:latin typeface="Calibri"/>
+              </a:rPr>
+              <a:t>e.g.</a:t>
+            </a:r>
+          </a:p>
+        </p:txBody>
+      </p:sp>
+      <p:sp>
+        <p:nvSpPr>
+          <p:cNvPr id="9" name="TextBox 8"/>
+          <p:cNvSpPr txBox="1"/>
+          <p:nvPr/>
+        </p:nvSpPr>
+        <p:spPr>
+          <a:xfrm>
+            <a:off x="8046720" y="2560320"/>
+            <a:ext cx="3291840" cy="365760"/>
+          </a:xfrm>
+          <a:prstGeom prst="rect">
+            <a:avLst/>
+          </a:prstGeom>
+          <a:noFill/>
+        </p:spPr>
+        <p:txBody>
+          <a:bodyPr wrap="square" anchor="t" lIns="0" rIns="0" tIns="0" bIns="0"/>
+          <a:lstStyle/>
+          <a:p>
+            <a:pPr algn="l"/>
+            <a:r>
+              <a:rPr sz="1300" b="1" i="0">
+                <a:solidFill>
+                  <a:srgbClr val="A9C8F0"/>
+                </a:solidFill>
+                <a:latin typeface="Calibri"/>
+              </a:rPr>
+              <a:t>EXAMPLE</a:t>
+            </a:r>
+          </a:p>
+        </p:txBody>
+      </p:sp>
+      <p:sp>
+        <p:nvSpPr>
+          <p:cNvPr id="10" name="TextBox 9"/>
+          <p:cNvSpPr txBox="1"/>
+          <p:nvPr/>
+        </p:nvSpPr>
+        <p:spPr>
+          <a:xfrm>
+            <a:off x="8046720" y="2971800"/>
+            <a:ext cx="3291840" cy="2971800"/>
+          </a:xfrm>
+          <a:prstGeom prst="rect">
+            <a:avLst/>
+          </a:prstGeom>
+          <a:noFill/>
+        </p:spPr>
+        <p:txBody>
+          <a:bodyPr wrap="square" anchor="t" lIns="0" rIns="0" tIns="0" bIns="0"/>
+          <a:lstStyle/>
+          <a:p>
+            <a:pPr algn="l"/>
+            <a:r>
+              <a:rPr sz="1900" b="0" i="0">
+                <a:solidFill>
+                  <a:srgbClr val="FFFFFF"/>
+                </a:solidFill>
+                <a:latin typeface="Cambria"/>
+              </a:rPr>
+              <a:t>Fixed costs 6,000 pounds a month; each part sells for 10 pounds and costs 4 pounds to make. Break-even = 6,000 / 6 = 1,000 parts a month.</a:t>
+            </a:r>
+          </a:p>
+        </p:txBody>
+      </p:sp>
+    </p:spTree>
+  </p:cSld>
+  <p:clrMapOvr>
+    <a:masterClrMapping/>
+  </p:clrMapOvr>
+</p:sld>
+</file>
+
+<file path=ppt/slides/slide8.xml><?xml version="1.0" encoding="utf-8"?>
+<p:sld xmlns:a="http://schemas.openxmlformats.org/drawingml/2006/main" xmlns:p="http://schemas.openxmlformats.org/presentationml/2006/main" xmlns:r="http://schemas.openxmlformats.org/officeDocument/2006/relationships">
+  <p:cSld>
+    <p:bg>
+      <p:bgPr>
+        <a:solidFill>
+          <a:srgbClr val="FFFFFF"/>
+        </a:solidFill>
+        <a:effectLst/>
+      </p:bgPr>
+    </p:bg>
+    <p:spTree>
+      <p:nvGrpSpPr>
+        <p:cNvPr id="1" name=""/>
+        <p:cNvGrpSpPr/>
+        <p:nvPr/>
+      </p:nvGrpSpPr>
+      <p:grpSpPr/>
+      <p:sp>
+        <p:nvSpPr>
+          <p:cNvPr id="2" name="TextBox 1"/>
+          <p:cNvSpPr txBox="1"/>
+          <p:nvPr/>
+        </p:nvSpPr>
+        <p:spPr>
+          <a:xfrm>
+            <a:off x="548640" y="320040"/>
+            <a:ext cx="11094415" cy="274320"/>
+          </a:xfrm>
+          <a:prstGeom prst="rect">
+            <a:avLst/>
+          </a:prstGeom>
+          <a:noFill/>
+        </p:spPr>
+        <p:txBody>
+          <a:bodyPr wrap="square" anchor="t" lIns="0" rIns="0" tIns="0" bIns="0"/>
+          <a:lstStyle/>
+          <a:p>
+            <a:pPr algn="l"/>
+            <a:r>
+              <a:rPr sz="1100" b="1" i="0">
+                <a:solidFill>
+                  <a:srgbClr val="54595D"/>
+                </a:solidFill>
+                <a:latin typeface="Calibri"/>
+              </a:rPr>
+              <a:t>ENGINEERING CORE  ·  Core topic 13</a:t>
+            </a:r>
+          </a:p>
+        </p:txBody>
+      </p:sp>
+      <p:sp>
+        <p:nvSpPr>
+          <p:cNvPr id="3" name="TextBox 2"/>
+          <p:cNvSpPr txBox="1"/>
+          <p:nvPr/>
+        </p:nvSpPr>
+        <p:spPr>
+          <a:xfrm>
+            <a:off x="548640" y="566928"/>
+            <a:ext cx="11094415" cy="822960"/>
+          </a:xfrm>
+          <a:prstGeom prst="rect">
+            <a:avLst/>
+          </a:prstGeom>
+          <a:noFill/>
+        </p:spPr>
+        <p:txBody>
+          <a:bodyPr wrap="square" anchor="ctr" lIns="0" rIns="0" tIns="0" bIns="0"/>
+          <a:lstStyle/>
+          <a:p>
+            <a:pPr algn="l"/>
+            <a:r>
+              <a:rPr sz="3200" b="1" i="0">
+                <a:solidFill>
+                  <a:srgbClr val="03306E"/>
+                </a:solidFill>
+                <a:latin typeface="Cambria"/>
+              </a:rPr>
+              <a:t>Financial concepts</a:t>
+            </a:r>
+          </a:p>
+        </p:txBody>
+      </p:sp>
+      <p:sp>
+        <p:nvSpPr>
+          <p:cNvPr id="4" name="TextBox 3"/>
+          <p:cNvSpPr txBox="1"/>
+          <p:nvPr/>
+        </p:nvSpPr>
+        <p:spPr>
+          <a:xfrm>
+            <a:off x="548640" y="6446520"/>
+            <a:ext cx="8229600" cy="274320"/>
+          </a:xfrm>
+          <a:prstGeom prst="rect">
+            <a:avLst/>
+          </a:prstGeom>
+          <a:noFill/>
+        </p:spPr>
+        <p:txBody>
+          <a:bodyPr wrap="square" anchor="t" lIns="0" rIns="0" tIns="0" bIns="0"/>
+          <a:lstStyle/>
+          <a:p>
+            <a:pPr algn="l"/>
+            <a:r>
+              <a:rPr sz="1000" b="0" i="0">
+                <a:solidFill>
+                  <a:srgbClr val="54595D"/>
+                </a:solidFill>
+                <a:latin typeface="Calibri"/>
+              </a:rPr>
+              <a:t>Design and Development for Engineering and Manufacturing T Level  ·  Business, Commercial and Financial Awareness</a:t>
+            </a:r>
+          </a:p>
+        </p:txBody>
+      </p:sp>
+      <p:sp>
+        <p:nvSpPr>
+          <p:cNvPr id="5" name="TextBox 4"/>
+          <p:cNvSpPr txBox="1"/>
+          <p:nvPr/>
+        </p:nvSpPr>
+        <p:spPr>
+          <a:xfrm>
+            <a:off x="10728655" y="6446520"/>
+            <a:ext cx="914400" cy="274320"/>
+          </a:xfrm>
+          <a:prstGeom prst="rect">
+            <a:avLst/>
+          </a:prstGeom>
+          <a:noFill/>
+        </p:spPr>
+        <p:txBody>
+          <a:bodyPr wrap="square" anchor="t" lIns="0" rIns="0" tIns="0" bIns="0"/>
+          <a:lstStyle/>
+          <a:p>
+            <a:pPr algn="r"/>
+            <a:r>
+              <a:rPr sz="1000" b="0" i="0">
+                <a:solidFill>
+                  <a:srgbClr val="54595D"/>
+                </a:solidFill>
+                <a:latin typeface="Calibri"/>
+              </a:rPr>
+              <a:t>8</a:t>
             </a:r>
           </a:p>
         </p:txBody>
@@ -6763,7 +10544,7 @@
 </p:sld>
 </file>
 
-<file path=ppt/slides/slide6.xml><?xml version="1.0" encoding="utf-8"?>
+<file path=ppt/slides/slide9.xml><?xml version="1.0" encoding="utf-8"?>
 <p:sld xmlns:a="http://schemas.openxmlformats.org/drawingml/2006/main" xmlns:p="http://schemas.openxmlformats.org/presentationml/2006/main" xmlns:r="http://schemas.openxmlformats.org/officeDocument/2006/relationships">
   <p:cSld>
     <p:bg>
@@ -6842,7 +10623,7 @@
                 </a:solidFill>
                 <a:latin typeface="Cambria"/>
               </a:rPr>
-              <a:t>Check your understanding</a:t>
+              <a:t>Quick check: Financial concepts</a:t>
             </a:r>
           </a:p>
         </p:txBody>
@@ -6908,7 +10689,7 @@
                 </a:solidFill>
                 <a:latin typeface="Calibri"/>
               </a:rPr>
-              <a:t>6</a:t>
+              <a:t>9</a:t>
             </a:r>
           </a:p>
         </p:txBody>
@@ -6921,8 +10702,8 @@
         </p:nvSpPr>
         <p:spPr>
           <a:xfrm>
-            <a:off x="548640" y="1618488"/>
-            <a:ext cx="411480" cy="411480"/>
+            <a:off x="548640" y="1691640"/>
+            <a:ext cx="502920" cy="502920"/>
           </a:xfrm>
           <a:prstGeom prst="ellipse">
             <a:avLst/>
@@ -6955,7 +10736,7 @@
           <a:p>
             <a:pPr algn="ctr"/>
             <a:r>
-              <a:rPr sz="1400" b="1">
+              <a:rPr sz="1600" b="1">
                 <a:solidFill>
                   <a:srgbClr val="202122"/>
                 </a:solidFill>
@@ -6974,8 +10755,8 @@
         </p:nvSpPr>
         <p:spPr>
           <a:xfrm>
-            <a:off x="1234440" y="1600200"/>
-            <a:ext cx="10408615" cy="1030986"/>
+            <a:off x="1371600" y="1645920"/>
+            <a:ext cx="10271455" cy="1188720"/>
           </a:xfrm>
           <a:prstGeom prst="rect">
             <a:avLst/>
@@ -6988,7 +10769,7 @@
           <a:p>
             <a:pPr algn="l"/>
             <a:r>
-              <a:rPr sz="2200" b="0" i="0">
+              <a:rPr sz="2400" b="0" i="0">
                 <a:solidFill>
                   <a:srgbClr val="202122"/>
                 </a:solidFill>
@@ -7007,8 +10788,8 @@
         </p:nvSpPr>
         <p:spPr>
           <a:xfrm>
-            <a:off x="548640" y="2814066"/>
-            <a:ext cx="411480" cy="411480"/>
+            <a:off x="548640" y="3108960"/>
+            <a:ext cx="502920" cy="502920"/>
           </a:xfrm>
           <a:prstGeom prst="ellipse">
             <a:avLst/>
@@ -7041,7 +10822,7 @@
           <a:p>
             <a:pPr algn="ctr"/>
             <a:r>
-              <a:rPr sz="1400" b="1">
+              <a:rPr sz="1600" b="1">
                 <a:solidFill>
                   <a:srgbClr val="202122"/>
                 </a:solidFill>
@@ -7060,8 +10841,8 @@
         </p:nvSpPr>
         <p:spPr>
           <a:xfrm>
-            <a:off x="1234440" y="2795778"/>
-            <a:ext cx="10408615" cy="1030986"/>
+            <a:off x="1371600" y="3063240"/>
+            <a:ext cx="10271455" cy="1188720"/>
           </a:xfrm>
           <a:prstGeom prst="rect">
             <a:avLst/>
@@ -7074,7 +10855,7 @@
           <a:p>
             <a:pPr algn="l"/>
             <a:r>
-              <a:rPr sz="2200" b="0" i="0">
+              <a:rPr sz="2400" b="0" i="0">
                 <a:solidFill>
                   <a:srgbClr val="202122"/>
                 </a:solidFill>
@@ -7093,8 +10874,8 @@
         </p:nvSpPr>
         <p:spPr>
           <a:xfrm>
-            <a:off x="548640" y="4009644"/>
-            <a:ext cx="411480" cy="411480"/>
+            <a:off x="548640" y="4526280"/>
+            <a:ext cx="502920" cy="502920"/>
           </a:xfrm>
           <a:prstGeom prst="ellipse">
             <a:avLst/>
@@ -7127,7 +10908,7 @@
           <a:p>
             <a:pPr algn="ctr"/>
             <a:r>
-              <a:rPr sz="1400" b="1">
+              <a:rPr sz="1600" b="1">
                 <a:solidFill>
                   <a:srgbClr val="202122"/>
                 </a:solidFill>
@@ -7146,8 +10927,8 @@
         </p:nvSpPr>
         <p:spPr>
           <a:xfrm>
-            <a:off x="1234440" y="3991356"/>
-            <a:ext cx="10408615" cy="1030986"/>
+            <a:off x="1371600" y="4480560"/>
+            <a:ext cx="10271455" cy="1188720"/>
           </a:xfrm>
           <a:prstGeom prst="rect">
             <a:avLst/>
@@ -7160,1052 +10941,13 @@
           <a:p>
             <a:pPr algn="l"/>
             <a:r>
-              <a:rPr sz="2200" b="0" i="0">
+              <a:rPr sz="2400" b="0" i="0">
                 <a:solidFill>
                   <a:srgbClr val="202122"/>
                 </a:solidFill>
                 <a:latin typeface="Calibri"/>
               </a:rPr>
-              <a:t>What is force majeure?</a:t>
-            </a:r>
-          </a:p>
-        </p:txBody>
-      </p:sp>
-      <p:sp>
-        <p:nvSpPr>
-          <p:cNvPr id="12" name="Oval 11"/>
-          <p:cNvSpPr/>
-          <p:nvPr/>
-        </p:nvSpPr>
-        <p:spPr>
-          <a:xfrm>
-            <a:off x="548640" y="5205221"/>
-            <a:ext cx="411480" cy="411480"/>
-          </a:xfrm>
-          <a:prstGeom prst="ellipse">
-            <a:avLst/>
-          </a:prstGeom>
-          <a:solidFill>
-            <a:srgbClr val="F2B705"/>
-          </a:solidFill>
-          <a:ln>
-            <a:noFill/>
-          </a:ln>
-          <a:effectLst/>
-        </p:spPr>
-        <p:style>
-          <a:lnRef idx="1">
-            <a:schemeClr val="accent1"/>
-          </a:lnRef>
-          <a:fillRef idx="3">
-            <a:schemeClr val="accent1"/>
-          </a:fillRef>
-          <a:effectRef idx="2">
-            <a:schemeClr val="accent1"/>
-          </a:effectRef>
-          <a:fontRef idx="minor">
-            <a:schemeClr val="lt1"/>
-          </a:fontRef>
-        </p:style>
-        <p:txBody>
-          <a:bodyPr rtlCol="0" anchor="ctr" lIns="0" rIns="0" tIns="0" bIns="0"/>
-          <a:lstStyle/>
-          <a:p>
-            <a:pPr algn="ctr"/>
-            <a:r>
-              <a:rPr sz="1400" b="1">
-                <a:solidFill>
-                  <a:srgbClr val="202122"/>
-                </a:solidFill>
-                <a:latin typeface="Calibri"/>
-              </a:rPr>
-              <a:t>4</a:t>
-            </a:r>
-          </a:p>
-        </p:txBody>
-      </p:sp>
-      <p:sp>
-        <p:nvSpPr>
-          <p:cNvPr id="13" name="TextBox 12"/>
-          <p:cNvSpPr txBox="1"/>
-          <p:nvPr/>
-        </p:nvSpPr>
-        <p:spPr>
-          <a:xfrm>
-            <a:off x="1234440" y="5186933"/>
-            <a:ext cx="10408615" cy="1030986"/>
-          </a:xfrm>
-          <a:prstGeom prst="rect">
-            <a:avLst/>
-          </a:prstGeom>
-          <a:noFill/>
-        </p:spPr>
-        <p:txBody>
-          <a:bodyPr wrap="square" anchor="t" lIns="0" rIns="0" tIns="0" bIns="0"/>
-          <a:lstStyle/>
-          <a:p>
-            <a:pPr algn="l"/>
-            <a:r>
-              <a:rPr sz="2200" b="0" i="0">
-                <a:solidFill>
-                  <a:srgbClr val="202122"/>
-                </a:solidFill>
-                <a:latin typeface="Calibri"/>
-              </a:rPr>
-              <a:t>What is a debtor?</a:t>
-            </a:r>
-          </a:p>
-        </p:txBody>
-      </p:sp>
-    </p:spTree>
-  </p:cSld>
-  <p:clrMapOvr>
-    <a:masterClrMapping/>
-  </p:clrMapOvr>
-</p:sld>
-</file>
-
-<file path=ppt/slides/slide7.xml><?xml version="1.0" encoding="utf-8"?>
-<p:sld xmlns:a="http://schemas.openxmlformats.org/drawingml/2006/main" xmlns:p="http://schemas.openxmlformats.org/presentationml/2006/main" xmlns:r="http://schemas.openxmlformats.org/officeDocument/2006/relationships">
-  <p:cSld>
-    <p:bg>
-      <p:bgPr>
-        <a:solidFill>
-          <a:srgbClr val="FFFFFF"/>
-        </a:solidFill>
-        <a:effectLst/>
-      </p:bgPr>
-    </p:bg>
-    <p:spTree>
-      <p:nvGrpSpPr>
-        <p:cNvPr id="1" name=""/>
-        <p:cNvGrpSpPr/>
-        <p:nvPr/>
-      </p:nvGrpSpPr>
-      <p:grpSpPr/>
-      <p:sp>
-        <p:nvSpPr>
-          <p:cNvPr id="2" name="TextBox 1"/>
-          <p:cNvSpPr txBox="1"/>
-          <p:nvPr/>
-        </p:nvSpPr>
-        <p:spPr>
-          <a:xfrm>
-            <a:off x="548640" y="320040"/>
-            <a:ext cx="11094415" cy="274320"/>
-          </a:xfrm>
-          <a:prstGeom prst="rect">
-            <a:avLst/>
-          </a:prstGeom>
-          <a:noFill/>
-        </p:spPr>
-        <p:txBody>
-          <a:bodyPr wrap="square" anchor="t" lIns="0" rIns="0" tIns="0" bIns="0"/>
-          <a:lstStyle/>
-          <a:p>
-            <a:pPr algn="l"/>
-            <a:r>
-              <a:rPr sz="1100" b="1" i="0">
-                <a:solidFill>
-                  <a:srgbClr val="54595D"/>
-                </a:solidFill>
-                <a:latin typeface="Calibri"/>
-              </a:rPr>
-              <a:t>ENGINEERING CORE  ·  Core topic 13</a:t>
-            </a:r>
-          </a:p>
-        </p:txBody>
-      </p:sp>
-      <p:sp>
-        <p:nvSpPr>
-          <p:cNvPr id="3" name="TextBox 2"/>
-          <p:cNvSpPr txBox="1"/>
-          <p:nvPr/>
-        </p:nvSpPr>
-        <p:spPr>
-          <a:xfrm>
-            <a:off x="548640" y="566928"/>
-            <a:ext cx="11094415" cy="822960"/>
-          </a:xfrm>
-          <a:prstGeom prst="rect">
-            <a:avLst/>
-          </a:prstGeom>
-          <a:noFill/>
-        </p:spPr>
-        <p:txBody>
-          <a:bodyPr wrap="square" anchor="ctr" lIns="0" rIns="0" tIns="0" bIns="0"/>
-          <a:lstStyle/>
-          <a:p>
-            <a:pPr algn="l"/>
-            <a:r>
-              <a:rPr sz="3200" b="1" i="0">
-                <a:solidFill>
-                  <a:srgbClr val="03306E"/>
-                </a:solidFill>
-                <a:latin typeface="Cambria"/>
-              </a:rPr>
-              <a:t>Answers</a:t>
-            </a:r>
-          </a:p>
-        </p:txBody>
-      </p:sp>
-      <p:sp>
-        <p:nvSpPr>
-          <p:cNvPr id="4" name="TextBox 3"/>
-          <p:cNvSpPr txBox="1"/>
-          <p:nvPr/>
-        </p:nvSpPr>
-        <p:spPr>
-          <a:xfrm>
-            <a:off x="548640" y="6446520"/>
-            <a:ext cx="8229600" cy="274320"/>
-          </a:xfrm>
-          <a:prstGeom prst="rect">
-            <a:avLst/>
-          </a:prstGeom>
-          <a:noFill/>
-        </p:spPr>
-        <p:txBody>
-          <a:bodyPr wrap="square" anchor="t" lIns="0" rIns="0" tIns="0" bIns="0"/>
-          <a:lstStyle/>
-          <a:p>
-            <a:pPr algn="l"/>
-            <a:r>
-              <a:rPr sz="1000" b="0" i="0">
-                <a:solidFill>
-                  <a:srgbClr val="54595D"/>
-                </a:solidFill>
-                <a:latin typeface="Calibri"/>
-              </a:rPr>
-              <a:t>Design and Development for Engineering and Manufacturing T Level  ·  Business, Commercial and Financial Awareness</a:t>
-            </a:r>
-          </a:p>
-        </p:txBody>
-      </p:sp>
-      <p:sp>
-        <p:nvSpPr>
-          <p:cNvPr id="5" name="TextBox 4"/>
-          <p:cNvSpPr txBox="1"/>
-          <p:nvPr/>
-        </p:nvSpPr>
-        <p:spPr>
-          <a:xfrm>
-            <a:off x="10728655" y="6446520"/>
-            <a:ext cx="914400" cy="274320"/>
-          </a:xfrm>
-          <a:prstGeom prst="rect">
-            <a:avLst/>
-          </a:prstGeom>
-          <a:noFill/>
-        </p:spPr>
-        <p:txBody>
-          <a:bodyPr wrap="square" anchor="t" lIns="0" rIns="0" tIns="0" bIns="0"/>
-          <a:lstStyle/>
-          <a:p>
-            <a:pPr algn="r"/>
-            <a:r>
-              <a:rPr sz="1000" b="0" i="0">
-                <a:solidFill>
-                  <a:srgbClr val="54595D"/>
-                </a:solidFill>
-                <a:latin typeface="Calibri"/>
-              </a:rPr>
-              <a:t>7</a:t>
-            </a:r>
-          </a:p>
-        </p:txBody>
-      </p:sp>
-      <p:sp>
-        <p:nvSpPr>
-          <p:cNvPr id="6" name="Oval 5"/>
-          <p:cNvSpPr/>
-          <p:nvPr/>
-        </p:nvSpPr>
-        <p:spPr>
-          <a:xfrm>
-            <a:off x="548640" y="1618488"/>
-            <a:ext cx="411480" cy="411480"/>
-          </a:xfrm>
-          <a:prstGeom prst="ellipse">
-            <a:avLst/>
-          </a:prstGeom>
-          <a:solidFill>
-            <a:srgbClr val="F2B705"/>
-          </a:solidFill>
-          <a:ln>
-            <a:noFill/>
-          </a:ln>
-          <a:effectLst/>
-        </p:spPr>
-        <p:style>
-          <a:lnRef idx="1">
-            <a:schemeClr val="accent1"/>
-          </a:lnRef>
-          <a:fillRef idx="3">
-            <a:schemeClr val="accent1"/>
-          </a:fillRef>
-          <a:effectRef idx="2">
-            <a:schemeClr val="accent1"/>
-          </a:effectRef>
-          <a:fontRef idx="minor">
-            <a:schemeClr val="lt1"/>
-          </a:fontRef>
-        </p:style>
-        <p:txBody>
-          <a:bodyPr rtlCol="0" anchor="ctr" lIns="0" rIns="0" tIns="0" bIns="0"/>
-          <a:lstStyle/>
-          <a:p>
-            <a:pPr algn="ctr"/>
-            <a:r>
-              <a:rPr sz="1400" b="1">
-                <a:solidFill>
-                  <a:srgbClr val="202122"/>
-                </a:solidFill>
-                <a:latin typeface="Calibri"/>
-              </a:rPr>
-              <a:t>1</a:t>
-            </a:r>
-          </a:p>
-        </p:txBody>
-      </p:sp>
-      <p:sp>
-        <p:nvSpPr>
-          <p:cNvPr id="7" name="TextBox 6"/>
-          <p:cNvSpPr txBox="1"/>
-          <p:nvPr/>
-        </p:nvSpPr>
-        <p:spPr>
-          <a:xfrm>
-            <a:off x="1234440" y="1600200"/>
-            <a:ext cx="10408615" cy="1030986"/>
-          </a:xfrm>
-          <a:prstGeom prst="rect">
-            <a:avLst/>
-          </a:prstGeom>
-          <a:noFill/>
-        </p:spPr>
-        <p:txBody>
-          <a:bodyPr wrap="square" anchor="t" lIns="0" rIns="0" tIns="0" bIns="0"/>
-          <a:lstStyle/>
-          <a:p>
-            <a:pPr algn="l"/>
-            <a:r>
-              <a:rPr sz="1800" b="0" i="0">
-                <a:solidFill>
-                  <a:srgbClr val="54595D"/>
-                </a:solidFill>
-                <a:latin typeface="Calibri"/>
-              </a:rPr>
-              <a:t>What is break-even?</a:t>
-            </a:r>
-          </a:p>
-          <a:p>
-            <a:r>
-              <a:rPr sz="1800" b="1">
-                <a:solidFill>
-                  <a:srgbClr val="03306E"/>
-                </a:solidFill>
-                <a:latin typeface="Calibri"/>
-              </a:rPr>
-              <a:t>The point where revenue equals total costs.</a:t>
-            </a:r>
-          </a:p>
-        </p:txBody>
-      </p:sp>
-      <p:sp>
-        <p:nvSpPr>
-          <p:cNvPr id="8" name="Oval 7"/>
-          <p:cNvSpPr/>
-          <p:nvPr/>
-        </p:nvSpPr>
-        <p:spPr>
-          <a:xfrm>
-            <a:off x="548640" y="2814066"/>
-            <a:ext cx="411480" cy="411480"/>
-          </a:xfrm>
-          <a:prstGeom prst="ellipse">
-            <a:avLst/>
-          </a:prstGeom>
-          <a:solidFill>
-            <a:srgbClr val="F2B705"/>
-          </a:solidFill>
-          <a:ln>
-            <a:noFill/>
-          </a:ln>
-          <a:effectLst/>
-        </p:spPr>
-        <p:style>
-          <a:lnRef idx="1">
-            <a:schemeClr val="accent1"/>
-          </a:lnRef>
-          <a:fillRef idx="3">
-            <a:schemeClr val="accent1"/>
-          </a:fillRef>
-          <a:effectRef idx="2">
-            <a:schemeClr val="accent1"/>
-          </a:effectRef>
-          <a:fontRef idx="minor">
-            <a:schemeClr val="lt1"/>
-          </a:fontRef>
-        </p:style>
-        <p:txBody>
-          <a:bodyPr rtlCol="0" anchor="ctr" lIns="0" rIns="0" tIns="0" bIns="0"/>
-          <a:lstStyle/>
-          <a:p>
-            <a:pPr algn="ctr"/>
-            <a:r>
-              <a:rPr sz="1400" b="1">
-                <a:solidFill>
-                  <a:srgbClr val="202122"/>
-                </a:solidFill>
-                <a:latin typeface="Calibri"/>
-              </a:rPr>
-              <a:t>2</a:t>
-            </a:r>
-          </a:p>
-        </p:txBody>
-      </p:sp>
-      <p:sp>
-        <p:nvSpPr>
-          <p:cNvPr id="9" name="TextBox 8"/>
-          <p:cNvSpPr txBox="1"/>
-          <p:nvPr/>
-        </p:nvSpPr>
-        <p:spPr>
-          <a:xfrm>
-            <a:off x="1234440" y="2795778"/>
-            <a:ext cx="10408615" cy="1030986"/>
-          </a:xfrm>
-          <a:prstGeom prst="rect">
-            <a:avLst/>
-          </a:prstGeom>
-          <a:noFill/>
-        </p:spPr>
-        <p:txBody>
-          <a:bodyPr wrap="square" anchor="t" lIns="0" rIns="0" tIns="0" bIns="0"/>
-          <a:lstStyle/>
-          <a:p>
-            <a:pPr algn="l"/>
-            <a:r>
-              <a:rPr sz="1800" b="0" i="0">
-                <a:solidFill>
-                  <a:srgbClr val="54595D"/>
-                </a:solidFill>
-                <a:latin typeface="Calibri"/>
-              </a:rPr>
-              <a:t>Is rent a direct or indirect cost?</a:t>
-            </a:r>
-          </a:p>
-          <a:p>
-            <a:r>
-              <a:rPr sz="1800" b="1">
-                <a:solidFill>
-                  <a:srgbClr val="03306E"/>
-                </a:solidFill>
-                <a:latin typeface="Calibri"/>
-              </a:rPr>
-              <a:t>Indirect.</a:t>
-            </a:r>
-          </a:p>
-        </p:txBody>
-      </p:sp>
-      <p:sp>
-        <p:nvSpPr>
-          <p:cNvPr id="10" name="Oval 9"/>
-          <p:cNvSpPr/>
-          <p:nvPr/>
-        </p:nvSpPr>
-        <p:spPr>
-          <a:xfrm>
-            <a:off x="548640" y="4009644"/>
-            <a:ext cx="411480" cy="411480"/>
-          </a:xfrm>
-          <a:prstGeom prst="ellipse">
-            <a:avLst/>
-          </a:prstGeom>
-          <a:solidFill>
-            <a:srgbClr val="F2B705"/>
-          </a:solidFill>
-          <a:ln>
-            <a:noFill/>
-          </a:ln>
-          <a:effectLst/>
-        </p:spPr>
-        <p:style>
-          <a:lnRef idx="1">
-            <a:schemeClr val="accent1"/>
-          </a:lnRef>
-          <a:fillRef idx="3">
-            <a:schemeClr val="accent1"/>
-          </a:fillRef>
-          <a:effectRef idx="2">
-            <a:schemeClr val="accent1"/>
-          </a:effectRef>
-          <a:fontRef idx="minor">
-            <a:schemeClr val="lt1"/>
-          </a:fontRef>
-        </p:style>
-        <p:txBody>
-          <a:bodyPr rtlCol="0" anchor="ctr" lIns="0" rIns="0" tIns="0" bIns="0"/>
-          <a:lstStyle/>
-          <a:p>
-            <a:pPr algn="ctr"/>
-            <a:r>
-              <a:rPr sz="1400" b="1">
-                <a:solidFill>
-                  <a:srgbClr val="202122"/>
-                </a:solidFill>
-                <a:latin typeface="Calibri"/>
-              </a:rPr>
-              <a:t>3</a:t>
-            </a:r>
-          </a:p>
-        </p:txBody>
-      </p:sp>
-      <p:sp>
-        <p:nvSpPr>
-          <p:cNvPr id="11" name="TextBox 10"/>
-          <p:cNvSpPr txBox="1"/>
-          <p:nvPr/>
-        </p:nvSpPr>
-        <p:spPr>
-          <a:xfrm>
-            <a:off x="1234440" y="3991356"/>
-            <a:ext cx="10408615" cy="1030986"/>
-          </a:xfrm>
-          <a:prstGeom prst="rect">
-            <a:avLst/>
-          </a:prstGeom>
-          <a:noFill/>
-        </p:spPr>
-        <p:txBody>
-          <a:bodyPr wrap="square" anchor="t" lIns="0" rIns="0" tIns="0" bIns="0"/>
-          <a:lstStyle/>
-          <a:p>
-            <a:pPr algn="l"/>
-            <a:r>
-              <a:rPr sz="1800" b="0" i="0">
-                <a:solidFill>
-                  <a:srgbClr val="54595D"/>
-                </a:solidFill>
-                <a:latin typeface="Calibri"/>
-              </a:rPr>
-              <a:t>What is force majeure?</a:t>
-            </a:r>
-          </a:p>
-          <a:p>
-            <a:r>
-              <a:rPr sz="1800" b="1">
-                <a:solidFill>
-                  <a:srgbClr val="03306E"/>
-                </a:solidFill>
-                <a:latin typeface="Calibri"/>
-              </a:rPr>
-              <a:t>A contract clause covering events outside anyone's control.</a:t>
-            </a:r>
-          </a:p>
-        </p:txBody>
-      </p:sp>
-      <p:sp>
-        <p:nvSpPr>
-          <p:cNvPr id="12" name="Oval 11"/>
-          <p:cNvSpPr/>
-          <p:nvPr/>
-        </p:nvSpPr>
-        <p:spPr>
-          <a:xfrm>
-            <a:off x="548640" y="5205221"/>
-            <a:ext cx="411480" cy="411480"/>
-          </a:xfrm>
-          <a:prstGeom prst="ellipse">
-            <a:avLst/>
-          </a:prstGeom>
-          <a:solidFill>
-            <a:srgbClr val="F2B705"/>
-          </a:solidFill>
-          <a:ln>
-            <a:noFill/>
-          </a:ln>
-          <a:effectLst/>
-        </p:spPr>
-        <p:style>
-          <a:lnRef idx="1">
-            <a:schemeClr val="accent1"/>
-          </a:lnRef>
-          <a:fillRef idx="3">
-            <a:schemeClr val="accent1"/>
-          </a:fillRef>
-          <a:effectRef idx="2">
-            <a:schemeClr val="accent1"/>
-          </a:effectRef>
-          <a:fontRef idx="minor">
-            <a:schemeClr val="lt1"/>
-          </a:fontRef>
-        </p:style>
-        <p:txBody>
-          <a:bodyPr rtlCol="0" anchor="ctr" lIns="0" rIns="0" tIns="0" bIns="0"/>
-          <a:lstStyle/>
-          <a:p>
-            <a:pPr algn="ctr"/>
-            <a:r>
-              <a:rPr sz="1400" b="1">
-                <a:solidFill>
-                  <a:srgbClr val="202122"/>
-                </a:solidFill>
-                <a:latin typeface="Calibri"/>
-              </a:rPr>
-              <a:t>4</a:t>
-            </a:r>
-          </a:p>
-        </p:txBody>
-      </p:sp>
-      <p:sp>
-        <p:nvSpPr>
-          <p:cNvPr id="13" name="TextBox 12"/>
-          <p:cNvSpPr txBox="1"/>
-          <p:nvPr/>
-        </p:nvSpPr>
-        <p:spPr>
-          <a:xfrm>
-            <a:off x="1234440" y="5186933"/>
-            <a:ext cx="10408615" cy="1030986"/>
-          </a:xfrm>
-          <a:prstGeom prst="rect">
-            <a:avLst/>
-          </a:prstGeom>
-          <a:noFill/>
-        </p:spPr>
-        <p:txBody>
-          <a:bodyPr wrap="square" anchor="t" lIns="0" rIns="0" tIns="0" bIns="0"/>
-          <a:lstStyle/>
-          <a:p>
-            <a:pPr algn="l"/>
-            <a:r>
-              <a:rPr sz="1800" b="0" i="0">
-                <a:solidFill>
-                  <a:srgbClr val="54595D"/>
-                </a:solidFill>
-                <a:latin typeface="Calibri"/>
-              </a:rPr>
-              <a:t>What is a debtor?</a:t>
-            </a:r>
-          </a:p>
-          <a:p>
-            <a:r>
-              <a:rPr sz="1800" b="1">
-                <a:solidFill>
-                  <a:srgbClr val="03306E"/>
-                </a:solidFill>
-                <a:latin typeface="Calibri"/>
-              </a:rPr>
-              <a:t>Someone who owes the business money.</a:t>
-            </a:r>
-          </a:p>
-        </p:txBody>
-      </p:sp>
-    </p:spTree>
-  </p:cSld>
-  <p:clrMapOvr>
-    <a:masterClrMapping/>
-  </p:clrMapOvr>
-</p:sld>
-</file>
-
-<file path=ppt/slides/slide8.xml><?xml version="1.0" encoding="utf-8"?>
-<p:sld xmlns:a="http://schemas.openxmlformats.org/drawingml/2006/main" xmlns:p="http://schemas.openxmlformats.org/presentationml/2006/main" xmlns:r="http://schemas.openxmlformats.org/officeDocument/2006/relationships">
-  <p:cSld>
-    <p:bg>
-      <p:bgPr>
-        <a:solidFill>
-          <a:srgbClr val="FFFFFF"/>
-        </a:solidFill>
-        <a:effectLst/>
-      </p:bgPr>
-    </p:bg>
-    <p:spTree>
-      <p:nvGrpSpPr>
-        <p:cNvPr id="1" name=""/>
-        <p:cNvGrpSpPr/>
-        <p:nvPr/>
-      </p:nvGrpSpPr>
-      <p:grpSpPr/>
-      <p:sp>
-        <p:nvSpPr>
-          <p:cNvPr id="2" name="TextBox 1"/>
-          <p:cNvSpPr txBox="1"/>
-          <p:nvPr/>
-        </p:nvSpPr>
-        <p:spPr>
-          <a:xfrm>
-            <a:off x="548640" y="320040"/>
-            <a:ext cx="11094415" cy="274320"/>
-          </a:xfrm>
-          <a:prstGeom prst="rect">
-            <a:avLst/>
-          </a:prstGeom>
-          <a:noFill/>
-        </p:spPr>
-        <p:txBody>
-          <a:bodyPr wrap="square" anchor="t" lIns="0" rIns="0" tIns="0" bIns="0"/>
-          <a:lstStyle/>
-          <a:p>
-            <a:pPr algn="l"/>
-            <a:r>
-              <a:rPr sz="1100" b="1" i="0">
-                <a:solidFill>
-                  <a:srgbClr val="54595D"/>
-                </a:solidFill>
-                <a:latin typeface="Calibri"/>
-              </a:rPr>
-              <a:t>ENGINEERING CORE  ·  Core topic 13</a:t>
-            </a:r>
-          </a:p>
-        </p:txBody>
-      </p:sp>
-      <p:sp>
-        <p:nvSpPr>
-          <p:cNvPr id="3" name="TextBox 2"/>
-          <p:cNvSpPr txBox="1"/>
-          <p:nvPr/>
-        </p:nvSpPr>
-        <p:spPr>
-          <a:xfrm>
-            <a:off x="548640" y="566928"/>
-            <a:ext cx="11094415" cy="822960"/>
-          </a:xfrm>
-          <a:prstGeom prst="rect">
-            <a:avLst/>
-          </a:prstGeom>
-          <a:noFill/>
-        </p:spPr>
-        <p:txBody>
-          <a:bodyPr wrap="square" anchor="ctr" lIns="0" rIns="0" tIns="0" bIns="0"/>
-          <a:lstStyle/>
-          <a:p>
-            <a:pPr algn="l"/>
-            <a:r>
-              <a:rPr sz="3200" b="1" i="0">
-                <a:solidFill>
-                  <a:srgbClr val="03306E"/>
-                </a:solidFill>
-                <a:latin typeface="Cambria"/>
-              </a:rPr>
-              <a:t>Activity: Price a product</a:t>
-            </a:r>
-          </a:p>
-        </p:txBody>
-      </p:sp>
-      <p:sp>
-        <p:nvSpPr>
-          <p:cNvPr id="4" name="TextBox 3"/>
-          <p:cNvSpPr txBox="1"/>
-          <p:nvPr/>
-        </p:nvSpPr>
-        <p:spPr>
-          <a:xfrm>
-            <a:off x="548640" y="6446520"/>
-            <a:ext cx="8229600" cy="274320"/>
-          </a:xfrm>
-          <a:prstGeom prst="rect">
-            <a:avLst/>
-          </a:prstGeom>
-          <a:noFill/>
-        </p:spPr>
-        <p:txBody>
-          <a:bodyPr wrap="square" anchor="t" lIns="0" rIns="0" tIns="0" bIns="0"/>
-          <a:lstStyle/>
-          <a:p>
-            <a:pPr algn="l"/>
-            <a:r>
-              <a:rPr sz="1000" b="0" i="0">
-                <a:solidFill>
-                  <a:srgbClr val="54595D"/>
-                </a:solidFill>
-                <a:latin typeface="Calibri"/>
-              </a:rPr>
-              <a:t>Design and Development for Engineering and Manufacturing T Level  ·  Business, Commercial and Financial Awareness</a:t>
-            </a:r>
-          </a:p>
-        </p:txBody>
-      </p:sp>
-      <p:sp>
-        <p:nvSpPr>
-          <p:cNvPr id="5" name="TextBox 4"/>
-          <p:cNvSpPr txBox="1"/>
-          <p:nvPr/>
-        </p:nvSpPr>
-        <p:spPr>
-          <a:xfrm>
-            <a:off x="10728655" y="6446520"/>
-            <a:ext cx="914400" cy="274320"/>
-          </a:xfrm>
-          <a:prstGeom prst="rect">
-            <a:avLst/>
-          </a:prstGeom>
-          <a:noFill/>
-        </p:spPr>
-        <p:txBody>
-          <a:bodyPr wrap="square" anchor="t" lIns="0" rIns="0" tIns="0" bIns="0"/>
-          <a:lstStyle/>
-          <a:p>
-            <a:pPr algn="r"/>
-            <a:r>
-              <a:rPr sz="1000" b="0" i="0">
-                <a:solidFill>
-                  <a:srgbClr val="54595D"/>
-                </a:solidFill>
-                <a:latin typeface="Calibri"/>
-              </a:rPr>
-              <a:t>8</a:t>
-            </a:r>
-          </a:p>
-        </p:txBody>
-      </p:sp>
-      <p:sp>
-        <p:nvSpPr>
-          <p:cNvPr id="6" name="Rounded Rectangle 5"/>
-          <p:cNvSpPr/>
-          <p:nvPr/>
-        </p:nvSpPr>
-        <p:spPr>
-          <a:xfrm>
-            <a:off x="548640" y="1508760"/>
-            <a:ext cx="2011680" cy="457200"/>
-          </a:xfrm>
-          <a:prstGeom prst="roundRect">
-            <a:avLst>
-              <a:gd name="adj" fmla="val 50000"/>
-            </a:avLst>
-          </a:prstGeom>
-          <a:solidFill>
-            <a:srgbClr val="F2B705"/>
-          </a:solidFill>
-          <a:ln>
-            <a:noFill/>
-          </a:ln>
-          <a:effectLst/>
-        </p:spPr>
-        <p:style>
-          <a:lnRef idx="1">
-            <a:schemeClr val="accent1"/>
-          </a:lnRef>
-          <a:fillRef idx="3">
-            <a:schemeClr val="accent1"/>
-          </a:fillRef>
-          <a:effectRef idx="2">
-            <a:schemeClr val="accent1"/>
-          </a:effectRef>
-          <a:fontRef idx="minor">
-            <a:schemeClr val="lt1"/>
-          </a:fontRef>
-        </p:style>
-        <p:txBody>
-          <a:bodyPr rtlCol="0" anchor="ctr"/>
-          <a:lstStyle/>
-          <a:p/>
-        </p:txBody>
-      </p:sp>
-      <p:sp>
-        <p:nvSpPr>
-          <p:cNvPr id="7" name="TextBox 6"/>
-          <p:cNvSpPr txBox="1"/>
-          <p:nvPr/>
-        </p:nvSpPr>
-        <p:spPr>
-          <a:xfrm>
-            <a:off x="548640" y="1508760"/>
-            <a:ext cx="2011680" cy="457200"/>
-          </a:xfrm>
-          <a:prstGeom prst="rect">
-            <a:avLst/>
-          </a:prstGeom>
-          <a:noFill/>
-        </p:spPr>
-        <p:txBody>
-          <a:bodyPr wrap="square" anchor="ctr" lIns="0" rIns="0" tIns="0" bIns="0"/>
-          <a:lstStyle/>
-          <a:p>
-            <a:pPr algn="ctr"/>
-            <a:r>
-              <a:rPr sz="1400" b="1" i="0">
-                <a:solidFill>
-                  <a:srgbClr val="202122"/>
-                </a:solidFill>
-                <a:latin typeface="Calibri"/>
-              </a:rPr>
-              <a:t>25 minutes</a:t>
-            </a:r>
-          </a:p>
-        </p:txBody>
-      </p:sp>
-      <p:sp>
-        <p:nvSpPr>
-          <p:cNvPr id="8" name="TextBox 7"/>
-          <p:cNvSpPr txBox="1"/>
-          <p:nvPr/>
-        </p:nvSpPr>
-        <p:spPr>
-          <a:xfrm>
-            <a:off x="2743200" y="1508760"/>
-            <a:ext cx="4754880" cy="457200"/>
-          </a:xfrm>
-          <a:prstGeom prst="rect">
-            <a:avLst/>
-          </a:prstGeom>
-          <a:noFill/>
-        </p:spPr>
-        <p:txBody>
-          <a:bodyPr wrap="square" anchor="ctr" lIns="0" rIns="0" tIns="0" bIns="0"/>
-          <a:lstStyle/>
-          <a:p>
-            <a:pPr algn="l"/>
-            <a:r>
-              <a:rPr sz="1400" b="0" i="1">
-                <a:solidFill>
-                  <a:srgbClr val="54595D"/>
-                </a:solidFill>
-                <a:latin typeface="Calibri"/>
-              </a:rPr>
-              <a:t>Pairs</a:t>
-            </a:r>
-          </a:p>
-        </p:txBody>
-      </p:sp>
-      <p:sp>
-        <p:nvSpPr>
-          <p:cNvPr id="9" name="Oval 8"/>
-          <p:cNvSpPr/>
-          <p:nvPr/>
-        </p:nvSpPr>
-        <p:spPr>
-          <a:xfrm>
-            <a:off x="548640" y="2482596"/>
-            <a:ext cx="384048" cy="384048"/>
-          </a:xfrm>
-          <a:prstGeom prst="ellipse">
-            <a:avLst/>
-          </a:prstGeom>
-          <a:solidFill>
-            <a:srgbClr val="0645AD"/>
-          </a:solidFill>
-          <a:ln>
-            <a:noFill/>
-          </a:ln>
-          <a:effectLst/>
-        </p:spPr>
-        <p:style>
-          <a:lnRef idx="1">
-            <a:schemeClr val="accent1"/>
-          </a:lnRef>
-          <a:fillRef idx="3">
-            <a:schemeClr val="accent1"/>
-          </a:fillRef>
-          <a:effectRef idx="2">
-            <a:schemeClr val="accent1"/>
-          </a:effectRef>
-          <a:fontRef idx="minor">
-            <a:schemeClr val="lt1"/>
-          </a:fontRef>
-        </p:style>
-        <p:txBody>
-          <a:bodyPr rtlCol="0" anchor="ctr" lIns="0" rIns="0" tIns="0" bIns="0"/>
-          <a:lstStyle/>
-          <a:p>
-            <a:pPr algn="ctr"/>
-            <a:r>
-              <a:rPr sz="1300" b="1">
-                <a:solidFill>
-                  <a:srgbClr val="FFFFFF"/>
-                </a:solidFill>
-                <a:latin typeface="Calibri"/>
-              </a:rPr>
-              <a:t>1</a:t>
-            </a:r>
-          </a:p>
-        </p:txBody>
-      </p:sp>
-      <p:sp>
-        <p:nvSpPr>
-          <p:cNvPr id="10" name="TextBox 9"/>
-          <p:cNvSpPr txBox="1"/>
-          <p:nvPr/>
-        </p:nvSpPr>
-        <p:spPr>
-          <a:xfrm>
-            <a:off x="1143000" y="2240280"/>
-            <a:ext cx="5943600" cy="868680"/>
-          </a:xfrm>
-          <a:prstGeom prst="rect">
-            <a:avLst/>
-          </a:prstGeom>
-          <a:noFill/>
-        </p:spPr>
-        <p:txBody>
-          <a:bodyPr wrap="square" anchor="ctr" lIns="0" rIns="0" tIns="0" bIns="0"/>
-          <a:lstStyle/>
-          <a:p>
-            <a:pPr algn="l"/>
-            <a:r>
-              <a:rPr sz="1700" b="0" i="0">
-                <a:solidFill>
-                  <a:srgbClr val="202122"/>
-                </a:solidFill>
-                <a:latin typeface="Calibri"/>
-              </a:rPr>
-              <a:t>Use the cost data from your teacher for a small engineered product.</a:t>
-            </a:r>
-          </a:p>
-        </p:txBody>
-      </p:sp>
-      <p:sp>
-        <p:nvSpPr>
-          <p:cNvPr id="11" name="Oval 10"/>
-          <p:cNvSpPr/>
-          <p:nvPr/>
-        </p:nvSpPr>
-        <p:spPr>
-          <a:xfrm>
-            <a:off x="548640" y="3461004"/>
-            <a:ext cx="384048" cy="384048"/>
-          </a:xfrm>
-          <a:prstGeom prst="ellipse">
-            <a:avLst/>
-          </a:prstGeom>
-          <a:solidFill>
-            <a:srgbClr val="0645AD"/>
-          </a:solidFill>
-          <a:ln>
-            <a:noFill/>
-          </a:ln>
-          <a:effectLst/>
-        </p:spPr>
-        <p:style>
-          <a:lnRef idx="1">
-            <a:schemeClr val="accent1"/>
-          </a:lnRef>
-          <a:fillRef idx="3">
-            <a:schemeClr val="accent1"/>
-          </a:fillRef>
-          <a:effectRef idx="2">
-            <a:schemeClr val="accent1"/>
-          </a:effectRef>
-          <a:fontRef idx="minor">
-            <a:schemeClr val="lt1"/>
-          </a:fontRef>
-        </p:style>
-        <p:txBody>
-          <a:bodyPr rtlCol="0" anchor="ctr" lIns="0" rIns="0" tIns="0" bIns="0"/>
-          <a:lstStyle/>
-          <a:p>
-            <a:pPr algn="ctr"/>
-            <a:r>
-              <a:rPr sz="1300" b="1">
-                <a:solidFill>
-                  <a:srgbClr val="FFFFFF"/>
-                </a:solidFill>
-                <a:latin typeface="Calibri"/>
-              </a:rPr>
-              <a:t>2</a:t>
+              <a:t>Why can a profitable business run out of cash?</a:t>
             </a:r>
           </a:p>
         </p:txBody>
@@ -8218,8 +10960,8 @@
         </p:nvSpPr>
         <p:spPr>
           <a:xfrm>
-            <a:off x="1143000" y="3218688"/>
-            <a:ext cx="5943600" cy="868680"/>
+            <a:off x="548640" y="5852160"/>
+            <a:ext cx="11094415" cy="365760"/>
           </a:xfrm>
           <a:prstGeom prst="rect">
             <a:avLst/>
@@ -8227,879 +10969,18 @@
           <a:noFill/>
         </p:spPr>
         <p:txBody>
-          <a:bodyPr wrap="square" anchor="ctr" lIns="0" rIns="0" tIns="0" bIns="0"/>
+          <a:bodyPr wrap="square" anchor="t" lIns="0" rIns="0" tIns="0" bIns="0"/>
           <a:lstStyle/>
           <a:p>
             <a:pPr algn="l"/>
             <a:r>
-              <a:rPr sz="1700" b="0" i="0">
-                <a:solidFill>
-                  <a:srgbClr val="202122"/>
-                </a:solidFill>
-                <a:latin typeface="Calibri"/>
-              </a:rPr>
-              <a:t>Calculate the cost per unit including overheads.</a:t>
-            </a:r>
-          </a:p>
-        </p:txBody>
-      </p:sp>
-      <p:sp>
-        <p:nvSpPr>
-          <p:cNvPr id="13" name="Oval 12"/>
-          <p:cNvSpPr/>
-          <p:nvPr/>
-        </p:nvSpPr>
-        <p:spPr>
-          <a:xfrm>
-            <a:off x="548640" y="4439412"/>
-            <a:ext cx="384048" cy="384048"/>
-          </a:xfrm>
-          <a:prstGeom prst="ellipse">
-            <a:avLst/>
-          </a:prstGeom>
-          <a:solidFill>
-            <a:srgbClr val="0645AD"/>
-          </a:solidFill>
-          <a:ln>
-            <a:noFill/>
-          </a:ln>
-          <a:effectLst/>
-        </p:spPr>
-        <p:style>
-          <a:lnRef idx="1">
-            <a:schemeClr val="accent1"/>
-          </a:lnRef>
-          <a:fillRef idx="3">
-            <a:schemeClr val="accent1"/>
-          </a:fillRef>
-          <a:effectRef idx="2">
-            <a:schemeClr val="accent1"/>
-          </a:effectRef>
-          <a:fontRef idx="minor">
-            <a:schemeClr val="lt1"/>
-          </a:fontRef>
-        </p:style>
-        <p:txBody>
-          <a:bodyPr rtlCol="0" anchor="ctr" lIns="0" rIns="0" tIns="0" bIns="0"/>
-          <a:lstStyle/>
-          <a:p>
-            <a:pPr algn="ctr"/>
-            <a:r>
-              <a:rPr sz="1300" b="1">
-                <a:solidFill>
-                  <a:srgbClr val="FFFFFF"/>
-                </a:solidFill>
-                <a:latin typeface="Calibri"/>
-              </a:rPr>
-              <a:t>3</a:t>
-            </a:r>
-          </a:p>
-        </p:txBody>
-      </p:sp>
-      <p:sp>
-        <p:nvSpPr>
-          <p:cNvPr id="14" name="TextBox 13"/>
-          <p:cNvSpPr txBox="1"/>
-          <p:nvPr/>
-        </p:nvSpPr>
-        <p:spPr>
-          <a:xfrm>
-            <a:off x="1143000" y="4197096"/>
-            <a:ext cx="5943600" cy="868680"/>
-          </a:xfrm>
-          <a:prstGeom prst="rect">
-            <a:avLst/>
-          </a:prstGeom>
-          <a:noFill/>
-        </p:spPr>
-        <p:txBody>
-          <a:bodyPr wrap="square" anchor="ctr" lIns="0" rIns="0" tIns="0" bIns="0"/>
-          <a:lstStyle/>
-          <a:p>
-            <a:pPr algn="l"/>
-            <a:r>
-              <a:rPr sz="1700" b="0" i="0">
-                <a:solidFill>
-                  <a:srgbClr val="202122"/>
-                </a:solidFill>
-                <a:latin typeface="Calibri"/>
-              </a:rPr>
-              <a:t>Set a selling price and calculate the break-even quantity.</a:t>
-            </a:r>
-          </a:p>
-        </p:txBody>
-      </p:sp>
-      <p:sp>
-        <p:nvSpPr>
-          <p:cNvPr id="15" name="Oval 14"/>
-          <p:cNvSpPr/>
-          <p:nvPr/>
-        </p:nvSpPr>
-        <p:spPr>
-          <a:xfrm>
-            <a:off x="548640" y="5417820"/>
-            <a:ext cx="384048" cy="384048"/>
-          </a:xfrm>
-          <a:prstGeom prst="ellipse">
-            <a:avLst/>
-          </a:prstGeom>
-          <a:solidFill>
-            <a:srgbClr val="0645AD"/>
-          </a:solidFill>
-          <a:ln>
-            <a:noFill/>
-          </a:ln>
-          <a:effectLst/>
-        </p:spPr>
-        <p:style>
-          <a:lnRef idx="1">
-            <a:schemeClr val="accent1"/>
-          </a:lnRef>
-          <a:fillRef idx="3">
-            <a:schemeClr val="accent1"/>
-          </a:fillRef>
-          <a:effectRef idx="2">
-            <a:schemeClr val="accent1"/>
-          </a:effectRef>
-          <a:fontRef idx="minor">
-            <a:schemeClr val="lt1"/>
-          </a:fontRef>
-        </p:style>
-        <p:txBody>
-          <a:bodyPr rtlCol="0" anchor="ctr" lIns="0" rIns="0" tIns="0" bIns="0"/>
-          <a:lstStyle/>
-          <a:p>
-            <a:pPr algn="ctr"/>
-            <a:r>
-              <a:rPr sz="1300" b="1">
-                <a:solidFill>
-                  <a:srgbClr val="FFFFFF"/>
-                </a:solidFill>
-                <a:latin typeface="Calibri"/>
-              </a:rPr>
-              <a:t>4</a:t>
-            </a:r>
-          </a:p>
-        </p:txBody>
-      </p:sp>
-      <p:sp>
-        <p:nvSpPr>
-          <p:cNvPr id="16" name="TextBox 15"/>
-          <p:cNvSpPr txBox="1"/>
-          <p:nvPr/>
-        </p:nvSpPr>
-        <p:spPr>
-          <a:xfrm>
-            <a:off x="1143000" y="5175504"/>
-            <a:ext cx="5943600" cy="868680"/>
-          </a:xfrm>
-          <a:prstGeom prst="rect">
-            <a:avLst/>
-          </a:prstGeom>
-          <a:noFill/>
-        </p:spPr>
-        <p:txBody>
-          <a:bodyPr wrap="square" anchor="ctr" lIns="0" rIns="0" tIns="0" bIns="0"/>
-          <a:lstStyle/>
-          <a:p>
-            <a:pPr algn="l"/>
-            <a:r>
-              <a:rPr sz="1700" b="0" i="0">
-                <a:solidFill>
-                  <a:srgbClr val="202122"/>
-                </a:solidFill>
-                <a:latin typeface="Calibri"/>
-              </a:rPr>
-              <a:t>Explain one risk to your cash flow.</a:t>
-            </a:r>
-          </a:p>
-        </p:txBody>
-      </p:sp>
-      <p:sp>
-        <p:nvSpPr>
-          <p:cNvPr id="17" name="Rounded Rectangle 16"/>
-          <p:cNvSpPr/>
-          <p:nvPr/>
-        </p:nvSpPr>
-        <p:spPr>
-          <a:xfrm>
-            <a:off x="7772400" y="1508760"/>
-            <a:ext cx="3867912" cy="4572000"/>
-          </a:xfrm>
-          <a:prstGeom prst="roundRect">
-            <a:avLst>
-              <a:gd name="adj" fmla="val 8000"/>
-            </a:avLst>
-          </a:prstGeom>
-          <a:solidFill>
-            <a:srgbClr val="EAF3FF"/>
-          </a:solidFill>
-          <a:ln>
-            <a:noFill/>
-          </a:ln>
-          <a:effectLst/>
-        </p:spPr>
-        <p:style>
-          <a:lnRef idx="1">
-            <a:schemeClr val="accent1"/>
-          </a:lnRef>
-          <a:fillRef idx="3">
-            <a:schemeClr val="accent1"/>
-          </a:fillRef>
-          <a:effectRef idx="2">
-            <a:schemeClr val="accent1"/>
-          </a:effectRef>
-          <a:fontRef idx="minor">
-            <a:schemeClr val="lt1"/>
-          </a:fontRef>
-        </p:style>
-        <p:txBody>
-          <a:bodyPr rtlCol="0" anchor="ctr"/>
-          <a:lstStyle/>
-          <a:p/>
-        </p:txBody>
-      </p:sp>
-      <p:sp>
-        <p:nvSpPr>
-          <p:cNvPr id="18" name="TextBox 17"/>
-          <p:cNvSpPr txBox="1"/>
-          <p:nvPr/>
-        </p:nvSpPr>
-        <p:spPr>
-          <a:xfrm>
-            <a:off x="8046720" y="1737360"/>
-            <a:ext cx="3291840" cy="365760"/>
-          </a:xfrm>
-          <a:prstGeom prst="rect">
-            <a:avLst/>
-          </a:prstGeom>
-          <a:noFill/>
-        </p:spPr>
-        <p:txBody>
-          <a:bodyPr wrap="square" anchor="t" lIns="0" rIns="0" tIns="0" bIns="0"/>
-          <a:lstStyle/>
-          <a:p>
-            <a:pPr algn="l"/>
-            <a:r>
-              <a:rPr sz="1300" b="1" i="0">
-                <a:solidFill>
-                  <a:srgbClr val="0645AD"/>
-                </a:solidFill>
-                <a:latin typeface="Calibri"/>
-              </a:rPr>
-              <a:t>SUCCESS CRITERIA</a:t>
-            </a:r>
-          </a:p>
-        </p:txBody>
-      </p:sp>
-      <p:sp>
-        <p:nvSpPr>
-          <p:cNvPr id="19" name="TextBox 18"/>
-          <p:cNvSpPr txBox="1"/>
-          <p:nvPr/>
-        </p:nvSpPr>
-        <p:spPr>
-          <a:xfrm>
-            <a:off x="8046720" y="2240280"/>
-            <a:ext cx="3337560" cy="3657600"/>
-          </a:xfrm>
-          <a:prstGeom prst="rect">
-            <a:avLst/>
-          </a:prstGeom>
-          <a:noFill/>
-        </p:spPr>
-        <p:txBody>
-          <a:bodyPr wrap="square" lIns="0" rIns="0" tIns="0" bIns="0">
-            <a:spAutoFit/>
-          </a:bodyPr>
-          <a:lstStyle/>
-          <a:p>
-            <a:pPr marL="274320" indent="-274320">
-              <a:spcAft>
-                <a:spcPts val="810"/>
-              </a:spcAft>
-              <a:buClr>
-                <a:srgbClr val="0645AD"/>
-              </a:buClr>
-              <a:buFont typeface="Arial"/>
-              <a:buChar char="•"/>
-            </a:pPr>
-            <a:r>
-              <a:rPr sz="1800" b="0">
-                <a:solidFill>
-                  <a:srgbClr val="202122"/>
-                </a:solidFill>
-                <a:latin typeface="Calibri"/>
-              </a:rPr>
-              <a:t>Costs classified correctly</a:t>
-            </a:r>
-          </a:p>
-          <a:p>
-            <a:pPr marL="274320" indent="-274320">
-              <a:spcAft>
-                <a:spcPts val="810"/>
-              </a:spcAft>
-              <a:buClr>
-                <a:srgbClr val="0645AD"/>
-              </a:buClr>
-              <a:buFont typeface="Arial"/>
-              <a:buChar char="•"/>
-            </a:pPr>
-            <a:r>
-              <a:rPr sz="1800" b="0">
-                <a:solidFill>
-                  <a:srgbClr val="202122"/>
-                </a:solidFill>
-                <a:latin typeface="Calibri"/>
-              </a:rPr>
-              <a:t>Break-even calculated</a:t>
-            </a:r>
-          </a:p>
-          <a:p>
-            <a:pPr marL="274320" indent="-274320">
-              <a:spcAft>
-                <a:spcPts val="810"/>
-              </a:spcAft>
-              <a:buClr>
-                <a:srgbClr val="0645AD"/>
-              </a:buClr>
-              <a:buFont typeface="Arial"/>
-              <a:buChar char="•"/>
-            </a:pPr>
-            <a:r>
-              <a:rPr sz="1800" b="0">
-                <a:solidFill>
-                  <a:srgbClr val="202122"/>
-                </a:solidFill>
-                <a:latin typeface="Calibri"/>
-              </a:rPr>
-              <a:t>Cash flow risk realistic</a:t>
-            </a:r>
-          </a:p>
-        </p:txBody>
-      </p:sp>
-    </p:spTree>
-  </p:cSld>
-  <p:clrMapOvr>
-    <a:masterClrMapping/>
-  </p:clrMapOvr>
-</p:sld>
-</file>
-
-<file path=ppt/slides/slide9.xml><?xml version="1.0" encoding="utf-8"?>
-<p:sld xmlns:a="http://schemas.openxmlformats.org/drawingml/2006/main" xmlns:p="http://schemas.openxmlformats.org/presentationml/2006/main" xmlns:r="http://schemas.openxmlformats.org/officeDocument/2006/relationships">
-  <p:cSld>
-    <p:bg>
-      <p:bgPr>
-        <a:solidFill>
-          <a:srgbClr val="03306E"/>
-        </a:solidFill>
-        <a:effectLst/>
-      </p:bgPr>
-    </p:bg>
-    <p:spTree>
-      <p:nvGrpSpPr>
-        <p:cNvPr id="1" name=""/>
-        <p:cNvGrpSpPr/>
-        <p:nvPr/>
-      </p:nvGrpSpPr>
-      <p:grpSpPr/>
-      <p:sp>
-        <p:nvSpPr>
-          <p:cNvPr id="2" name="TextBox 1"/>
-          <p:cNvSpPr txBox="1"/>
-          <p:nvPr/>
-        </p:nvSpPr>
-        <p:spPr>
-          <a:xfrm>
-            <a:off x="548640" y="320040"/>
-            <a:ext cx="11094415" cy="274320"/>
-          </a:xfrm>
-          <a:prstGeom prst="rect">
-            <a:avLst/>
-          </a:prstGeom>
-          <a:noFill/>
-        </p:spPr>
-        <p:txBody>
-          <a:bodyPr wrap="square" anchor="t" lIns="0" rIns="0" tIns="0" bIns="0"/>
-          <a:lstStyle/>
-          <a:p>
-            <a:pPr algn="l"/>
-            <a:r>
-              <a:rPr sz="1100" b="1" i="0">
-                <a:solidFill>
-                  <a:srgbClr val="A9C8F0"/>
-                </a:solidFill>
-                <a:latin typeface="Calibri"/>
-              </a:rPr>
-              <a:t>ENGINEERING CORE  ·  Core topic 13</a:t>
-            </a:r>
-          </a:p>
-        </p:txBody>
-      </p:sp>
-      <p:sp>
-        <p:nvSpPr>
-          <p:cNvPr id="3" name="TextBox 2"/>
-          <p:cNvSpPr txBox="1"/>
-          <p:nvPr/>
-        </p:nvSpPr>
-        <p:spPr>
-          <a:xfrm>
-            <a:off x="548640" y="566928"/>
-            <a:ext cx="11094415" cy="822960"/>
-          </a:xfrm>
-          <a:prstGeom prst="rect">
-            <a:avLst/>
-          </a:prstGeom>
-          <a:noFill/>
-        </p:spPr>
-        <p:txBody>
-          <a:bodyPr wrap="square" anchor="ctr" lIns="0" rIns="0" tIns="0" bIns="0"/>
-          <a:lstStyle/>
-          <a:p>
-            <a:pPr algn="l"/>
-            <a:r>
-              <a:rPr sz="3200" b="1" i="0">
-                <a:solidFill>
-                  <a:srgbClr val="FFFFFF"/>
-                </a:solidFill>
-                <a:latin typeface="Cambria"/>
-              </a:rPr>
-              <a:t>Exit ticket</a:t>
-            </a:r>
-          </a:p>
-        </p:txBody>
-      </p:sp>
-      <p:sp>
-        <p:nvSpPr>
-          <p:cNvPr id="4" name="Oval 3"/>
-          <p:cNvSpPr/>
-          <p:nvPr/>
-        </p:nvSpPr>
-        <p:spPr>
-          <a:xfrm>
-            <a:off x="548640" y="1737360"/>
-            <a:ext cx="502920" cy="502920"/>
-          </a:xfrm>
-          <a:prstGeom prst="ellipse">
-            <a:avLst/>
-          </a:prstGeom>
-          <a:solidFill>
-            <a:srgbClr val="F2B705"/>
-          </a:solidFill>
-          <a:ln>
-            <a:noFill/>
-          </a:ln>
-          <a:effectLst/>
-        </p:spPr>
-        <p:style>
-          <a:lnRef idx="1">
-            <a:schemeClr val="accent1"/>
-          </a:lnRef>
-          <a:fillRef idx="3">
-            <a:schemeClr val="accent1"/>
-          </a:fillRef>
-          <a:effectRef idx="2">
-            <a:schemeClr val="accent1"/>
-          </a:effectRef>
-          <a:fontRef idx="minor">
-            <a:schemeClr val="lt1"/>
-          </a:fontRef>
-        </p:style>
-        <p:txBody>
-          <a:bodyPr rtlCol="0" anchor="ctr" lIns="0" rIns="0" tIns="0" bIns="0"/>
-          <a:lstStyle/>
-          <a:p>
-            <a:pPr algn="ctr"/>
-            <a:r>
-              <a:rPr sz="1700" b="1">
-                <a:solidFill>
-                  <a:srgbClr val="202122"/>
-                </a:solidFill>
-                <a:latin typeface="Calibri"/>
-              </a:rPr>
-              <a:t>1</a:t>
-            </a:r>
-          </a:p>
-        </p:txBody>
-      </p:sp>
-      <p:sp>
-        <p:nvSpPr>
-          <p:cNvPr id="5" name="TextBox 4"/>
-          <p:cNvSpPr txBox="1"/>
-          <p:nvPr/>
-        </p:nvSpPr>
-        <p:spPr>
-          <a:xfrm>
-            <a:off x="1325880" y="1645920"/>
-            <a:ext cx="6583680" cy="822960"/>
-          </a:xfrm>
-          <a:prstGeom prst="rect">
-            <a:avLst/>
-          </a:prstGeom>
-          <a:noFill/>
-        </p:spPr>
-        <p:txBody>
-          <a:bodyPr wrap="square" anchor="ctr" lIns="0" rIns="0" tIns="0" bIns="0"/>
-          <a:lstStyle/>
-          <a:p>
-            <a:pPr algn="l"/>
-            <a:r>
-              <a:rPr sz="2000" b="0" i="0">
-                <a:solidFill>
-                  <a:srgbClr val="FFFFFF"/>
-                </a:solidFill>
-                <a:latin typeface="Calibri"/>
-              </a:rPr>
-              <a:t>Give an example of non-value-added activity.</a:t>
-            </a:r>
-          </a:p>
-        </p:txBody>
-      </p:sp>
-      <p:sp>
-        <p:nvSpPr>
-          <p:cNvPr id="6" name="Oval 5"/>
-          <p:cNvSpPr/>
-          <p:nvPr/>
-        </p:nvSpPr>
-        <p:spPr>
-          <a:xfrm>
-            <a:off x="548640" y="2697480"/>
-            <a:ext cx="502920" cy="502920"/>
-          </a:xfrm>
-          <a:prstGeom prst="ellipse">
-            <a:avLst/>
-          </a:prstGeom>
-          <a:solidFill>
-            <a:srgbClr val="F2B705"/>
-          </a:solidFill>
-          <a:ln>
-            <a:noFill/>
-          </a:ln>
-          <a:effectLst/>
-        </p:spPr>
-        <p:style>
-          <a:lnRef idx="1">
-            <a:schemeClr val="accent1"/>
-          </a:lnRef>
-          <a:fillRef idx="3">
-            <a:schemeClr val="accent1"/>
-          </a:fillRef>
-          <a:effectRef idx="2">
-            <a:schemeClr val="accent1"/>
-          </a:effectRef>
-          <a:fontRef idx="minor">
-            <a:schemeClr val="lt1"/>
-          </a:fontRef>
-        </p:style>
-        <p:txBody>
-          <a:bodyPr rtlCol="0" anchor="ctr" lIns="0" rIns="0" tIns="0" bIns="0"/>
-          <a:lstStyle/>
-          <a:p>
-            <a:pPr algn="ctr"/>
-            <a:r>
-              <a:rPr sz="1700" b="1">
-                <a:solidFill>
-                  <a:srgbClr val="202122"/>
-                </a:solidFill>
-                <a:latin typeface="Calibri"/>
-              </a:rPr>
-              <a:t>2</a:t>
-            </a:r>
-          </a:p>
-        </p:txBody>
-      </p:sp>
-      <p:sp>
-        <p:nvSpPr>
-          <p:cNvPr id="7" name="TextBox 6"/>
-          <p:cNvSpPr txBox="1"/>
-          <p:nvPr/>
-        </p:nvSpPr>
-        <p:spPr>
-          <a:xfrm>
-            <a:off x="1325880" y="2606040"/>
-            <a:ext cx="6583680" cy="822960"/>
-          </a:xfrm>
-          <a:prstGeom prst="rect">
-            <a:avLst/>
-          </a:prstGeom>
-          <a:noFill/>
-        </p:spPr>
-        <p:txBody>
-          <a:bodyPr wrap="square" anchor="ctr" lIns="0" rIns="0" tIns="0" bIns="0"/>
-          <a:lstStyle/>
-          <a:p>
-            <a:pPr algn="l"/>
-            <a:r>
-              <a:rPr sz="2000" b="0" i="0">
-                <a:solidFill>
-                  <a:srgbClr val="FFFFFF"/>
-                </a:solidFill>
-                <a:latin typeface="Calibri"/>
-              </a:rPr>
-              <a:t>Why can a profitable company run out of cash?</a:t>
-            </a:r>
-          </a:p>
-        </p:txBody>
-      </p:sp>
-      <p:sp>
-        <p:nvSpPr>
-          <p:cNvPr id="8" name="Oval 7"/>
-          <p:cNvSpPr/>
-          <p:nvPr/>
-        </p:nvSpPr>
-        <p:spPr>
-          <a:xfrm>
-            <a:off x="548640" y="3657600"/>
-            <a:ext cx="502920" cy="502920"/>
-          </a:xfrm>
-          <a:prstGeom prst="ellipse">
-            <a:avLst/>
-          </a:prstGeom>
-          <a:solidFill>
-            <a:srgbClr val="F2B705"/>
-          </a:solidFill>
-          <a:ln>
-            <a:noFill/>
-          </a:ln>
-          <a:effectLst/>
-        </p:spPr>
-        <p:style>
-          <a:lnRef idx="1">
-            <a:schemeClr val="accent1"/>
-          </a:lnRef>
-          <a:fillRef idx="3">
-            <a:schemeClr val="accent1"/>
-          </a:fillRef>
-          <a:effectRef idx="2">
-            <a:schemeClr val="accent1"/>
-          </a:effectRef>
-          <a:fontRef idx="minor">
-            <a:schemeClr val="lt1"/>
-          </a:fontRef>
-        </p:style>
-        <p:txBody>
-          <a:bodyPr rtlCol="0" anchor="ctr" lIns="0" rIns="0" tIns="0" bIns="0"/>
-          <a:lstStyle/>
-          <a:p>
-            <a:pPr algn="ctr"/>
-            <a:r>
-              <a:rPr sz="1700" b="1">
-                <a:solidFill>
-                  <a:srgbClr val="202122"/>
-                </a:solidFill>
-                <a:latin typeface="Calibri"/>
-              </a:rPr>
-              <a:t>3</a:t>
-            </a:r>
-          </a:p>
-        </p:txBody>
-      </p:sp>
-      <p:sp>
-        <p:nvSpPr>
-          <p:cNvPr id="9" name="TextBox 8"/>
-          <p:cNvSpPr txBox="1"/>
-          <p:nvPr/>
-        </p:nvSpPr>
-        <p:spPr>
-          <a:xfrm>
-            <a:off x="1325880" y="3566160"/>
-            <a:ext cx="6583680" cy="822960"/>
-          </a:xfrm>
-          <a:prstGeom prst="rect">
-            <a:avLst/>
-          </a:prstGeom>
-          <a:noFill/>
-        </p:spPr>
-        <p:txBody>
-          <a:bodyPr wrap="square" anchor="ctr" lIns="0" rIns="0" tIns="0" bIns="0"/>
-          <a:lstStyle/>
-          <a:p>
-            <a:pPr algn="l"/>
-            <a:r>
-              <a:rPr sz="2000" b="0" i="0">
-                <a:solidFill>
-                  <a:srgbClr val="FFFFFF"/>
-                </a:solidFill>
-                <a:latin typeface="Calibri"/>
-              </a:rPr>
-              <a:t>What is a tender?</a:t>
-            </a:r>
-          </a:p>
-        </p:txBody>
-      </p:sp>
-      <p:sp>
-        <p:nvSpPr>
-          <p:cNvPr id="10" name="Rounded Rectangle 9"/>
-          <p:cNvSpPr/>
-          <p:nvPr/>
-        </p:nvSpPr>
-        <p:spPr>
-          <a:xfrm>
-            <a:off x="8229600" y="1645920"/>
-            <a:ext cx="3410712" cy="2926080"/>
-          </a:xfrm>
-          <a:prstGeom prst="roundRect">
-            <a:avLst>
-              <a:gd name="adj" fmla="val 8000"/>
-            </a:avLst>
-          </a:prstGeom>
-          <a:solidFill>
-            <a:srgbClr val="0645AD"/>
-          </a:solidFill>
-          <a:ln>
-            <a:noFill/>
-          </a:ln>
-          <a:effectLst/>
-        </p:spPr>
-        <p:style>
-          <a:lnRef idx="1">
-            <a:schemeClr val="accent1"/>
-          </a:lnRef>
-          <a:fillRef idx="3">
-            <a:schemeClr val="accent1"/>
-          </a:fillRef>
-          <a:effectRef idx="2">
-            <a:schemeClr val="accent1"/>
-          </a:effectRef>
-          <a:fontRef idx="minor">
-            <a:schemeClr val="lt1"/>
-          </a:fontRef>
-        </p:style>
-        <p:txBody>
-          <a:bodyPr rtlCol="0" anchor="ctr"/>
-          <a:lstStyle/>
-          <a:p/>
-        </p:txBody>
-      </p:sp>
-      <p:sp>
-        <p:nvSpPr>
-          <p:cNvPr id="11" name="TextBox 10"/>
-          <p:cNvSpPr txBox="1"/>
-          <p:nvPr/>
-        </p:nvSpPr>
-        <p:spPr>
-          <a:xfrm>
-            <a:off x="8503920" y="1874519"/>
-            <a:ext cx="2926080" cy="365760"/>
-          </a:xfrm>
-          <a:prstGeom prst="rect">
-            <a:avLst/>
-          </a:prstGeom>
-          <a:noFill/>
-        </p:spPr>
-        <p:txBody>
-          <a:bodyPr wrap="square" anchor="t" lIns="0" rIns="0" tIns="0" bIns="0"/>
-          <a:lstStyle/>
-          <a:p>
-            <a:pPr algn="l"/>
-            <a:r>
-              <a:rPr sz="1300" b="1" i="0">
-                <a:solidFill>
-                  <a:srgbClr val="A9C8F0"/>
-                </a:solidFill>
-                <a:latin typeface="Calibri"/>
-              </a:rPr>
-              <a:t>REVISE THIS TOPIC</a:t>
-            </a:r>
-          </a:p>
-        </p:txBody>
-      </p:sp>
-      <p:sp>
-        <p:nvSpPr>
-          <p:cNvPr id="12" name="TextBox 11"/>
-          <p:cNvSpPr txBox="1"/>
-          <p:nvPr/>
-        </p:nvSpPr>
-        <p:spPr>
-          <a:xfrm>
-            <a:off x="8503920" y="2286000"/>
-            <a:ext cx="2926080" cy="548640"/>
-          </a:xfrm>
-          <a:prstGeom prst="rect">
-            <a:avLst/>
-          </a:prstGeom>
-          <a:noFill/>
-        </p:spPr>
-        <p:txBody>
-          <a:bodyPr wrap="square" anchor="t" lIns="0" rIns="0" tIns="0" bIns="0"/>
-          <a:lstStyle/>
-          <a:p>
-            <a:pPr algn="l"/>
-            <a:r>
-              <a:rPr sz="1400" b="0" i="0">
-                <a:solidFill>
-                  <a:srgbClr val="FFFFFF"/>
-                </a:solidFill>
-                <a:latin typeface="Calibri"/>
-              </a:rPr>
-              <a:t>Revision notes for this lesson are on the study wiki:</a:t>
-            </a:r>
-          </a:p>
-        </p:txBody>
-      </p:sp>
-      <p:sp>
-        <p:nvSpPr>
-          <p:cNvPr id="13" name="TextBox 12"/>
-          <p:cNvSpPr txBox="1"/>
-          <p:nvPr/>
-        </p:nvSpPr>
-        <p:spPr>
-          <a:xfrm>
-            <a:off x="8503920" y="2926080"/>
-            <a:ext cx="2926080" cy="1463040"/>
-          </a:xfrm>
-          <a:prstGeom prst="rect">
-            <a:avLst/>
-          </a:prstGeom>
-          <a:noFill/>
-        </p:spPr>
-        <p:txBody>
-          <a:bodyPr wrap="square" anchor="t" lIns="0" rIns="0" tIns="0" bIns="0"/>
-          <a:lstStyle/>
-          <a:p>
-            <a:pPr algn="l"/>
-            <a:r>
-              <a:rPr sz="2000" b="1" i="0">
-                <a:solidFill>
-                  <a:srgbClr val="FFFFFF"/>
-                </a:solidFill>
-                <a:latin typeface="Cambria"/>
-              </a:rPr>
-              <a:t>Engineering Core, Part 2</a:t>
-            </a:r>
-          </a:p>
-        </p:txBody>
-      </p:sp>
-      <p:sp>
-        <p:nvSpPr>
-          <p:cNvPr id="14" name="TextBox 13"/>
-          <p:cNvSpPr txBox="1"/>
-          <p:nvPr/>
-        </p:nvSpPr>
-        <p:spPr>
-          <a:xfrm>
-            <a:off x="548640" y="5669280"/>
-            <a:ext cx="11094415" cy="548640"/>
-          </a:xfrm>
-          <a:prstGeom prst="rect">
-            <a:avLst/>
-          </a:prstGeom>
-          <a:noFill/>
-        </p:spPr>
-        <p:txBody>
-          <a:bodyPr wrap="square" anchor="t" lIns="0" rIns="0" tIns="0" bIns="0"/>
-          <a:lstStyle/>
-          <a:p>
-            <a:pPr algn="l"/>
-            <a:r>
-              <a:rPr sz="1200" b="0" i="0">
-                <a:solidFill>
-                  <a:srgbClr val="A9C8F0"/>
-                </a:solidFill>
-                <a:latin typeface="Calibri"/>
-              </a:rPr>
-              <a:t>https://lana6478.github.io/T-level-Design-Development-Engineering-Manufacturing/#/01-core-component/02-engineering-core-part2.md</a:t>
+              <a:rPr sz="1300" b="0" i="1">
+                <a:solidFill>
+                  <a:srgbClr val="54595D"/>
+                </a:solidFill>
+                <a:latin typeface="Calibri"/>
+              </a:rPr>
+              <a:t>Answer on mini whiteboards or in your book. Answers are in the speaker notes.</a:t>
             </a:r>
           </a:p>
         </p:txBody>
